--- a/Projects/RETAIL SALES AND CUSTOMER ANALYTICS.pptx
+++ b/Projects/RETAIL SALES AND CUSTOMER ANALYTICS.pptx
@@ -4,6 +4,9 @@
   <p:sldMasterIdLst>
     <p:sldMasterId id="2147483648" r:id="rId1"/>
   </p:sldMasterIdLst>
+  <p:notesMasterIdLst>
+    <p:notesMasterId r:id="rId43"/>
+  </p:notesMasterIdLst>
   <p:sldIdLst>
     <p:sldId id="256" r:id="rId2"/>
     <p:sldId id="257" r:id="rId3"/>
@@ -27,24 +30,25 @@
     <p:sldId id="275" r:id="rId21"/>
     <p:sldId id="276" r:id="rId22"/>
     <p:sldId id="277" r:id="rId23"/>
-    <p:sldId id="278" r:id="rId24"/>
-    <p:sldId id="279" r:id="rId25"/>
-    <p:sldId id="280" r:id="rId26"/>
-    <p:sldId id="281" r:id="rId27"/>
-    <p:sldId id="282" r:id="rId28"/>
-    <p:sldId id="283" r:id="rId29"/>
-    <p:sldId id="284" r:id="rId30"/>
-    <p:sldId id="285" r:id="rId31"/>
-    <p:sldId id="286" r:id="rId32"/>
-    <p:sldId id="287" r:id="rId33"/>
-    <p:sldId id="288" r:id="rId34"/>
-    <p:sldId id="289" r:id="rId35"/>
-    <p:sldId id="290" r:id="rId36"/>
-    <p:sldId id="291" r:id="rId37"/>
-    <p:sldId id="292" r:id="rId38"/>
-    <p:sldId id="293" r:id="rId39"/>
-    <p:sldId id="294" r:id="rId40"/>
-    <p:sldId id="295" r:id="rId41"/>
+    <p:sldId id="296" r:id="rId24"/>
+    <p:sldId id="278" r:id="rId25"/>
+    <p:sldId id="279" r:id="rId26"/>
+    <p:sldId id="280" r:id="rId27"/>
+    <p:sldId id="281" r:id="rId28"/>
+    <p:sldId id="282" r:id="rId29"/>
+    <p:sldId id="283" r:id="rId30"/>
+    <p:sldId id="284" r:id="rId31"/>
+    <p:sldId id="285" r:id="rId32"/>
+    <p:sldId id="286" r:id="rId33"/>
+    <p:sldId id="287" r:id="rId34"/>
+    <p:sldId id="288" r:id="rId35"/>
+    <p:sldId id="289" r:id="rId36"/>
+    <p:sldId id="290" r:id="rId37"/>
+    <p:sldId id="291" r:id="rId38"/>
+    <p:sldId id="292" r:id="rId39"/>
+    <p:sldId id="293" r:id="rId40"/>
+    <p:sldId id="294" r:id="rId41"/>
+    <p:sldId id="295" r:id="rId42"/>
   </p:sldIdLst>
   <p:sldSz cx="12192000" cy="6858000"/>
   <p:notesSz cx="6858000" cy="9144000"/>
@@ -151,6 +155,440 @@
 </p:presentation>
 </file>
 
+<file path=ppt/notesMasters/notesMaster1.xml><?xml version="1.0" encoding="utf-8"?>
+<p:notesMaster xmlns:a="http://schemas.openxmlformats.org/drawingml/2006/main" xmlns:r="http://schemas.openxmlformats.org/officeDocument/2006/relationships" xmlns:p="http://schemas.openxmlformats.org/presentationml/2006/main">
+  <p:cSld>
+    <p:bg>
+      <p:bgRef idx="1001">
+        <a:schemeClr val="bg1"/>
+      </p:bgRef>
+    </p:bg>
+    <p:spTree>
+      <p:nvGrpSpPr>
+        <p:cNvPr id="1" name=""/>
+        <p:cNvGrpSpPr/>
+        <p:nvPr/>
+      </p:nvGrpSpPr>
+      <p:grpSpPr>
+        <a:xfrm>
+          <a:off x="0" y="0"/>
+          <a:ext cx="0" cy="0"/>
+          <a:chOff x="0" y="0"/>
+          <a:chExt cx="0" cy="0"/>
+        </a:xfrm>
+      </p:grpSpPr>
+      <p:sp>
+        <p:nvSpPr>
+          <p:cNvPr id="2" name="Header Placeholder 1"/>
+          <p:cNvSpPr>
+            <a:spLocks noGrp="1"/>
+          </p:cNvSpPr>
+          <p:nvPr>
+            <p:ph type="hdr" sz="quarter"/>
+          </p:nvPr>
+        </p:nvSpPr>
+        <p:spPr>
+          <a:xfrm>
+            <a:off x="0" y="0"/>
+            <a:ext cx="2971800" cy="458788"/>
+          </a:xfrm>
+          <a:prstGeom prst="rect">
+            <a:avLst/>
+          </a:prstGeom>
+        </p:spPr>
+        <p:txBody>
+          <a:bodyPr vert="horz" lIns="91440" tIns="45720" rIns="91440" bIns="45720" rtlCol="0"/>
+          <a:lstStyle>
+            <a:lvl1pPr algn="l">
+              <a:defRPr sz="1200"/>
+            </a:lvl1pPr>
+          </a:lstStyle>
+          <a:p>
+            <a:endParaRPr lang="en-US"/>
+          </a:p>
+        </p:txBody>
+      </p:sp>
+      <p:sp>
+        <p:nvSpPr>
+          <p:cNvPr id="3" name="Date Placeholder 2"/>
+          <p:cNvSpPr>
+            <a:spLocks noGrp="1"/>
+          </p:cNvSpPr>
+          <p:nvPr>
+            <p:ph type="dt" idx="1"/>
+          </p:nvPr>
+        </p:nvSpPr>
+        <p:spPr>
+          <a:xfrm>
+            <a:off x="3884613" y="0"/>
+            <a:ext cx="2971800" cy="458788"/>
+          </a:xfrm>
+          <a:prstGeom prst="rect">
+            <a:avLst/>
+          </a:prstGeom>
+        </p:spPr>
+        <p:txBody>
+          <a:bodyPr vert="horz" lIns="91440" tIns="45720" rIns="91440" bIns="45720" rtlCol="0"/>
+          <a:lstStyle>
+            <a:lvl1pPr algn="r">
+              <a:defRPr sz="1200"/>
+            </a:lvl1pPr>
+          </a:lstStyle>
+          <a:p>
+            <a:fld id="{3A9643E5-CC48-4E27-B325-83BCC8DDB357}" type="datetimeFigureOut">
+              <a:rPr lang="en-US" smtClean="0"/>
+              <a:t>9/30/2026</a:t>
+            </a:fld>
+            <a:endParaRPr lang="en-US"/>
+          </a:p>
+        </p:txBody>
+      </p:sp>
+      <p:sp>
+        <p:nvSpPr>
+          <p:cNvPr id="4" name="Slide Image Placeholder 3"/>
+          <p:cNvSpPr>
+            <a:spLocks noGrp="1" noRot="1" noChangeAspect="1"/>
+          </p:cNvSpPr>
+          <p:nvPr>
+            <p:ph type="sldImg" idx="2"/>
+          </p:nvPr>
+        </p:nvSpPr>
+        <p:spPr>
+          <a:xfrm>
+            <a:off x="685800" y="1143000"/>
+            <a:ext cx="5486400" cy="3086100"/>
+          </a:xfrm>
+          <a:prstGeom prst="rect">
+            <a:avLst/>
+          </a:prstGeom>
+          <a:noFill/>
+          <a:ln w="12700">
+            <a:solidFill>
+              <a:prstClr val="black"/>
+            </a:solidFill>
+          </a:ln>
+        </p:spPr>
+        <p:txBody>
+          <a:bodyPr vert="horz" lIns="91440" tIns="45720" rIns="91440" bIns="45720" rtlCol="0" anchor="ctr"/>
+          <a:lstStyle/>
+          <a:p>
+            <a:endParaRPr lang="en-US"/>
+          </a:p>
+        </p:txBody>
+      </p:sp>
+      <p:sp>
+        <p:nvSpPr>
+          <p:cNvPr id="5" name="Notes Placeholder 4"/>
+          <p:cNvSpPr>
+            <a:spLocks noGrp="1"/>
+          </p:cNvSpPr>
+          <p:nvPr>
+            <p:ph type="body" sz="quarter" idx="3"/>
+          </p:nvPr>
+        </p:nvSpPr>
+        <p:spPr>
+          <a:xfrm>
+            <a:off x="685800" y="4400550"/>
+            <a:ext cx="5486400" cy="3600450"/>
+          </a:xfrm>
+          <a:prstGeom prst="rect">
+            <a:avLst/>
+          </a:prstGeom>
+        </p:spPr>
+        <p:txBody>
+          <a:bodyPr vert="horz" lIns="91440" tIns="45720" rIns="91440" bIns="45720" rtlCol="0"/>
+          <a:lstStyle/>
+          <a:p>
+            <a:pPr lvl="0"/>
+            <a:r>
+              <a:rPr lang="en-US" smtClean="0"/>
+              <a:t>Edit Master text styles</a:t>
+            </a:r>
+          </a:p>
+          <a:p>
+            <a:pPr lvl="1"/>
+            <a:r>
+              <a:rPr lang="en-US" smtClean="0"/>
+              <a:t>Second level</a:t>
+            </a:r>
+          </a:p>
+          <a:p>
+            <a:pPr lvl="2"/>
+            <a:r>
+              <a:rPr lang="en-US" smtClean="0"/>
+              <a:t>Third level</a:t>
+            </a:r>
+          </a:p>
+          <a:p>
+            <a:pPr lvl="3"/>
+            <a:r>
+              <a:rPr lang="en-US" smtClean="0"/>
+              <a:t>Fourth level</a:t>
+            </a:r>
+          </a:p>
+          <a:p>
+            <a:pPr lvl="4"/>
+            <a:r>
+              <a:rPr lang="en-US" smtClean="0"/>
+              <a:t>Fifth level</a:t>
+            </a:r>
+            <a:endParaRPr lang="en-US"/>
+          </a:p>
+        </p:txBody>
+      </p:sp>
+      <p:sp>
+        <p:nvSpPr>
+          <p:cNvPr id="6" name="Footer Placeholder 5"/>
+          <p:cNvSpPr>
+            <a:spLocks noGrp="1"/>
+          </p:cNvSpPr>
+          <p:nvPr>
+            <p:ph type="ftr" sz="quarter" idx="4"/>
+          </p:nvPr>
+        </p:nvSpPr>
+        <p:spPr>
+          <a:xfrm>
+            <a:off x="0" y="8685213"/>
+            <a:ext cx="2971800" cy="458787"/>
+          </a:xfrm>
+          <a:prstGeom prst="rect">
+            <a:avLst/>
+          </a:prstGeom>
+        </p:spPr>
+        <p:txBody>
+          <a:bodyPr vert="horz" lIns="91440" tIns="45720" rIns="91440" bIns="45720" rtlCol="0" anchor="b"/>
+          <a:lstStyle>
+            <a:lvl1pPr algn="l">
+              <a:defRPr sz="1200"/>
+            </a:lvl1pPr>
+          </a:lstStyle>
+          <a:p>
+            <a:endParaRPr lang="en-US"/>
+          </a:p>
+        </p:txBody>
+      </p:sp>
+      <p:sp>
+        <p:nvSpPr>
+          <p:cNvPr id="7" name="Slide Number Placeholder 6"/>
+          <p:cNvSpPr>
+            <a:spLocks noGrp="1"/>
+          </p:cNvSpPr>
+          <p:nvPr>
+            <p:ph type="sldNum" sz="quarter" idx="5"/>
+          </p:nvPr>
+        </p:nvSpPr>
+        <p:spPr>
+          <a:xfrm>
+            <a:off x="3884613" y="8685213"/>
+            <a:ext cx="2971800" cy="458787"/>
+          </a:xfrm>
+          <a:prstGeom prst="rect">
+            <a:avLst/>
+          </a:prstGeom>
+        </p:spPr>
+        <p:txBody>
+          <a:bodyPr vert="horz" lIns="91440" tIns="45720" rIns="91440" bIns="45720" rtlCol="0" anchor="b"/>
+          <a:lstStyle>
+            <a:lvl1pPr algn="r">
+              <a:defRPr sz="1200"/>
+            </a:lvl1pPr>
+          </a:lstStyle>
+          <a:p>
+            <a:fld id="{40053350-EB00-4593-AFC7-77AFE71AAB8E}" type="slidenum">
+              <a:rPr lang="en-US" smtClean="0"/>
+              <a:t>‹#›</a:t>
+            </a:fld>
+            <a:endParaRPr lang="en-US"/>
+          </a:p>
+        </p:txBody>
+      </p:sp>
+    </p:spTree>
+    <p:extLst>
+      <p:ext uri="{BB962C8B-B14F-4D97-AF65-F5344CB8AC3E}">
+        <p14:creationId xmlns:p14="http://schemas.microsoft.com/office/powerpoint/2010/main" val="2265616428"/>
+      </p:ext>
+    </p:extLst>
+  </p:cSld>
+  <p:clrMap bg1="lt1" tx1="dk1" bg2="lt2" tx2="dk2" accent1="accent1" accent2="accent2" accent3="accent3" accent4="accent4" accent5="accent5" accent6="accent6" hlink="hlink" folHlink="folHlink"/>
+  <p:notesStyle>
+    <a:lvl1pPr marL="0" algn="l" defTabSz="914400" rtl="0" eaLnBrk="1" latinLnBrk="0" hangingPunct="1">
+      <a:defRPr sz="1200" kern="1200">
+        <a:solidFill>
+          <a:schemeClr val="tx1"/>
+        </a:solidFill>
+        <a:latin typeface="+mn-lt"/>
+        <a:ea typeface="+mn-ea"/>
+        <a:cs typeface="+mn-cs"/>
+      </a:defRPr>
+    </a:lvl1pPr>
+    <a:lvl2pPr marL="457200" algn="l" defTabSz="914400" rtl="0" eaLnBrk="1" latinLnBrk="0" hangingPunct="1">
+      <a:defRPr sz="1200" kern="1200">
+        <a:solidFill>
+          <a:schemeClr val="tx1"/>
+        </a:solidFill>
+        <a:latin typeface="+mn-lt"/>
+        <a:ea typeface="+mn-ea"/>
+        <a:cs typeface="+mn-cs"/>
+      </a:defRPr>
+    </a:lvl2pPr>
+    <a:lvl3pPr marL="914400" algn="l" defTabSz="914400" rtl="0" eaLnBrk="1" latinLnBrk="0" hangingPunct="1">
+      <a:defRPr sz="1200" kern="1200">
+        <a:solidFill>
+          <a:schemeClr val="tx1"/>
+        </a:solidFill>
+        <a:latin typeface="+mn-lt"/>
+        <a:ea typeface="+mn-ea"/>
+        <a:cs typeface="+mn-cs"/>
+      </a:defRPr>
+    </a:lvl3pPr>
+    <a:lvl4pPr marL="1371600" algn="l" defTabSz="914400" rtl="0" eaLnBrk="1" latinLnBrk="0" hangingPunct="1">
+      <a:defRPr sz="1200" kern="1200">
+        <a:solidFill>
+          <a:schemeClr val="tx1"/>
+        </a:solidFill>
+        <a:latin typeface="+mn-lt"/>
+        <a:ea typeface="+mn-ea"/>
+        <a:cs typeface="+mn-cs"/>
+      </a:defRPr>
+    </a:lvl4pPr>
+    <a:lvl5pPr marL="1828800" algn="l" defTabSz="914400" rtl="0" eaLnBrk="1" latinLnBrk="0" hangingPunct="1">
+      <a:defRPr sz="1200" kern="1200">
+        <a:solidFill>
+          <a:schemeClr val="tx1"/>
+        </a:solidFill>
+        <a:latin typeface="+mn-lt"/>
+        <a:ea typeface="+mn-ea"/>
+        <a:cs typeface="+mn-cs"/>
+      </a:defRPr>
+    </a:lvl5pPr>
+    <a:lvl6pPr marL="2286000" algn="l" defTabSz="914400" rtl="0" eaLnBrk="1" latinLnBrk="0" hangingPunct="1">
+      <a:defRPr sz="1200" kern="1200">
+        <a:solidFill>
+          <a:schemeClr val="tx1"/>
+        </a:solidFill>
+        <a:latin typeface="+mn-lt"/>
+        <a:ea typeface="+mn-ea"/>
+        <a:cs typeface="+mn-cs"/>
+      </a:defRPr>
+    </a:lvl6pPr>
+    <a:lvl7pPr marL="2743200" algn="l" defTabSz="914400" rtl="0" eaLnBrk="1" latinLnBrk="0" hangingPunct="1">
+      <a:defRPr sz="1200" kern="1200">
+        <a:solidFill>
+          <a:schemeClr val="tx1"/>
+        </a:solidFill>
+        <a:latin typeface="+mn-lt"/>
+        <a:ea typeface="+mn-ea"/>
+        <a:cs typeface="+mn-cs"/>
+      </a:defRPr>
+    </a:lvl7pPr>
+    <a:lvl8pPr marL="3200400" algn="l" defTabSz="914400" rtl="0" eaLnBrk="1" latinLnBrk="0" hangingPunct="1">
+      <a:defRPr sz="1200" kern="1200">
+        <a:solidFill>
+          <a:schemeClr val="tx1"/>
+        </a:solidFill>
+        <a:latin typeface="+mn-lt"/>
+        <a:ea typeface="+mn-ea"/>
+        <a:cs typeface="+mn-cs"/>
+      </a:defRPr>
+    </a:lvl8pPr>
+    <a:lvl9pPr marL="3657600" algn="l" defTabSz="914400" rtl="0" eaLnBrk="1" latinLnBrk="0" hangingPunct="1">
+      <a:defRPr sz="1200" kern="1200">
+        <a:solidFill>
+          <a:schemeClr val="tx1"/>
+        </a:solidFill>
+        <a:latin typeface="+mn-lt"/>
+        <a:ea typeface="+mn-ea"/>
+        <a:cs typeface="+mn-cs"/>
+      </a:defRPr>
+    </a:lvl9pPr>
+  </p:notesStyle>
+</p:notesMaster>
+</file>
+
+<file path=ppt/notesSlides/notesSlide1.xml><?xml version="1.0" encoding="utf-8"?>
+<p:notes xmlns:a="http://schemas.openxmlformats.org/drawingml/2006/main" xmlns:r="http://schemas.openxmlformats.org/officeDocument/2006/relationships" xmlns:p="http://schemas.openxmlformats.org/presentationml/2006/main">
+  <p:cSld>
+    <p:spTree>
+      <p:nvGrpSpPr>
+        <p:cNvPr id="1" name=""/>
+        <p:cNvGrpSpPr/>
+        <p:nvPr/>
+      </p:nvGrpSpPr>
+      <p:grpSpPr>
+        <a:xfrm>
+          <a:off x="0" y="0"/>
+          <a:ext cx="0" cy="0"/>
+          <a:chOff x="0" y="0"/>
+          <a:chExt cx="0" cy="0"/>
+        </a:xfrm>
+      </p:grpSpPr>
+      <p:sp>
+        <p:nvSpPr>
+          <p:cNvPr id="2" name="Slide Image Placeholder 1"/>
+          <p:cNvSpPr>
+            <a:spLocks noGrp="1" noRot="1" noChangeAspect="1"/>
+          </p:cNvSpPr>
+          <p:nvPr>
+            <p:ph type="sldImg"/>
+          </p:nvPr>
+        </p:nvSpPr>
+        <p:spPr/>
+      </p:sp>
+      <p:sp>
+        <p:nvSpPr>
+          <p:cNvPr id="3" name="Notes Placeholder 2"/>
+          <p:cNvSpPr>
+            <a:spLocks noGrp="1"/>
+          </p:cNvSpPr>
+          <p:nvPr>
+            <p:ph type="body" idx="1"/>
+          </p:nvPr>
+        </p:nvSpPr>
+        <p:spPr/>
+        <p:txBody>
+          <a:bodyPr/>
+          <a:lstStyle/>
+          <a:p>
+            <a:endParaRPr lang="en-US" dirty="0"/>
+          </a:p>
+        </p:txBody>
+      </p:sp>
+      <p:sp>
+        <p:nvSpPr>
+          <p:cNvPr id="4" name="Slide Number Placeholder 3"/>
+          <p:cNvSpPr>
+            <a:spLocks noGrp="1"/>
+          </p:cNvSpPr>
+          <p:nvPr>
+            <p:ph type="sldNum" sz="quarter" idx="10"/>
+          </p:nvPr>
+        </p:nvSpPr>
+        <p:spPr/>
+        <p:txBody>
+          <a:bodyPr/>
+          <a:lstStyle/>
+          <a:p>
+            <a:fld id="{40053350-EB00-4593-AFC7-77AFE71AAB8E}" type="slidenum">
+              <a:rPr lang="en-US" smtClean="0"/>
+              <a:t>23</a:t>
+            </a:fld>
+            <a:endParaRPr lang="en-US"/>
+          </a:p>
+        </p:txBody>
+      </p:sp>
+    </p:spTree>
+    <p:extLst>
+      <p:ext uri="{BB962C8B-B14F-4D97-AF65-F5344CB8AC3E}">
+        <p14:creationId xmlns:p14="http://schemas.microsoft.com/office/powerpoint/2010/main" val="4046009727"/>
+      </p:ext>
+    </p:extLst>
+  </p:cSld>
+  <p:clrMapOvr>
+    <a:masterClrMapping/>
+  </p:clrMapOvr>
+</p:notes>
+</file>
+
 <file path=ppt/slideLayouts/slideLayout1.xml><?xml version="1.0" encoding="utf-8"?>
 <p:sldLayout xmlns:a="http://schemas.openxmlformats.org/drawingml/2006/main" xmlns:r="http://schemas.openxmlformats.org/officeDocument/2006/relationships" xmlns:p="http://schemas.openxmlformats.org/presentationml/2006/main" type="title" preserve="1">
   <p:cSld name="Title Slide">
@@ -282,7 +720,7 @@
           <a:p>
             <a:fld id="{957A6E4E-18F6-474E-BD33-86DEF353958C}" type="datetimeFigureOut">
               <a:rPr lang="en-US" smtClean="0"/>
-              <a:t>9/22/2026</a:t>
+              <a:t>9/30/2026</a:t>
             </a:fld>
             <a:endParaRPr lang="en-US"/>
           </a:p>
@@ -452,7 +890,7 @@
           <a:p>
             <a:fld id="{957A6E4E-18F6-474E-BD33-86DEF353958C}" type="datetimeFigureOut">
               <a:rPr lang="en-US" smtClean="0"/>
-              <a:t>9/22/2026</a:t>
+              <a:t>9/30/2026</a:t>
             </a:fld>
             <a:endParaRPr lang="en-US"/>
           </a:p>
@@ -632,7 +1070,7 @@
           <a:p>
             <a:fld id="{957A6E4E-18F6-474E-BD33-86DEF353958C}" type="datetimeFigureOut">
               <a:rPr lang="en-US" smtClean="0"/>
-              <a:t>9/22/2026</a:t>
+              <a:t>9/30/2026</a:t>
             </a:fld>
             <a:endParaRPr lang="en-US"/>
           </a:p>
@@ -802,7 +1240,7 @@
           <a:p>
             <a:fld id="{957A6E4E-18F6-474E-BD33-86DEF353958C}" type="datetimeFigureOut">
               <a:rPr lang="en-US" smtClean="0"/>
-              <a:t>9/22/2026</a:t>
+              <a:t>9/30/2026</a:t>
             </a:fld>
             <a:endParaRPr lang="en-US"/>
           </a:p>
@@ -1048,7 +1486,7 @@
           <a:p>
             <a:fld id="{957A6E4E-18F6-474E-BD33-86DEF353958C}" type="datetimeFigureOut">
               <a:rPr lang="en-US" smtClean="0"/>
-              <a:t>9/22/2026</a:t>
+              <a:t>9/30/2026</a:t>
             </a:fld>
             <a:endParaRPr lang="en-US"/>
           </a:p>
@@ -1280,7 +1718,7 @@
           <a:p>
             <a:fld id="{957A6E4E-18F6-474E-BD33-86DEF353958C}" type="datetimeFigureOut">
               <a:rPr lang="en-US" smtClean="0"/>
-              <a:t>9/22/2026</a:t>
+              <a:t>9/30/2026</a:t>
             </a:fld>
             <a:endParaRPr lang="en-US"/>
           </a:p>
@@ -1647,7 +2085,7 @@
           <a:p>
             <a:fld id="{957A6E4E-18F6-474E-BD33-86DEF353958C}" type="datetimeFigureOut">
               <a:rPr lang="en-US" smtClean="0"/>
-              <a:t>9/22/2026</a:t>
+              <a:t>9/30/2026</a:t>
             </a:fld>
             <a:endParaRPr lang="en-US"/>
           </a:p>
@@ -1765,7 +2203,7 @@
           <a:p>
             <a:fld id="{957A6E4E-18F6-474E-BD33-86DEF353958C}" type="datetimeFigureOut">
               <a:rPr lang="en-US" smtClean="0"/>
-              <a:t>9/22/2026</a:t>
+              <a:t>9/30/2026</a:t>
             </a:fld>
             <a:endParaRPr lang="en-US"/>
           </a:p>
@@ -1860,7 +2298,7 @@
           <a:p>
             <a:fld id="{957A6E4E-18F6-474E-BD33-86DEF353958C}" type="datetimeFigureOut">
               <a:rPr lang="en-US" smtClean="0"/>
-              <a:t>9/22/2026</a:t>
+              <a:t>9/30/2026</a:t>
             </a:fld>
             <a:endParaRPr lang="en-US"/>
           </a:p>
@@ -2137,7 +2575,7 @@
           <a:p>
             <a:fld id="{957A6E4E-18F6-474E-BD33-86DEF353958C}" type="datetimeFigureOut">
               <a:rPr lang="en-US" smtClean="0"/>
-              <a:t>9/22/2026</a:t>
+              <a:t>9/30/2026</a:t>
             </a:fld>
             <a:endParaRPr lang="en-US"/>
           </a:p>
@@ -2390,7 +2828,7 @@
           <a:p>
             <a:fld id="{957A6E4E-18F6-474E-BD33-86DEF353958C}" type="datetimeFigureOut">
               <a:rPr lang="en-US" smtClean="0"/>
-              <a:t>9/22/2026</a:t>
+              <a:t>9/30/2026</a:t>
             </a:fld>
             <a:endParaRPr lang="en-US"/>
           </a:p>
@@ -2603,7 +3041,7 @@
           <a:p>
             <a:fld id="{957A6E4E-18F6-474E-BD33-86DEF353958C}" type="datetimeFigureOut">
               <a:rPr lang="en-US" smtClean="0"/>
-              <a:t>9/22/2026</a:t>
+              <a:t>9/30/2026</a:t>
             </a:fld>
             <a:endParaRPr lang="en-US"/>
           </a:p>
@@ -3290,13 +3728,8 @@
           <a:p>
             <a:r>
               <a:rPr lang="en-US" dirty="0"/>
-              <a:t>E</a:t>
-            </a:r>
-            <a:r>
-              <a:rPr lang="en-US" dirty="0" smtClean="0"/>
-              <a:t>xplanation</a:t>
-            </a:r>
-            <a:endParaRPr lang="en-US" dirty="0"/>
+              <a:t>Key findings</a:t>
+            </a:r>
           </a:p>
         </p:txBody>
       </p:sp>
@@ -3318,7 +3751,7 @@
         </p:spPr>
         <p:txBody>
           <a:bodyPr>
-            <a:normAutofit fontScale="92500" lnSpcReduction="10000"/>
+            <a:normAutofit fontScale="70000" lnSpcReduction="20000"/>
           </a:bodyPr>
           <a:lstStyle/>
           <a:p>
@@ -3326,16 +3759,12 @@
               <a:buNone/>
             </a:pPr>
             <a:r>
+              <a:rPr lang="en-US" dirty="0"/>
+              <a:t>. 1. The dataset contains 2,000 transaction records, shown by the count of 2,000 for the numerical variables</a:t>
+            </a:r>
+            <a:r>
               <a:rPr lang="en-US" dirty="0" smtClean="0"/>
               <a:t>.</a:t>
-            </a:r>
-            <a:r>
-              <a:rPr lang="en-US" dirty="0" err="1" smtClean="0"/>
-              <a:t>df.describe</a:t>
-            </a:r>
-            <a:r>
-              <a:rPr lang="en-US" dirty="0" smtClean="0"/>
-              <a:t>() provides a statistical summary of the numerical data, including the count, mean, standard deviation, minimum, maximum, and quartile values.</a:t>
             </a:r>
           </a:p>
           <a:p>
@@ -3343,12 +3772,16 @@
               <a:buNone/>
             </a:pPr>
             <a:r>
-              <a:rPr lang="en-US" dirty="0"/>
+              <a:rPr lang="en-US" dirty="0" smtClean="0"/>
+              <a:t>2</a:t>
+            </a:r>
+            <a:r>
+              <a:rPr lang="en-US" dirty="0"/>
+              <a:t>. Customer ages vary considerably, with ages ranging from approximately 18 to 70 years in the displayed summary</a:t>
+            </a:r>
+            <a:r>
+              <a:rPr lang="en-US" dirty="0" smtClean="0"/>
               <a:t>.</a:t>
-            </a:r>
-            <a:r>
-              <a:rPr lang="en-US" dirty="0" smtClean="0"/>
-              <a:t>It helps identify patterns and variations in the dataset, such as the typical customer age and the range of ages represented.</a:t>
             </a:r>
           </a:p>
           <a:p>
@@ -3356,12 +3789,54 @@
               <a:buNone/>
             </a:pPr>
             <a:r>
-              <a:rPr lang="en-US" dirty="0"/>
+              <a:rPr lang="en-US" dirty="0" smtClean="0"/>
+              <a:t>3</a:t>
+            </a:r>
+            <a:r>
+              <a:rPr lang="en-US" dirty="0"/>
+              <a:t>. The average customer age is around the mid-40s, indicating that the dataset represents a broad range of adult customers</a:t>
+            </a:r>
+            <a:r>
+              <a:rPr lang="en-US" dirty="0" smtClean="0"/>
               <a:t>.</a:t>
             </a:r>
-            <a:r>
-              <a:rPr lang="en-US" dirty="0" smtClean="0"/>
-              <a:t>It gives an initial understanding of the dataset by showing its overall distribution and helping identify unusual or extreme values.</a:t>
+          </a:p>
+          <a:p>
+            <a:pPr marL="0" indent="0">
+              <a:buNone/>
+            </a:pPr>
+            <a:r>
+              <a:rPr lang="en-US" dirty="0" smtClean="0"/>
+              <a:t>4</a:t>
+            </a:r>
+            <a:r>
+              <a:rPr lang="en-US" dirty="0"/>
+              <a:t>. The output shows variation in the numerical data, including differences between the minimum, maximum, and average values</a:t>
+            </a:r>
+            <a:r>
+              <a:rPr lang="en-US" dirty="0" smtClean="0"/>
+              <a:t>.</a:t>
+            </a:r>
+          </a:p>
+          <a:p>
+            <a:pPr marL="0" indent="0">
+              <a:buNone/>
+            </a:pPr>
+            <a:r>
+              <a:rPr lang="en-US" dirty="0" smtClean="0"/>
+              <a:t>5</a:t>
+            </a:r>
+            <a:r>
+              <a:rPr lang="en-US" dirty="0"/>
+              <a:t>. Some numerical fields contain missing values, shown where the output displays </a:t>
+            </a:r>
+            <a:r>
+              <a:rPr lang="en-US" dirty="0" err="1"/>
+              <a:t>NaN</a:t>
+            </a:r>
+            <a:r>
+              <a:rPr lang="en-US" dirty="0"/>
+              <a:t>, meaning those records are incomplete.</a:t>
             </a:r>
             <a:endParaRPr lang="en-US" dirty="0"/>
           </a:p>
@@ -3689,10 +4164,9 @@
           <a:lstStyle/>
           <a:p>
             <a:r>
-              <a:rPr lang="en-US" dirty="0" smtClean="0"/>
-              <a:t>Explanation</a:t>
-            </a:r>
-            <a:endParaRPr lang="en-US" dirty="0"/>
+              <a:rPr lang="en-US" dirty="0"/>
+              <a:t>Key findings</a:t>
+            </a:r>
           </a:p>
         </p:txBody>
       </p:sp>
@@ -3714,29 +4188,93 @@
         </p:spPr>
         <p:txBody>
           <a:bodyPr>
-            <a:normAutofit fontScale="85000" lnSpcReduction="20000"/>
+            <a:normAutofit fontScale="62500" lnSpcReduction="20000"/>
           </a:bodyPr>
           <a:lstStyle/>
           <a:p>
             <a:r>
-              <a:rPr lang="en-US" dirty="0" err="1" smtClean="0"/>
-              <a:t>df.isnull</a:t>
-            </a:r>
-            <a:r>
-              <a:rPr lang="en-US" dirty="0" smtClean="0"/>
-              <a:t>().sum() checks the dataset for missing values and counts how many are present in each column.</a:t>
-            </a:r>
-          </a:p>
-          <a:p>
-            <a:r>
-              <a:rPr lang="en-US" dirty="0" smtClean="0"/>
-              <a:t>It identifies columns that need cleaning, such as Category, Unit Price, Quantity, or Customer Type, where the output shows missing-value counts.</a:t>
-            </a:r>
-          </a:p>
-          <a:p>
-            <a:r>
-              <a:rPr lang="en-US" dirty="0" smtClean="0"/>
-              <a:t>The missing values can then be corrected using appropriate methods such as filling numerical values with the mean/median, filling categorical values with the mode, or removing rows when appropriate</a:t>
+              <a:rPr lang="en-US" dirty="0"/>
+              <a:t>Month and Quarter have the highest missing values, with 2,000 missing records each. This indicates these fields have the largest data gaps</a:t>
+            </a:r>
+            <a:r>
+              <a:rPr lang="en-US" dirty="0" smtClean="0"/>
+              <a:t>.</a:t>
+            </a:r>
+          </a:p>
+          <a:p>
+            <a:r>
+              <a:rPr lang="en-US" dirty="0" smtClean="0"/>
+              <a:t>Total </a:t>
+            </a:r>
+            <a:r>
+              <a:rPr lang="en-US" dirty="0"/>
+              <a:t>Sales, Cost, and Profit each have 1,137 missing values. This is important because these are key financial fields needed for sales analysis</a:t>
+            </a:r>
+            <a:r>
+              <a:rPr lang="en-US" dirty="0" smtClean="0"/>
+              <a:t>.</a:t>
+            </a:r>
+          </a:p>
+          <a:p>
+            <a:r>
+              <a:rPr lang="en-US" dirty="0" smtClean="0"/>
+              <a:t>Quantity </a:t>
+            </a:r>
+            <a:r>
+              <a:rPr lang="en-US" dirty="0"/>
+              <a:t>and Stock Level each have 685 missing values, while Unit Price has 662. These missing values can affect calculations involving products and inventory</a:t>
+            </a:r>
+            <a:r>
+              <a:rPr lang="en-US" dirty="0" smtClean="0"/>
+              <a:t>.</a:t>
+            </a:r>
+          </a:p>
+          <a:p>
+            <a:r>
+              <a:rPr lang="en-US" dirty="0" smtClean="0"/>
+              <a:t>Several </a:t>
+            </a:r>
+            <a:r>
+              <a:rPr lang="en-US" dirty="0"/>
+              <a:t>other fields also contain missing data, including Category (483), Customer Type (648), Payment Method (420), Return Status (663), and Feedback (504</a:t>
+            </a:r>
+            <a:r>
+              <a:rPr lang="en-US" dirty="0" smtClean="0"/>
+              <a:t>).</a:t>
+            </a:r>
+          </a:p>
+          <a:p>
+            <a:r>
+              <a:rPr lang="en-US" dirty="0" smtClean="0"/>
+              <a:t>Some </a:t>
+            </a:r>
+            <a:r>
+              <a:rPr lang="en-US" dirty="0"/>
+              <a:t>fields have no missing values at all, including Branch, </a:t>
+            </a:r>
+            <a:r>
+              <a:rPr lang="en-US" dirty="0" err="1"/>
+              <a:t>Sales_Date</a:t>
+            </a:r>
+            <a:r>
+              <a:rPr lang="en-US" dirty="0"/>
+              <a:t>, </a:t>
+            </a:r>
+            <a:r>
+              <a:rPr lang="en-US" dirty="0" err="1"/>
+              <a:t>Product_ID</a:t>
+            </a:r>
+            <a:r>
+              <a:rPr lang="en-US" dirty="0"/>
+              <a:t>, </a:t>
+            </a:r>
+            <a:r>
+              <a:rPr lang="en-US" dirty="0" err="1"/>
+              <a:t>Product_Name</a:t>
+            </a:r>
+            <a:r>
+              <a:rPr lang="en-US" dirty="0"/>
+              <a:t>, Brand, Tax, Salesperson, Membership, Region, and Year.</a:t>
             </a:r>
             <a:endParaRPr lang="en-US" dirty="0"/>
           </a:p>
@@ -3972,10 +4510,9 @@
           <a:lstStyle/>
           <a:p>
             <a:r>
-              <a:rPr lang="en-US" dirty="0" smtClean="0"/>
-              <a:t>Explanation</a:t>
-            </a:r>
-            <a:endParaRPr lang="en-US" dirty="0"/>
+              <a:rPr lang="en-US" dirty="0"/>
+              <a:t>Key findings</a:t>
+            </a:r>
           </a:p>
         </p:txBody>
       </p:sp>
@@ -3997,41 +4534,69 @@
         </p:spPr>
         <p:txBody>
           <a:bodyPr>
-            <a:normAutofit/>
+            <a:normAutofit fontScale="77500" lnSpcReduction="20000"/>
           </a:bodyPr>
           <a:lstStyle/>
           <a:p>
             <a:r>
-              <a:rPr lang="en-US" dirty="0" smtClean="0"/>
-              <a:t>1. Identifies missing values in each column of the retail sales dataset using </a:t>
-            </a:r>
-            <a:r>
-              <a:rPr lang="en-US" dirty="0" err="1" smtClean="0"/>
-              <a:t>isnull</a:t>
-            </a:r>
-            <a:r>
-              <a:rPr lang="en-US" dirty="0" smtClean="0"/>
-              <a:t>().sum().</a:t>
-            </a:r>
-          </a:p>
-          <a:p>
-            <a:r>
-              <a:rPr lang="en-US" dirty="0" smtClean="0"/>
-              <a:t>2. Shows the number of missing values for columns such as </a:t>
-            </a:r>
-            <a:r>
-              <a:rPr lang="en-US" dirty="0" err="1" smtClean="0"/>
-              <a:t>Total_Sales</a:t>
-            </a:r>
-            <a:r>
-              <a:rPr lang="en-US" dirty="0" smtClean="0"/>
-              <a:t>, Cost, Profit, Month, and Quarter.</a:t>
-            </a:r>
-          </a:p>
-          <a:p>
-            <a:r>
-              <a:rPr lang="en-US" dirty="0" smtClean="0"/>
-              <a:t>3. Helps guide data cleaning by showing which columns need their missing values corrected or filled before analysis.</a:t>
+              <a:rPr lang="en-US" dirty="0"/>
+              <a:t>1. The output now shows only columns that contain missing values; columns with 0 missing values have been excluded</a:t>
+            </a:r>
+            <a:r>
+              <a:rPr lang="en-US" dirty="0" smtClean="0"/>
+              <a:t>.</a:t>
+            </a:r>
+          </a:p>
+          <a:p>
+            <a:r>
+              <a:rPr lang="en-US" dirty="0" smtClean="0"/>
+              <a:t>2</a:t>
+            </a:r>
+            <a:r>
+              <a:rPr lang="en-US" dirty="0"/>
+              <a:t>. Month and Quarter have the highest number of missing values, with 2,000 missing records each</a:t>
+            </a:r>
+            <a:r>
+              <a:rPr lang="en-US" dirty="0" smtClean="0"/>
+              <a:t>.</a:t>
+            </a:r>
+          </a:p>
+          <a:p>
+            <a:r>
+              <a:rPr lang="en-US" dirty="0" smtClean="0"/>
+              <a:t>3</a:t>
+            </a:r>
+            <a:r>
+              <a:rPr lang="en-US" dirty="0"/>
+              <a:t>. Total Sales, Cost, and Profit each have 1,137 missing values, indicating substantial gaps in the financial information</a:t>
+            </a:r>
+            <a:r>
+              <a:rPr lang="en-US" dirty="0" smtClean="0"/>
+              <a:t>.</a:t>
+            </a:r>
+          </a:p>
+          <a:p>
+            <a:r>
+              <a:rPr lang="en-US" dirty="0" smtClean="0"/>
+              <a:t>4</a:t>
+            </a:r>
+            <a:r>
+              <a:rPr lang="en-US" dirty="0"/>
+              <a:t>. Quantity and Stock Level each have 685 missing values, while Delivery Method has 675</a:t>
+            </a:r>
+            <a:r>
+              <a:rPr lang="en-US" dirty="0" smtClean="0"/>
+              <a:t>.</a:t>
+            </a:r>
+          </a:p>
+          <a:p>
+            <a:r>
+              <a:rPr lang="en-US" dirty="0" smtClean="0"/>
+              <a:t>5</a:t>
+            </a:r>
+            <a:r>
+              <a:rPr lang="en-US" dirty="0"/>
+              <a:t>. Customer information also has missing records, including Customer Type (648), Customer Gender (412), and Customer Satisfaction (335).</a:t>
             </a:r>
             <a:endParaRPr lang="en-US" dirty="0"/>
           </a:p>
@@ -4217,10 +4782,9 @@
           <a:lstStyle/>
           <a:p>
             <a:r>
-              <a:rPr lang="en-US" dirty="0" smtClean="0"/>
-              <a:t>Explanation</a:t>
-            </a:r>
-            <a:endParaRPr lang="en-US" dirty="0"/>
+              <a:rPr lang="en-US" dirty="0"/>
+              <a:t>Key findings</a:t>
+            </a:r>
           </a:p>
         </p:txBody>
       </p:sp>
@@ -4241,57 +4805,51 @@
           </a:xfrm>
         </p:spPr>
         <p:txBody>
-          <a:bodyPr/>
+          <a:bodyPr>
+            <a:normAutofit fontScale="92500"/>
+          </a:bodyPr>
           <a:lstStyle/>
           <a:p>
             <a:pPr marL="514350" indent="-514350">
               <a:buAutoNum type="arabicPeriod"/>
             </a:pPr>
             <a:r>
-              <a:rPr lang="en-US" dirty="0" smtClean="0"/>
-              <a:t>Checks for duplicate records using </a:t>
-            </a:r>
-            <a:r>
-              <a:rPr lang="en-US" dirty="0" err="1" smtClean="0"/>
-              <a:t>df.duplicated</a:t>
-            </a:r>
-            <a:r>
-              <a:rPr lang="en-US" dirty="0" smtClean="0"/>
-              <a:t>().sum().</a:t>
-            </a:r>
-          </a:p>
-          <a:p>
-            <a:pPr marL="0" indent="0">
-              <a:buNone/>
+              <a:rPr lang="en-US" dirty="0"/>
+              <a:t>There are 0 duplicate transaction records in the dataset</a:t>
+            </a:r>
+            <a:r>
+              <a:rPr lang="en-US" dirty="0" smtClean="0"/>
+              <a:t>.</a:t>
+            </a:r>
+          </a:p>
+          <a:p>
+            <a:pPr marL="514350" indent="-514350">
+              <a:buAutoNum type="arabicPeriod"/>
             </a:pPr>
             <a:r>
               <a:rPr lang="en-US" dirty="0" smtClean="0"/>
-              <a:t>2. Displays the duplicate transactions with </a:t>
-            </a:r>
-            <a:r>
-              <a:rPr lang="en-US" dirty="0" err="1" smtClean="0"/>
-              <a:t>df</a:t>
-            </a:r>
-            <a:r>
-              <a:rPr lang="en-US" dirty="0" smtClean="0"/>
-              <a:t>[</a:t>
-            </a:r>
-            <a:r>
-              <a:rPr lang="en-US" dirty="0" err="1" smtClean="0"/>
-              <a:t>df.duplicated</a:t>
-            </a:r>
-            <a:r>
-              <a:rPr lang="en-US" dirty="0" smtClean="0"/>
-              <a:t>()].</a:t>
-            </a:r>
-          </a:p>
-          <a:p>
-            <a:pPr marL="0" indent="0">
-              <a:buNone/>
+              <a:t>No </a:t>
+            </a:r>
+            <a:r>
+              <a:rPr lang="en-US" dirty="0"/>
+              <a:t>duplicate transactions were found, so there are no repeated records affecting the sales data</a:t>
+            </a:r>
+            <a:r>
+              <a:rPr lang="en-US" dirty="0" smtClean="0"/>
+              <a:t>.</a:t>
+            </a:r>
+          </a:p>
+          <a:p>
+            <a:pPr marL="514350" indent="-514350">
+              <a:buAutoNum type="arabicPeriod"/>
             </a:pPr>
             <a:r>
               <a:rPr lang="en-US" dirty="0" smtClean="0"/>
-              <a:t>3. Confirms whether duplicates exist so they can be removed while keeping the valid sales records.</a:t>
+              <a:t>All </a:t>
+            </a:r>
+            <a:r>
+              <a:rPr lang="en-US" dirty="0"/>
+              <a:t>transaction records are unique, meaning the existing sales information can be retained without removing any duplicate records.</a:t>
             </a:r>
             <a:endParaRPr lang="en-US" dirty="0"/>
           </a:p>
@@ -4478,7 +5036,7 @@
           <a:p>
             <a:r>
               <a:rPr lang="en-US" dirty="0" smtClean="0"/>
-              <a:t>Explanation</a:t>
+              <a:t>Key findings</a:t>
             </a:r>
             <a:endParaRPr lang="en-US" dirty="0"/>
           </a:p>
@@ -4502,73 +5060,160 @@
         </p:spPr>
         <p:txBody>
           <a:bodyPr>
-            <a:normAutofit fontScale="92500" lnSpcReduction="10000"/>
+            <a:normAutofit fontScale="70000" lnSpcReduction="20000"/>
           </a:bodyPr>
           <a:lstStyle/>
           <a:p>
             <a:r>
-              <a:rPr lang="en-US" dirty="0" smtClean="0"/>
-              <a:t>1. Check the age </a:t>
-            </a:r>
-            <a:r>
-              <a:rPr lang="en-US" dirty="0" err="1" smtClean="0"/>
-              <a:t>dataUse</a:t>
-            </a:r>
-            <a:r>
-              <a:rPr lang="en-US" dirty="0" smtClean="0"/>
-              <a:t> describe() to summarize </a:t>
-            </a:r>
-            <a:r>
-              <a:rPr lang="en-US" dirty="0" err="1" smtClean="0"/>
-              <a:t>Customer_Age.It</a:t>
-            </a:r>
-            <a:r>
-              <a:rPr lang="en-US" dirty="0" smtClean="0"/>
-              <a:t> shows the minimum and maximum ages.</a:t>
-            </a:r>
-          </a:p>
-          <a:p>
-            <a:r>
-              <a:rPr lang="en-US" dirty="0" smtClean="0"/>
-              <a:t>2. Identify invalid </a:t>
-            </a:r>
-            <a:r>
-              <a:rPr lang="en-US" dirty="0" err="1" smtClean="0"/>
-              <a:t>agesAges</a:t>
-            </a:r>
-            <a:r>
-              <a:rPr lang="en-US" dirty="0" smtClean="0"/>
-              <a:t> below 0 or above 100 are </a:t>
-            </a:r>
-            <a:r>
-              <a:rPr lang="en-US" dirty="0" err="1" smtClean="0"/>
-              <a:t>invalid.The</a:t>
-            </a:r>
-            <a:r>
-              <a:rPr lang="en-US" dirty="0" smtClean="0"/>
-              <a:t> data contains values like -5 and 150.</a:t>
-            </a:r>
-          </a:p>
-          <a:p>
-            <a:r>
-              <a:rPr lang="en-US" dirty="0" smtClean="0"/>
-              <a:t>3. Display invalid </a:t>
-            </a:r>
-            <a:r>
-              <a:rPr lang="en-US" dirty="0" err="1" smtClean="0"/>
-              <a:t>recordsUse</a:t>
-            </a:r>
-            <a:r>
-              <a:rPr lang="en-US" dirty="0" smtClean="0"/>
-              <a:t> a condition to filter these </a:t>
-            </a:r>
-            <a:r>
-              <a:rPr lang="en-US" dirty="0" err="1" smtClean="0"/>
-              <a:t>ages.This</a:t>
-            </a:r>
-            <a:r>
-              <a:rPr lang="en-US" dirty="0" smtClean="0"/>
-              <a:t> shows the customers with invalid ages.</a:t>
+              <a:rPr lang="en-US" dirty="0"/>
+              <a:t>Check customer </a:t>
+            </a:r>
+            <a:r>
+              <a:rPr lang="en-US" dirty="0" smtClean="0"/>
+              <a:t>ages</a:t>
+            </a:r>
+          </a:p>
+          <a:p>
+            <a:pPr lvl="1"/>
+            <a:r>
+              <a:rPr lang="en-US" dirty="0" smtClean="0"/>
+              <a:t>describe</a:t>
+            </a:r>
+            <a:r>
+              <a:rPr lang="en-US" dirty="0"/>
+              <a:t>() summarizes the </a:t>
+            </a:r>
+            <a:r>
+              <a:rPr lang="en-US" dirty="0" err="1"/>
+              <a:t>Customer_Age</a:t>
+            </a:r>
+            <a:r>
+              <a:rPr lang="en-US" dirty="0"/>
+              <a:t> column</a:t>
+            </a:r>
+            <a:r>
+              <a:rPr lang="en-US" dirty="0" smtClean="0"/>
+              <a:t>.</a:t>
+            </a:r>
+          </a:p>
+          <a:p>
+            <a:pPr lvl="1"/>
+            <a:r>
+              <a:rPr lang="en-US" dirty="0" smtClean="0"/>
+              <a:t>It </a:t>
+            </a:r>
+            <a:r>
+              <a:rPr lang="en-US" dirty="0"/>
+              <a:t>shows the minimum age is -5 and the maximum is 150</a:t>
+            </a:r>
+            <a:r>
+              <a:rPr lang="en-US" dirty="0" smtClean="0"/>
+              <a:t>.</a:t>
+            </a:r>
+          </a:p>
+          <a:p>
+            <a:r>
+              <a:rPr lang="en-US" dirty="0" smtClean="0"/>
+              <a:t>Identify </a:t>
+            </a:r>
+            <a:r>
+              <a:rPr lang="en-US" dirty="0"/>
+              <a:t>invalid </a:t>
+            </a:r>
+            <a:r>
+              <a:rPr lang="en-US" dirty="0" smtClean="0"/>
+              <a:t>ages</a:t>
+            </a:r>
+          </a:p>
+          <a:p>
+            <a:pPr lvl="1"/>
+            <a:r>
+              <a:rPr lang="en-US" dirty="0" smtClean="0"/>
+              <a:t>Ages </a:t>
+            </a:r>
+            <a:r>
+              <a:rPr lang="en-US" dirty="0"/>
+              <a:t>below 0 or above 100 are considered invalid</a:t>
+            </a:r>
+            <a:r>
+              <a:rPr lang="en-US" dirty="0" smtClean="0"/>
+              <a:t>.</a:t>
+            </a:r>
+          </a:p>
+          <a:p>
+            <a:pPr lvl="1"/>
+            <a:r>
+              <a:rPr lang="en-US" dirty="0" smtClean="0"/>
+              <a:t>Examples </a:t>
+            </a:r>
+            <a:r>
+              <a:rPr lang="en-US" dirty="0"/>
+              <a:t>in the data include -5 and 150</a:t>
+            </a:r>
+            <a:r>
+              <a:rPr lang="en-US" dirty="0" smtClean="0"/>
+              <a:t>.</a:t>
+            </a:r>
+          </a:p>
+          <a:p>
+            <a:r>
+              <a:rPr lang="en-US" dirty="0" smtClean="0"/>
+              <a:t>Display </a:t>
+            </a:r>
+            <a:r>
+              <a:rPr lang="en-US" dirty="0"/>
+              <a:t>invalid </a:t>
+            </a:r>
+            <a:r>
+              <a:rPr lang="en-US" dirty="0" smtClean="0"/>
+              <a:t>records</a:t>
+            </a:r>
+          </a:p>
+          <a:p>
+            <a:pPr lvl="1"/>
+            <a:r>
+              <a:rPr lang="en-US" dirty="0" smtClean="0"/>
+              <a:t>The </a:t>
+            </a:r>
+            <a:r>
+              <a:rPr lang="en-US" dirty="0"/>
+              <a:t>filtering condition identifies customers whose ages are outside the valid range</a:t>
+            </a:r>
+            <a:r>
+              <a:rPr lang="en-US" dirty="0" smtClean="0"/>
+              <a:t>.</a:t>
+            </a:r>
+          </a:p>
+          <a:p>
+            <a:pPr lvl="1"/>
+            <a:r>
+              <a:rPr lang="en-US" dirty="0" smtClean="0"/>
+              <a:t>This </a:t>
+            </a:r>
+            <a:r>
+              <a:rPr lang="en-US" dirty="0"/>
+              <a:t>helps us locate the records that need to be corrected or handled</a:t>
+            </a:r>
+            <a:r>
+              <a:rPr lang="en-US" dirty="0" smtClean="0"/>
+              <a:t>.</a:t>
+            </a:r>
+          </a:p>
+          <a:p>
+            <a:r>
+              <a:rPr lang="en-US" dirty="0" smtClean="0"/>
+              <a:t>Purpose</a:t>
+            </a:r>
+          </a:p>
+          <a:p>
+            <a:pPr lvl="1"/>
+            <a:r>
+              <a:rPr lang="en-US" dirty="0" smtClean="0"/>
+              <a:t>Validating </a:t>
+            </a:r>
+            <a:r>
+              <a:rPr lang="en-US" dirty="0"/>
+              <a:t>ages improves the accuracy and reliability of customer demographic analysis.</a:t>
             </a:r>
             <a:endParaRPr lang="en-US" dirty="0"/>
           </a:p>
@@ -4805,13 +5450,8 @@
           <a:p>
             <a:r>
               <a:rPr lang="en-US" dirty="0"/>
-              <a:t>E</a:t>
-            </a:r>
-            <a:r>
-              <a:rPr lang="en-US" dirty="0" smtClean="0"/>
-              <a:t>xplanation</a:t>
-            </a:r>
-            <a:endParaRPr lang="en-US" dirty="0"/>
+              <a:t>Key findings</a:t>
+            </a:r>
           </a:p>
         </p:txBody>
       </p:sp>
@@ -4833,7 +5473,7 @@
         </p:spPr>
         <p:txBody>
           <a:bodyPr>
-            <a:normAutofit fontScale="92500" lnSpcReduction="20000"/>
+            <a:normAutofit fontScale="85000" lnSpcReduction="20000"/>
           </a:bodyPr>
           <a:lstStyle/>
           <a:p>
@@ -4841,24 +5481,12 @@
               <a:buAutoNum type="arabicPeriod"/>
             </a:pPr>
             <a:r>
-              <a:rPr lang="en-US" dirty="0" smtClean="0"/>
-              <a:t>Filter invalid </a:t>
-            </a:r>
-            <a:r>
-              <a:rPr lang="en-US" dirty="0" err="1" smtClean="0"/>
-              <a:t>agesThe</a:t>
-            </a:r>
-            <a:r>
-              <a:rPr lang="en-US" dirty="0" smtClean="0"/>
-              <a:t> code checks for ages below 0 or above 100.It displays only the </a:t>
-            </a:r>
-            <a:r>
-              <a:rPr lang="en-US" dirty="0" err="1" smtClean="0"/>
-              <a:t>Customer_Age</a:t>
-            </a:r>
-            <a:r>
-              <a:rPr lang="en-US" dirty="0" smtClean="0"/>
-              <a:t> column for those records.</a:t>
+              <a:rPr lang="en-US" dirty="0"/>
+              <a:t>The analysis checks for invalid customer ages below 0 or above 100</a:t>
+            </a:r>
+            <a:r>
+              <a:rPr lang="en-US" dirty="0" smtClean="0"/>
+              <a:t>.</a:t>
             </a:r>
           </a:p>
           <a:p>
@@ -4867,31 +5495,15 @@
             </a:pPr>
             <a:r>
               <a:rPr lang="en-US" dirty="0" smtClean="0"/>
-              <a:t>Count each age </a:t>
-            </a:r>
-            <a:r>
-              <a:rPr lang="en-US" dirty="0" err="1" smtClean="0"/>
-              <a:t>valuevalue_counts</a:t>
-            </a:r>
-            <a:r>
-              <a:rPr lang="en-US" dirty="0" smtClean="0"/>
-              <a:t>() counts how many times each age </a:t>
-            </a:r>
-            <a:r>
-              <a:rPr lang="en-US" dirty="0" err="1" smtClean="0"/>
-              <a:t>appears.dropna</a:t>
-            </a:r>
-            <a:r>
-              <a:rPr lang="en-US" dirty="0" smtClean="0"/>
-              <a:t>=False also includes missing (</a:t>
-            </a:r>
-            <a:r>
-              <a:rPr lang="en-US" dirty="0" err="1" smtClean="0"/>
-              <a:t>NaN</a:t>
-            </a:r>
-            <a:r>
-              <a:rPr lang="en-US" dirty="0" smtClean="0"/>
-              <a:t>) ages.</a:t>
+              <a:t>The </a:t>
+            </a:r>
+            <a:r>
+              <a:rPr lang="en-US" dirty="0"/>
+              <a:t>output does not show any invalid age values, so there are no ages outside the expected 0–100 range in the displayed result</a:t>
+            </a:r>
+            <a:r>
+              <a:rPr lang="en-US" dirty="0" smtClean="0"/>
+              <a:t>.</a:t>
             </a:r>
           </a:p>
           <a:p>
@@ -4900,23 +5512,117 @@
             </a:pPr>
             <a:r>
               <a:rPr lang="en-US" dirty="0" smtClean="0"/>
-              <a:t> Understand the </a:t>
-            </a:r>
-            <a:r>
-              <a:rPr lang="en-US" dirty="0" err="1" smtClean="0"/>
-              <a:t>resultsFor</a:t>
-            </a:r>
-            <a:r>
-              <a:rPr lang="en-US" dirty="0" smtClean="0"/>
-              <a:t> example, 45.0 appears 261 times and 25.0 appears 259 </a:t>
-            </a:r>
-            <a:r>
-              <a:rPr lang="en-US" dirty="0" err="1" smtClean="0"/>
-              <a:t>times.NaN</a:t>
-            </a:r>
-            <a:r>
-              <a:rPr lang="en-US" dirty="0" smtClean="0"/>
-              <a:t> appears 780 times, meaning 780 customers have no age recorded.</a:t>
+              <a:t>However</a:t>
+            </a:r>
+            <a:r>
+              <a:rPr lang="en-US" dirty="0"/>
+              <a:t>, there are 780 missing age values (</a:t>
+            </a:r>
+            <a:r>
+              <a:rPr lang="en-US" dirty="0" err="1"/>
+              <a:t>NaN</a:t>
+            </a:r>
+            <a:r>
+              <a:rPr lang="en-US" dirty="0" smtClean="0"/>
+              <a:t>).</a:t>
+            </a:r>
+          </a:p>
+          <a:p>
+            <a:pPr marL="514350" indent="-514350">
+              <a:buAutoNum type="arabicPeriod"/>
+            </a:pPr>
+            <a:r>
+              <a:rPr lang="en-US" dirty="0" smtClean="0"/>
+              <a:t>The </a:t>
+            </a:r>
+            <a:r>
+              <a:rPr lang="en-US" dirty="0"/>
+              <a:t>most common recorded ages include</a:t>
+            </a:r>
+            <a:r>
+              <a:rPr lang="en-US" dirty="0" smtClean="0"/>
+              <a:t>:</a:t>
+            </a:r>
+          </a:p>
+          <a:p>
+            <a:pPr marL="971550" lvl="1" indent="-514350">
+              <a:buAutoNum type="arabicPeriod"/>
+            </a:pPr>
+            <a:r>
+              <a:rPr lang="en-US" dirty="0" smtClean="0"/>
+              <a:t>45 </a:t>
+            </a:r>
+            <a:r>
+              <a:rPr lang="en-US" dirty="0"/>
+              <a:t>years — 261 </a:t>
+            </a:r>
+            <a:r>
+              <a:rPr lang="en-US" dirty="0" smtClean="0"/>
+              <a:t>customers</a:t>
+            </a:r>
+          </a:p>
+          <a:p>
+            <a:pPr marL="971550" lvl="1" indent="-514350">
+              <a:buAutoNum type="arabicPeriod"/>
+            </a:pPr>
+            <a:r>
+              <a:rPr lang="en-US" dirty="0" smtClean="0"/>
+              <a:t>25 </a:t>
+            </a:r>
+            <a:r>
+              <a:rPr lang="en-US" dirty="0"/>
+              <a:t>years — 259 </a:t>
+            </a:r>
+            <a:r>
+              <a:rPr lang="en-US" dirty="0" smtClean="0"/>
+              <a:t>customers</a:t>
+            </a:r>
+          </a:p>
+          <a:p>
+            <a:pPr marL="971550" lvl="1" indent="-514350">
+              <a:buAutoNum type="arabicPeriod"/>
+            </a:pPr>
+            <a:r>
+              <a:rPr lang="en-US" dirty="0" smtClean="0"/>
+              <a:t>60 </a:t>
+            </a:r>
+            <a:r>
+              <a:rPr lang="en-US" dirty="0"/>
+              <a:t>years — 238 </a:t>
+            </a:r>
+            <a:r>
+              <a:rPr lang="en-US" dirty="0" smtClean="0"/>
+              <a:t>customers</a:t>
+            </a:r>
+          </a:p>
+          <a:p>
+            <a:pPr marL="971550" lvl="1" indent="-514350">
+              <a:buAutoNum type="arabicPeriod"/>
+            </a:pPr>
+            <a:r>
+              <a:rPr lang="en-US" dirty="0" smtClean="0"/>
+              <a:t>18 </a:t>
+            </a:r>
+            <a:r>
+              <a:rPr lang="en-US" dirty="0"/>
+              <a:t>years — 232 </a:t>
+            </a:r>
+            <a:r>
+              <a:rPr lang="en-US" dirty="0" smtClean="0"/>
+              <a:t>customers</a:t>
+            </a:r>
+          </a:p>
+          <a:p>
+            <a:pPr marL="971550" lvl="1" indent="-514350">
+              <a:buAutoNum type="arabicPeriod"/>
+            </a:pPr>
+            <a:r>
+              <a:rPr lang="en-US" dirty="0" smtClean="0"/>
+              <a:t>34 </a:t>
+            </a:r>
+            <a:r>
+              <a:rPr lang="en-US" dirty="0"/>
+              <a:t>years — 230 customers</a:t>
             </a:r>
             <a:endParaRPr lang="en-US" dirty="0"/>
           </a:p>
@@ -5024,7 +5730,7 @@
         </p:nvSpPr>
         <p:spPr>
           <a:xfrm>
-            <a:off x="0" y="0"/>
+            <a:off x="433686" y="-5254"/>
             <a:ext cx="10515600" cy="1325563"/>
           </a:xfrm>
         </p:spPr>
@@ -5133,9 +5839,8 @@
           <a:p>
             <a:r>
               <a:rPr lang="en-US" dirty="0" smtClean="0"/>
-              <a:t>Explanation</a:t>
-            </a:r>
-            <a:endParaRPr lang="en-US" dirty="0"/>
+              <a:t>Key Findings</a:t>
+            </a:r>
           </a:p>
         </p:txBody>
       </p:sp>
@@ -5157,66 +5862,286 @@
         </p:spPr>
         <p:txBody>
           <a:bodyPr>
-            <a:normAutofit fontScale="77500" lnSpcReduction="20000"/>
+            <a:normAutofit fontScale="47500" lnSpcReduction="20000"/>
           </a:bodyPr>
           <a:lstStyle/>
           <a:p>
             <a:r>
               <a:rPr lang="en-US" dirty="0"/>
-              <a:t>We standardized the selected categorical fields by removing unnecessary leading and trailing spaces. This was applied to Category, Branch, </a:t>
-            </a:r>
-            <a:r>
-              <a:rPr lang="en-US" dirty="0" err="1"/>
-              <a:t>Payment_Method</a:t>
-            </a:r>
-            <a:r>
-              <a:rPr lang="en-US" dirty="0"/>
-              <a:t> and Membership.</a:t>
-            </a:r>
-          </a:p>
-          <a:p>
-            <a:r>
-              <a:rPr lang="en-US" dirty="0"/>
-              <a:t>We then used value-count checks to inspect the categories after cleaning. Standardizing these fields is important because small formatting differences can cause the same business category to appear as separate categories during analysis.</a:t>
-            </a:r>
-          </a:p>
-          <a:p>
-            <a:r>
-              <a:rPr lang="en-US" dirty="0"/>
-              <a:t>Functions used: </a:t>
-            </a:r>
-            <a:r>
-              <a:rPr lang="en-US" dirty="0" err="1"/>
-              <a:t>str.strip</a:t>
-            </a:r>
-            <a:r>
-              <a:rPr lang="en-US" dirty="0"/>
-              <a:t>() and </a:t>
-            </a:r>
-            <a:r>
-              <a:rPr lang="en-US" dirty="0" err="1"/>
-              <a:t>value_counts</a:t>
-            </a:r>
-            <a:r>
-              <a:rPr lang="en-US" dirty="0"/>
-              <a:t>().</a:t>
-            </a:r>
-          </a:p>
-          <a:p>
-            <a:r>
-              <a:rPr lang="en-US" dirty="0"/>
-              <a:t>Columns standardized: Category, Branch, </a:t>
-            </a:r>
-            <a:r>
-              <a:rPr lang="en-US" dirty="0" err="1"/>
-              <a:t>Payment_Method</a:t>
-            </a:r>
-            <a:r>
-              <a:rPr lang="en-US" dirty="0"/>
-              <a:t> and Membership.</a:t>
-            </a:r>
-          </a:p>
-          <a:p>
+              <a:t>The dataset contains inconsistent formatting in the categorical columns</a:t>
+            </a:r>
+            <a:r>
+              <a:rPr lang="en-US" dirty="0" smtClean="0"/>
+              <a:t>.</a:t>
+            </a:r>
+          </a:p>
+          <a:p>
+            <a:r>
+              <a:rPr lang="en-US" dirty="0" smtClean="0"/>
+              <a:t>Category:</a:t>
+            </a:r>
+          </a:p>
+          <a:p>
+            <a:pPr lvl="1"/>
+            <a:r>
+              <a:rPr lang="en-US" dirty="0" smtClean="0"/>
+              <a:t>Clothing </a:t>
+            </a:r>
+            <a:r>
+              <a:rPr lang="en-US" dirty="0"/>
+              <a:t>= </a:t>
+            </a:r>
+            <a:r>
+              <a:rPr lang="en-US" dirty="0" smtClean="0"/>
+              <a:t>243</a:t>
+            </a:r>
+          </a:p>
+          <a:p>
+            <a:pPr lvl="1"/>
+            <a:r>
+              <a:rPr lang="en-US" dirty="0" smtClean="0"/>
+              <a:t>clothing </a:t>
+            </a:r>
+            <a:r>
+              <a:rPr lang="en-US" dirty="0"/>
+              <a:t>= </a:t>
+            </a:r>
+            <a:r>
+              <a:rPr lang="en-US" dirty="0" smtClean="0"/>
+              <a:t>137</a:t>
+            </a:r>
+          </a:p>
+          <a:p>
+            <a:pPr lvl="1"/>
+            <a:r>
+              <a:rPr lang="en-US" dirty="0" smtClean="0"/>
+              <a:t>Home </a:t>
+            </a:r>
+            <a:r>
+              <a:rPr lang="en-US" dirty="0"/>
+              <a:t>= </a:t>
+            </a:r>
+            <a:r>
+              <a:rPr lang="en-US" dirty="0" smtClean="0"/>
+              <a:t>242</a:t>
+            </a:r>
+          </a:p>
+          <a:p>
+            <a:pPr lvl="1"/>
+            <a:r>
+              <a:rPr lang="en-US" dirty="0" smtClean="0"/>
+              <a:t>home </a:t>
+            </a:r>
+            <a:r>
+              <a:rPr lang="en-US" dirty="0"/>
+              <a:t>= </a:t>
+            </a:r>
+            <a:r>
+              <a:rPr lang="en-US" dirty="0" smtClean="0"/>
+              <a:t>133</a:t>
+            </a:r>
+          </a:p>
+          <a:p>
+            <a:pPr lvl="1"/>
+            <a:r>
+              <a:rPr lang="en-US" dirty="0" smtClean="0"/>
+              <a:t>Groceries </a:t>
+            </a:r>
+            <a:r>
+              <a:rPr lang="en-US" dirty="0"/>
+              <a:t>= </a:t>
+            </a:r>
+            <a:r>
+              <a:rPr lang="en-US" dirty="0" smtClean="0"/>
+              <a:t>253</a:t>
+            </a:r>
+          </a:p>
+          <a:p>
+            <a:pPr lvl="1"/>
+            <a:r>
+              <a:rPr lang="en-US" dirty="0" smtClean="0"/>
+              <a:t>groceries </a:t>
+            </a:r>
+            <a:r>
+              <a:rPr lang="en-US" dirty="0"/>
+              <a:t>= </a:t>
+            </a:r>
+            <a:r>
+              <a:rPr lang="en-US" dirty="0" smtClean="0"/>
+              <a:t>127</a:t>
+            </a:r>
+          </a:p>
+          <a:p>
+            <a:pPr lvl="1"/>
+            <a:r>
+              <a:rPr lang="en-US" dirty="0" smtClean="0"/>
+              <a:t>Electronics </a:t>
+            </a:r>
+            <a:r>
+              <a:rPr lang="en-US" dirty="0"/>
+              <a:t>= </a:t>
+            </a:r>
+            <a:r>
+              <a:rPr lang="en-US" dirty="0" smtClean="0"/>
+              <a:t>257</a:t>
+            </a:r>
+          </a:p>
+          <a:p>
+            <a:pPr lvl="1"/>
+            <a:r>
+              <a:rPr lang="en-US" dirty="0" smtClean="0"/>
+              <a:t>electronics </a:t>
+            </a:r>
+            <a:r>
+              <a:rPr lang="en-US" dirty="0"/>
+              <a:t>= </a:t>
+            </a:r>
+            <a:r>
+              <a:rPr lang="en-US" dirty="0" smtClean="0"/>
+              <a:t>125</a:t>
+            </a:r>
+          </a:p>
+          <a:p>
+            <a:r>
+              <a:rPr lang="en-US" dirty="0" smtClean="0"/>
+              <a:t>This </a:t>
+            </a:r>
+            <a:r>
+              <a:rPr lang="en-US" dirty="0"/>
+              <a:t>shows that the same categories were being treated as separate values because of capitalization</a:t>
+            </a:r>
+            <a:r>
+              <a:rPr lang="en-US" dirty="0" smtClean="0"/>
+              <a:t>.</a:t>
+            </a:r>
+          </a:p>
+          <a:p>
+            <a:r>
+              <a:rPr lang="en-US" dirty="0" smtClean="0"/>
+              <a:t>Payment </a:t>
+            </a:r>
+            <a:r>
+              <a:rPr lang="en-US" dirty="0"/>
+              <a:t>Method also has inconsistent capitalization</a:t>
+            </a:r>
+            <a:r>
+              <a:rPr lang="en-US" dirty="0" smtClean="0"/>
+              <a:t>:</a:t>
+            </a:r>
+          </a:p>
+          <a:p>
+            <a:pPr lvl="1"/>
+            <a:r>
+              <a:rPr lang="en-US" dirty="0" smtClean="0"/>
+              <a:t>Cash </a:t>
+            </a:r>
+            <a:r>
+              <a:rPr lang="en-US" dirty="0"/>
+              <a:t>= </a:t>
+            </a:r>
+            <a:r>
+              <a:rPr lang="en-US" dirty="0" smtClean="0"/>
+              <a:t>435</a:t>
+            </a:r>
+          </a:p>
+          <a:p>
+            <a:pPr lvl="1"/>
+            <a:r>
+              <a:rPr lang="en-US" dirty="0" smtClean="0"/>
+              <a:t>cash </a:t>
+            </a:r>
+            <a:r>
+              <a:rPr lang="en-US" dirty="0"/>
+              <a:t>= </a:t>
+            </a:r>
+            <a:r>
+              <a:rPr lang="en-US" dirty="0" smtClean="0"/>
+              <a:t>379</a:t>
+            </a:r>
+          </a:p>
+          <a:p>
+            <a:r>
+              <a:rPr lang="en-US" dirty="0" smtClean="0"/>
+              <a:t>Membership </a:t>
+            </a:r>
+            <a:r>
+              <a:rPr lang="en-US" dirty="0"/>
+              <a:t>has similar inconsistencies</a:t>
+            </a:r>
+            <a:r>
+              <a:rPr lang="en-US" dirty="0" smtClean="0"/>
+              <a:t>:</a:t>
+            </a:r>
+          </a:p>
+          <a:p>
+            <a:pPr lvl="1"/>
+            <a:r>
+              <a:rPr lang="en-US" dirty="0" smtClean="0"/>
+              <a:t>Yes </a:t>
+            </a:r>
+            <a:r>
+              <a:rPr lang="en-US" dirty="0"/>
+              <a:t>= </a:t>
+            </a:r>
+            <a:r>
+              <a:rPr lang="en-US" dirty="0" smtClean="0"/>
+              <a:t>510</a:t>
+            </a:r>
+          </a:p>
+          <a:p>
+            <a:pPr lvl="1"/>
+            <a:r>
+              <a:rPr lang="en-US" dirty="0" smtClean="0"/>
+              <a:t>YES </a:t>
+            </a:r>
+            <a:r>
+              <a:rPr lang="en-US" dirty="0"/>
+              <a:t>= </a:t>
+            </a:r>
+            <a:r>
+              <a:rPr lang="en-US" dirty="0" smtClean="0"/>
+              <a:t>473</a:t>
+            </a:r>
+          </a:p>
+          <a:p>
+            <a:pPr lvl="1"/>
+            <a:r>
+              <a:rPr lang="en-US" dirty="0" smtClean="0"/>
+              <a:t>No </a:t>
+            </a:r>
+            <a:r>
+              <a:rPr lang="en-US" dirty="0"/>
+              <a:t>= </a:t>
+            </a:r>
+            <a:r>
+              <a:rPr lang="en-US" dirty="0" smtClean="0"/>
+              <a:t>513</a:t>
+            </a:r>
+          </a:p>
+          <a:p>
+            <a:pPr lvl="1"/>
+            <a:r>
+              <a:rPr lang="en-US" dirty="0" smtClean="0"/>
+              <a:t>NO </a:t>
+            </a:r>
+            <a:r>
+              <a:rPr lang="en-US" dirty="0"/>
+              <a:t>= </a:t>
+            </a:r>
+            <a:r>
+              <a:rPr lang="en-US" dirty="0" smtClean="0"/>
+              <a:t>504</a:t>
+            </a:r>
+          </a:p>
+          <a:p>
+            <a:r>
+              <a:rPr lang="en-US" dirty="0" smtClean="0"/>
+              <a:t>Branch </a:t>
+            </a:r>
+            <a:r>
+              <a:rPr lang="en-US" dirty="0"/>
+              <a:t>names appear consistently formatted in the output.</a:t>
+            </a:r>
             <a:endParaRPr lang="en-US" dirty="0"/>
           </a:p>
         </p:txBody>
@@ -5431,10 +6356,9 @@
           <a:lstStyle/>
           <a:p>
             <a:r>
-              <a:rPr lang="en-US" dirty="0" smtClean="0"/>
-              <a:t>Explanation</a:t>
-            </a:r>
-            <a:endParaRPr lang="en-US" dirty="0"/>
+              <a:rPr lang="en-US" dirty="0"/>
+              <a:t>Key findings</a:t>
+            </a:r>
           </a:p>
         </p:txBody>
       </p:sp>
@@ -5456,81 +6380,85 @@
         </p:spPr>
         <p:txBody>
           <a:bodyPr>
-            <a:normAutofit fontScale="77500" lnSpcReduction="20000"/>
+            <a:normAutofit fontScale="92500" lnSpcReduction="20000"/>
           </a:bodyPr>
           <a:lstStyle/>
           <a:p>
             <a:r>
-              <a:rPr lang="en-US" dirty="0" smtClean="0"/>
-              <a:t>Detecting </a:t>
-            </a:r>
-            <a:r>
-              <a:rPr lang="en-US" dirty="0" err="1" smtClean="0"/>
-              <a:t>inconsistenciesunique</a:t>
-            </a:r>
-            <a:r>
-              <a:rPr lang="en-US" dirty="0" smtClean="0"/>
-              <a:t>() displays all different values found in </a:t>
-            </a:r>
-            <a:r>
-              <a:rPr lang="en-US" dirty="0" err="1" smtClean="0"/>
-              <a:t>Customer_Gender.We</a:t>
-            </a:r>
-            <a:r>
-              <a:rPr lang="en-US" dirty="0" smtClean="0"/>
-              <a:t> use it to identify differences in capitalization, spaces, or other formatting.</a:t>
-            </a:r>
-          </a:p>
-          <a:p>
-            <a:r>
-              <a:rPr lang="en-US" dirty="0" smtClean="0"/>
-              <a:t>Removing unnecessary </a:t>
-            </a:r>
-            <a:r>
-              <a:rPr lang="en-US" dirty="0" err="1" smtClean="0"/>
-              <a:t>spaces.str.strip</a:t>
-            </a:r>
-            <a:r>
-              <a:rPr lang="en-US" dirty="0" smtClean="0"/>
-              <a:t>() removes spaces from the beginning and end of each text </a:t>
-            </a:r>
-            <a:r>
-              <a:rPr lang="en-US" dirty="0" err="1" smtClean="0"/>
-              <a:t>value.This</a:t>
-            </a:r>
-            <a:r>
-              <a:rPr lang="en-US" dirty="0" smtClean="0"/>
-              <a:t> makes values consistently formatted before further cleaning.</a:t>
-            </a:r>
-          </a:p>
-          <a:p>
-            <a:r>
-              <a:rPr lang="en-US" dirty="0" smtClean="0"/>
-              <a:t>Standardizing letter </a:t>
-            </a:r>
-            <a:r>
-              <a:rPr lang="en-US" dirty="0" err="1" smtClean="0"/>
-              <a:t>cases.str.title</a:t>
-            </a:r>
-            <a:r>
-              <a:rPr lang="en-US" dirty="0" smtClean="0"/>
-              <a:t>() changes the text to title case, such as male → </a:t>
-            </a:r>
-            <a:r>
-              <a:rPr lang="en-US" dirty="0" err="1" smtClean="0"/>
-              <a:t>Male.Combining</a:t>
-            </a:r>
-            <a:r>
-              <a:rPr lang="en-US" dirty="0" smtClean="0"/>
-              <a:t> it with .</a:t>
-            </a:r>
-            <a:r>
-              <a:rPr lang="en-US" dirty="0" err="1" smtClean="0"/>
-              <a:t>str.strip</a:t>
-            </a:r>
-            <a:r>
-              <a:rPr lang="en-US" dirty="0" smtClean="0"/>
-              <a:t>() gives us consistently formatted gender values.</a:t>
+              <a:rPr lang="en-US" dirty="0"/>
+              <a:t>The dataset had inconsistent capitalization for gender values</a:t>
+            </a:r>
+            <a:r>
+              <a:rPr lang="en-US" dirty="0" smtClean="0"/>
+              <a:t>.</a:t>
+            </a:r>
+          </a:p>
+          <a:p>
+            <a:r>
+              <a:rPr lang="en-US" dirty="0" smtClean="0"/>
+              <a:t>male </a:t>
+            </a:r>
+            <a:r>
+              <a:rPr lang="en-US" dirty="0"/>
+              <a:t>and Male represent the same category but were stored differently</a:t>
+            </a:r>
+            <a:r>
+              <a:rPr lang="en-US" dirty="0" smtClean="0"/>
+              <a:t>.</a:t>
+            </a:r>
+          </a:p>
+          <a:p>
+            <a:r>
+              <a:rPr lang="en-US" dirty="0" smtClean="0"/>
+              <a:t>Female </a:t>
+            </a:r>
+            <a:r>
+              <a:rPr lang="en-US" dirty="0"/>
+              <a:t>and FEMALE also represent the same category but had different capitalization</a:t>
+            </a:r>
+            <a:r>
+              <a:rPr lang="en-US" dirty="0" smtClean="0"/>
+              <a:t>.</a:t>
+            </a:r>
+          </a:p>
+          <a:p>
+            <a:r>
+              <a:rPr lang="en-US" dirty="0" smtClean="0"/>
+              <a:t>Missing </a:t>
+            </a:r>
+            <a:r>
+              <a:rPr lang="en-US" dirty="0"/>
+              <a:t>values (</a:t>
+            </a:r>
+            <a:r>
+              <a:rPr lang="en-US" dirty="0" err="1"/>
+              <a:t>NaN</a:t>
+            </a:r>
+            <a:r>
+              <a:rPr lang="en-US" dirty="0"/>
+              <a:t>) were also present</a:t>
+            </a:r>
+            <a:r>
+              <a:rPr lang="en-US" dirty="0" smtClean="0"/>
+              <a:t>.</a:t>
+            </a:r>
+          </a:p>
+          <a:p>
+            <a:r>
+              <a:rPr lang="en-US" dirty="0" smtClean="0"/>
+              <a:t>After </a:t>
+            </a:r>
+            <a:r>
+              <a:rPr lang="en-US" dirty="0"/>
+              <a:t>standardizing the text using .</a:t>
+            </a:r>
+            <a:r>
+              <a:rPr lang="en-US" dirty="0" err="1"/>
+              <a:t>str.title</a:t>
+            </a:r>
+            <a:r>
+              <a:rPr lang="en-US" dirty="0"/>
+              <a:t>(), values such as male → Male and FEMALE → Female become consistent.</a:t>
             </a:r>
             <a:endParaRPr lang="en-US" dirty="0"/>
           </a:p>
@@ -5716,10 +6644,9 @@
           <a:lstStyle/>
           <a:p>
             <a:r>
-              <a:rPr lang="en-US" dirty="0" smtClean="0"/>
-              <a:t>Explanation</a:t>
-            </a:r>
-            <a:endParaRPr lang="en-US" dirty="0"/>
+              <a:rPr lang="en-US" dirty="0"/>
+              <a:t>Key findings</a:t>
+            </a:r>
           </a:p>
         </p:txBody>
       </p:sp>
@@ -5741,118 +6668,95 @@
         </p:spPr>
         <p:txBody>
           <a:bodyPr>
-            <a:normAutofit fontScale="92500" lnSpcReduction="10000"/>
+            <a:normAutofit lnSpcReduction="10000"/>
           </a:bodyPr>
           <a:lstStyle/>
           <a:p>
             <a:r>
-              <a:rPr lang="en-US" dirty="0" smtClean="0"/>
-              <a:t>Converting </a:t>
-            </a:r>
-            <a:r>
-              <a:rPr lang="en-US" dirty="0" err="1" smtClean="0"/>
+              <a:rPr lang="en-US" dirty="0" err="1"/>
               <a:t>Sales_Date</a:t>
             </a:r>
             <a:r>
-              <a:rPr lang="en-US" dirty="0" smtClean="0"/>
-              <a:t>:</a:t>
+              <a:rPr lang="en-US" dirty="0"/>
+              <a:t> was converted to a </a:t>
+            </a:r>
+            <a:r>
+              <a:rPr lang="en-US" dirty="0" err="1"/>
+              <a:t>datetime</a:t>
+            </a:r>
+            <a:r>
+              <a:rPr lang="en-US" dirty="0"/>
+              <a:t> data type</a:t>
+            </a:r>
+            <a:r>
+              <a:rPr lang="en-US" dirty="0" smtClean="0"/>
+              <a:t>.</a:t>
             </a:r>
           </a:p>
           <a:p>
             <a:pPr lvl="1"/>
             <a:r>
-              <a:rPr lang="en-US" dirty="0" err="1" smtClean="0"/>
-              <a:t>pd.to_datetime</a:t>
-            </a:r>
-            <a:r>
-              <a:rPr lang="en-US" dirty="0" smtClean="0"/>
-              <a:t>() changes the </a:t>
-            </a:r>
-            <a:r>
-              <a:rPr lang="en-US" dirty="0" err="1" smtClean="0"/>
-              <a:t>Sales_Date</a:t>
-            </a:r>
-            <a:r>
-              <a:rPr lang="en-US" dirty="0" smtClean="0"/>
-              <a:t> variable into a proper date </a:t>
-            </a:r>
-            <a:r>
-              <a:rPr lang="en-US" dirty="0" err="1" smtClean="0"/>
-              <a:t>format.This</a:t>
-            </a:r>
-            <a:r>
-              <a:rPr lang="en-US" dirty="0" smtClean="0"/>
-              <a:t> makes it suitable for analyzing sales by day, month, quarter, or year.</a:t>
-            </a:r>
-          </a:p>
-          <a:p>
-            <a:r>
-              <a:rPr lang="en-US" dirty="0" smtClean="0"/>
-              <a:t>Converting </a:t>
-            </a:r>
+              <a:rPr lang="en-US" dirty="0" smtClean="0"/>
+              <a:t>This </a:t>
+            </a:r>
+            <a:r>
+              <a:rPr lang="en-US" dirty="0"/>
+              <a:t>allows the sales data to be analyzed by day, month, quarter, or year</a:t>
+            </a:r>
+            <a:r>
+              <a:rPr lang="en-US" dirty="0" smtClean="0"/>
+              <a:t>.</a:t>
+            </a:r>
+          </a:p>
+          <a:p>
             <a:r>
               <a:rPr lang="en-US" dirty="0" err="1" smtClean="0"/>
               <a:t>Customer_Age</a:t>
             </a:r>
             <a:r>
               <a:rPr lang="en-US" dirty="0" smtClean="0"/>
-              <a:t>:</a:t>
+              <a:t> </a:t>
+            </a:r>
+            <a:r>
+              <a:rPr lang="en-US" dirty="0"/>
+              <a:t>was converted to a numeric data type</a:t>
+            </a:r>
+            <a:r>
+              <a:rPr lang="en-US" dirty="0" smtClean="0"/>
+              <a:t>.</a:t>
             </a:r>
           </a:p>
           <a:p>
             <a:pPr lvl="1"/>
             <a:r>
-              <a:rPr lang="en-US" dirty="0" err="1" smtClean="0"/>
-              <a:t>pd.to_numeric</a:t>
-            </a:r>
-            <a:r>
-              <a:rPr lang="en-US" dirty="0" smtClean="0"/>
-              <a:t>() changes </a:t>
-            </a:r>
-            <a:r>
-              <a:rPr lang="en-US" dirty="0" err="1" smtClean="0"/>
-              <a:t>Customer_Age</a:t>
-            </a:r>
-            <a:r>
-              <a:rPr lang="en-US" dirty="0" smtClean="0"/>
-              <a:t> into a numerical data </a:t>
-            </a:r>
-            <a:r>
-              <a:rPr lang="en-US" dirty="0" err="1" smtClean="0"/>
-              <a:t>type.This</a:t>
-            </a:r>
-            <a:r>
-              <a:rPr lang="en-US" dirty="0" smtClean="0"/>
-              <a:t> allows us to perform calculations such as averages and comparisons.</a:t>
-            </a:r>
-          </a:p>
-          <a:p>
-            <a:r>
-              <a:rPr lang="en-US" dirty="0" smtClean="0"/>
-              <a:t>Handling invalid values</a:t>
-            </a:r>
-            <a:r>
-              <a:rPr lang="en-US" dirty="0" smtClean="0"/>
-              <a:t>:</a:t>
-            </a:r>
-          </a:p>
-          <a:p>
-            <a:pPr lvl="1"/>
-            <a:r>
-              <a:rPr lang="en-US" dirty="0" smtClean="0"/>
-              <a:t>errors</a:t>
-            </a:r>
-            <a:r>
-              <a:rPr lang="en-US" dirty="0" smtClean="0"/>
-              <a:t>="coerce" converts values that cannot be converted into the correct type into missing </a:t>
-            </a:r>
-            <a:r>
-              <a:rPr lang="en-US" dirty="0" err="1" smtClean="0"/>
-              <a:t>values.This</a:t>
-            </a:r>
-            <a:r>
-              <a:rPr lang="en-US" dirty="0" smtClean="0"/>
-              <a:t> prevents invalid data from causing errors during business analysis.</a:t>
+              <a:rPr lang="en-US" dirty="0" smtClean="0"/>
+              <a:t>This </a:t>
+            </a:r>
+            <a:r>
+              <a:rPr lang="en-US" dirty="0"/>
+              <a:t>allows us to perform calculations such as average age, minimum age, maximum age, and comparisons</a:t>
+            </a:r>
+            <a:r>
+              <a:rPr lang="en-US" dirty="0" smtClean="0"/>
+              <a:t>.</a:t>
+            </a:r>
+          </a:p>
+          <a:p>
+            <a:r>
+              <a:rPr lang="en-US" dirty="0" smtClean="0"/>
+              <a:t>Invalid </a:t>
+            </a:r>
+            <a:r>
+              <a:rPr lang="en-US" dirty="0"/>
+              <a:t>values that could not be converted were changed to missing values (</a:t>
+            </a:r>
+            <a:r>
+              <a:rPr lang="en-US" dirty="0" err="1"/>
+              <a:t>NaN</a:t>
+            </a:r>
+            <a:r>
+              <a:rPr lang="en-US" dirty="0"/>
+              <a:t>) because errors="coerce" was used.</a:t>
             </a:r>
             <a:endParaRPr lang="en-US" dirty="0"/>
           </a:p>
@@ -6142,10 +7046,9 @@
           <a:lstStyle/>
           <a:p>
             <a:r>
-              <a:rPr lang="en-US" dirty="0" smtClean="0"/>
-              <a:t>Explanation</a:t>
-            </a:r>
-            <a:endParaRPr lang="en-US" dirty="0"/>
+              <a:rPr lang="en-US" dirty="0"/>
+              <a:t>Key findings</a:t>
+            </a:r>
           </a:p>
         </p:txBody>
       </p:sp>
@@ -6167,110 +7070,69 @@
         </p:spPr>
         <p:txBody>
           <a:bodyPr>
-            <a:normAutofit fontScale="85000" lnSpcReduction="10000"/>
+            <a:normAutofit fontScale="92500" lnSpcReduction="10000"/>
           </a:bodyPr>
           <a:lstStyle/>
           <a:p>
             <a:r>
               <a:rPr lang="en-US" dirty="0"/>
-              <a:t>Negative quantities are identified</a:t>
-            </a:r>
-            <a:r>
-              <a:rPr lang="en-US" dirty="0" smtClean="0"/>
-              <a:t>:</a:t>
-            </a:r>
-          </a:p>
-          <a:p>
-            <a:pPr lvl="1"/>
+              <a:t>Negative quantities were identified in the dataset</a:t>
+            </a:r>
+            <a:r>
+              <a:rPr lang="en-US" dirty="0" smtClean="0"/>
+              <a:t>.</a:t>
+            </a:r>
+          </a:p>
+          <a:p>
+            <a:r>
+              <a:rPr lang="en-US" dirty="0" smtClean="0"/>
+              <a:t>Several </a:t>
+            </a:r>
+            <a:r>
+              <a:rPr lang="en-US" dirty="0"/>
+              <a:t>transactions contain quantities below zero</a:t>
+            </a:r>
+            <a:r>
+              <a:rPr lang="en-US" dirty="0" smtClean="0"/>
+              <a:t>.</a:t>
+            </a:r>
+          </a:p>
+          <a:p>
+            <a:r>
+              <a:rPr lang="en-US" dirty="0" smtClean="0"/>
+              <a:t>Negative </a:t>
+            </a:r>
+            <a:r>
+              <a:rPr lang="en-US" dirty="0"/>
+              <a:t>quantities are unrealistic for normal sales transactions</a:t>
+            </a:r>
+            <a:r>
+              <a:rPr lang="en-US" dirty="0" smtClean="0"/>
+              <a:t>.</a:t>
+            </a:r>
+          </a:p>
+          <a:p>
+            <a:r>
+              <a:rPr lang="en-US" dirty="0" smtClean="0"/>
+              <a:t>These </a:t>
+            </a:r>
+            <a:r>
+              <a:rPr lang="en-US" dirty="0"/>
+              <a:t>values may indicate data-entry or data-quality errors</a:t>
+            </a:r>
+            <a:r>
+              <a:rPr lang="en-US" dirty="0" smtClean="0"/>
+              <a:t>.</a:t>
+            </a:r>
+          </a:p>
+          <a:p>
             <a:r>
               <a:rPr lang="en-US" dirty="0" smtClean="0"/>
               <a:t>The </a:t>
             </a:r>
             <a:r>
               <a:rPr lang="en-US" dirty="0"/>
-              <a:t>code filters transactions where Quantity is below </a:t>
-            </a:r>
-            <a:r>
-              <a:rPr lang="en-US" dirty="0" err="1"/>
-              <a:t>zero.These</a:t>
-            </a:r>
-            <a:r>
-              <a:rPr lang="en-US" dirty="0"/>
-              <a:t> values may indicate data entry errors</a:t>
-            </a:r>
-            <a:r>
-              <a:rPr lang="en-US" dirty="0" smtClean="0"/>
-              <a:t>.</a:t>
-            </a:r>
-          </a:p>
-          <a:p>
-            <a:r>
-              <a:rPr lang="en-US" dirty="0" smtClean="0"/>
-              <a:t>Quantity </a:t>
-            </a:r>
-            <a:r>
-              <a:rPr lang="en-US" dirty="0"/>
-              <a:t>values are validated</a:t>
-            </a:r>
-            <a:r>
-              <a:rPr lang="en-US" dirty="0" smtClean="0"/>
-              <a:t>:</a:t>
-            </a:r>
-          </a:p>
-          <a:p>
-            <a:pPr lvl="1"/>
-            <a:r>
-              <a:rPr lang="en-US" dirty="0" smtClean="0"/>
-              <a:t>The </a:t>
-            </a:r>
-            <a:r>
-              <a:rPr lang="en-US" dirty="0"/>
-              <a:t>output shows whether any negative quantities </a:t>
-            </a:r>
-            <a:r>
-              <a:rPr lang="en-US" dirty="0" err="1"/>
-              <a:t>exist.Valid</a:t>
-            </a:r>
-            <a:r>
-              <a:rPr lang="en-US" dirty="0"/>
-              <a:t> sales quantities would normally be zero or positive</a:t>
-            </a:r>
-            <a:r>
-              <a:rPr lang="en-US" dirty="0" smtClean="0"/>
-              <a:t>.</a:t>
-            </a:r>
-          </a:p>
-          <a:p>
-            <a:r>
-              <a:rPr lang="en-US" dirty="0" smtClean="0"/>
-              <a:t>Incorrect </a:t>
-            </a:r>
-            <a:r>
-              <a:rPr lang="en-US" dirty="0"/>
-              <a:t>records can be handled</a:t>
-            </a:r>
-            <a:r>
-              <a:rPr lang="en-US" dirty="0" smtClean="0"/>
-              <a:t>:</a:t>
-            </a:r>
-          </a:p>
-          <a:p>
-            <a:pPr lvl="1"/>
-            <a:r>
-              <a:rPr lang="en-US" dirty="0" smtClean="0"/>
-              <a:t>Any </a:t>
-            </a:r>
-            <a:r>
-              <a:rPr lang="en-US" dirty="0"/>
-              <a:t>identified negative values can be investigated and </a:t>
-            </a:r>
-            <a:r>
-              <a:rPr lang="en-US" dirty="0" err="1"/>
-              <a:t>corrected.This</a:t>
-            </a:r>
-            <a:r>
-              <a:rPr lang="en-US" dirty="0"/>
-              <a:t> improves the accuracy of the dataset.</a:t>
+              <a:t>affected records should be investigated and validated before further analysis.</a:t>
             </a:r>
             <a:endParaRPr lang="en-US" dirty="0"/>
           </a:p>
@@ -6474,10 +7336,9 @@
           <a:lstStyle/>
           <a:p>
             <a:r>
-              <a:rPr lang="en-US" dirty="0" smtClean="0"/>
-              <a:t>Explanation</a:t>
-            </a:r>
-            <a:endParaRPr lang="en-US" dirty="0"/>
+              <a:rPr lang="en-US" dirty="0"/>
+              <a:t>Key findings</a:t>
+            </a:r>
           </a:p>
         </p:txBody>
       </p:sp>
@@ -6505,104 +7366,63 @@
           <a:p>
             <a:r>
               <a:rPr lang="en-US" dirty="0"/>
-              <a:t>Negative prices are identified</a:t>
-            </a:r>
-            <a:r>
-              <a:rPr lang="en-US" dirty="0" smtClean="0"/>
-              <a:t>:</a:t>
-            </a:r>
-          </a:p>
-          <a:p>
-            <a:pPr lvl="1"/>
+              <a:t>Negative unit prices were identified in the dataset</a:t>
+            </a:r>
+            <a:r>
+              <a:rPr lang="en-US" dirty="0" smtClean="0"/>
+              <a:t>.</a:t>
+            </a:r>
+          </a:p>
+          <a:p>
+            <a:r>
+              <a:rPr lang="en-US" dirty="0" smtClean="0"/>
+              <a:t>Several </a:t>
+            </a:r>
+            <a:r>
+              <a:rPr lang="en-US" dirty="0"/>
+              <a:t>transactions contain unit prices below zero</a:t>
+            </a:r>
+            <a:r>
+              <a:rPr lang="en-US" dirty="0" smtClean="0"/>
+              <a:t>.</a:t>
+            </a:r>
+          </a:p>
+          <a:p>
+            <a:r>
+              <a:rPr lang="en-US" dirty="0" smtClean="0"/>
+              <a:t>A </a:t>
+            </a:r>
+            <a:r>
+              <a:rPr lang="en-US" dirty="0"/>
+              <a:t>negative unit price is unrealistic for a normal sales transaction</a:t>
+            </a:r>
+            <a:r>
+              <a:rPr lang="en-US" dirty="0" smtClean="0"/>
+              <a:t>.</a:t>
+            </a:r>
+          </a:p>
+          <a:p>
+            <a:r>
+              <a:rPr lang="en-US" dirty="0" smtClean="0"/>
+              <a:t>These </a:t>
+            </a:r>
+            <a:r>
+              <a:rPr lang="en-US" dirty="0"/>
+              <a:t>values may indicate data-entry or data-quality errors</a:t>
+            </a:r>
+            <a:r>
+              <a:rPr lang="en-US" dirty="0" smtClean="0"/>
+              <a:t>.</a:t>
+            </a:r>
+          </a:p>
+          <a:p>
             <a:r>
               <a:rPr lang="en-US" dirty="0" smtClean="0"/>
               <a:t>The </a:t>
             </a:r>
             <a:r>
               <a:rPr lang="en-US" dirty="0"/>
-              <a:t>code searches for transactions with a negative </a:t>
-            </a:r>
-            <a:r>
-              <a:rPr lang="en-US" dirty="0" err="1"/>
-              <a:t>Unit_Price.Such</a:t>
-            </a:r>
-            <a:r>
-              <a:rPr lang="en-US" dirty="0"/>
-              <a:t> values may indicate incorrect data entry</a:t>
-            </a:r>
-            <a:r>
-              <a:rPr lang="en-US" dirty="0" smtClean="0"/>
-              <a:t>.</a:t>
-            </a:r>
-          </a:p>
-          <a:p>
-            <a:r>
-              <a:rPr lang="en-US" dirty="0" smtClean="0"/>
-              <a:t>Prices </a:t>
-            </a:r>
-            <a:r>
-              <a:rPr lang="en-US" dirty="0"/>
-              <a:t>are validated</a:t>
-            </a:r>
-            <a:r>
-              <a:rPr lang="en-US" dirty="0" smtClean="0"/>
-              <a:t>:</a:t>
-            </a:r>
-          </a:p>
-          <a:p>
-            <a:pPr lvl="1"/>
-            <a:r>
-              <a:rPr lang="en-US" dirty="0" smtClean="0"/>
-              <a:t>The </a:t>
-            </a:r>
-            <a:r>
-              <a:rPr lang="en-US" dirty="0"/>
-              <a:t>output shows whether any negative unit prices are </a:t>
-            </a:r>
-            <a:r>
-              <a:rPr lang="en-US" dirty="0" err="1"/>
-              <a:t>present.This</a:t>
-            </a:r>
-            <a:r>
-              <a:rPr lang="en-US" dirty="0"/>
-              <a:t> helps ensure that product prices are reasonable</a:t>
-            </a:r>
-            <a:r>
-              <a:rPr lang="en-US" dirty="0" smtClean="0"/>
-              <a:t>.</a:t>
-            </a:r>
-          </a:p>
-          <a:p>
-            <a:r>
-              <a:rPr lang="en-US" dirty="0" smtClean="0"/>
-              <a:t>Invalid </a:t>
-            </a:r>
-            <a:r>
-              <a:rPr lang="en-US" dirty="0"/>
-              <a:t>values can be corrected</a:t>
-            </a:r>
-            <a:r>
-              <a:rPr lang="en-US" dirty="0" smtClean="0"/>
-              <a:t>:</a:t>
-            </a:r>
-          </a:p>
-          <a:p>
-            <a:pPr lvl="1"/>
-            <a:r>
-              <a:rPr lang="en-US" dirty="0" smtClean="0"/>
-              <a:t>Identified </a:t>
-            </a:r>
-            <a:r>
-              <a:rPr lang="en-US" dirty="0"/>
-              <a:t>records can be reviewed and corrected or </a:t>
-            </a:r>
-            <a:r>
-              <a:rPr lang="en-US" dirty="0" err="1"/>
-              <a:t>removed.This</a:t>
-            </a:r>
-            <a:r>
-              <a:rPr lang="en-US" dirty="0"/>
-              <a:t> prevents incorrect prices from affecting analysis.</a:t>
+              <a:t>affected records should be investigated and validated before further analysis.</a:t>
             </a:r>
             <a:endParaRPr lang="en-US" dirty="0"/>
           </a:p>
@@ -6758,10 +7578,9 @@
           <a:lstStyle/>
           <a:p>
             <a:r>
-              <a:rPr lang="en-US" dirty="0" smtClean="0"/>
-              <a:t>Explanation</a:t>
-            </a:r>
-            <a:endParaRPr lang="en-US" dirty="0"/>
+              <a:rPr lang="en-US" dirty="0"/>
+              <a:t>Key findings</a:t>
+            </a:r>
           </a:p>
         </p:txBody>
       </p:sp>
@@ -6783,28 +7602,41 @@
         </p:spPr>
         <p:txBody>
           <a:bodyPr>
-            <a:normAutofit fontScale="92500" lnSpcReduction="20000"/>
+            <a:normAutofit fontScale="92500" lnSpcReduction="10000"/>
           </a:bodyPr>
           <a:lstStyle/>
           <a:p>
             <a:r>
               <a:rPr lang="en-US" dirty="0"/>
-              <a:t>Discount values are filtered</a:t>
-            </a:r>
-            <a:r>
-              <a:rPr lang="en-US" dirty="0" smtClean="0"/>
-              <a:t>:</a:t>
-            </a:r>
-          </a:p>
-          <a:p>
-            <a:pPr lvl="1"/>
+              <a:t>Invalid discount values were identified in the dataset</a:t>
+            </a:r>
+            <a:r>
+              <a:rPr lang="en-US" dirty="0" smtClean="0"/>
+              <a:t>.</a:t>
+            </a:r>
+          </a:p>
+          <a:p>
             <a:r>
               <a:rPr lang="en-US" dirty="0" smtClean="0"/>
               <a:t>The </a:t>
             </a:r>
             <a:r>
               <a:rPr lang="en-US" dirty="0"/>
-              <a:t>code displays records where the discount is below 100.This allows the discount values to be examined</a:t>
+              <a:t>discount range includes a value of 110</a:t>
+            </a:r>
+            <a:r>
+              <a:rPr lang="en-US" dirty="0" smtClean="0"/>
+              <a:t>%.</a:t>
+            </a:r>
+          </a:p>
+          <a:p>
+            <a:r>
+              <a:rPr lang="en-US" dirty="0" smtClean="0"/>
+              <a:t>A </a:t>
+            </a:r>
+            <a:r>
+              <a:rPr lang="en-US" dirty="0"/>
+              <a:t>discount above 100% is unrealistic for a normal sales transaction</a:t>
             </a:r>
             <a:r>
               <a:rPr lang="en-US" dirty="0" smtClean="0"/>
@@ -6814,73 +7646,38 @@
           <a:p>
             <a:r>
               <a:rPr lang="en-US" dirty="0" smtClean="0"/>
-              <a:t>Discounts </a:t>
-            </a:r>
-            <a:r>
-              <a:rPr lang="en-US" dirty="0"/>
-              <a:t>are validated</a:t>
-            </a:r>
-            <a:r>
-              <a:rPr lang="en-US" dirty="0" smtClean="0"/>
-              <a:t>:</a:t>
-            </a:r>
-          </a:p>
-          <a:p>
-            <a:pPr lvl="1"/>
+              <a:t>This </a:t>
+            </a:r>
+            <a:r>
+              <a:rPr lang="en-US" dirty="0"/>
+              <a:t>indicates a potential data-quality or data-entry error</a:t>
+            </a:r>
+            <a:r>
+              <a:rPr lang="en-US" dirty="0" smtClean="0"/>
+              <a:t>.</a:t>
+            </a:r>
+          </a:p>
+          <a:p>
             <a:r>
               <a:rPr lang="en-US" dirty="0" smtClean="0"/>
               <a:t>The </a:t>
             </a:r>
             <a:r>
               <a:rPr lang="en-US" dirty="0"/>
-              <a:t>results help check whether discount values fall within the expected </a:t>
+              <a:t>affected records should be investigated and validated before further </a:t>
             </a:r>
             <a:r>
               <a:rPr lang="en-US" dirty="0" err="1"/>
-              <a:t>range.This</a:t>
-            </a:r>
-            <a:r>
-              <a:rPr lang="en-US" dirty="0"/>
-              <a:t> can reveal unusual or incorrectly entered discounts</a:t>
-            </a:r>
-            <a:r>
-              <a:rPr lang="en-US" dirty="0" smtClean="0"/>
-              <a:t>.</a:t>
-            </a:r>
-          </a:p>
-          <a:p>
-            <a:r>
-              <a:rPr lang="en-US" dirty="0" smtClean="0"/>
-              <a:t>Invalid </a:t>
-            </a:r>
-            <a:r>
-              <a:rPr lang="en-US" dirty="0"/>
-              <a:t>discounts can be identified</a:t>
-            </a:r>
-            <a:r>
-              <a:rPr lang="en-US" dirty="0" smtClean="0"/>
-              <a:t>:</a:t>
-            </a:r>
-          </a:p>
-          <a:p>
-            <a:pPr lvl="1"/>
-            <a:r>
-              <a:rPr lang="en-US" dirty="0" smtClean="0"/>
-              <a:t>Any </a:t>
-            </a:r>
-            <a:r>
-              <a:rPr lang="en-US" dirty="0"/>
-              <a:t>values that do not follow the required discount format can be </a:t>
-            </a:r>
-            <a:r>
-              <a:rPr lang="en-US" dirty="0" err="1"/>
-              <a:t>investigated.This</a:t>
-            </a:r>
-            <a:r>
-              <a:rPr lang="en-US" dirty="0"/>
-              <a:t> helps maintain accurate sales calculations.</a:t>
-            </a:r>
-            <a:endParaRPr lang="en-US" dirty="0"/>
+              <a:t>analysis.sales</a:t>
+            </a:r>
+            <a:r>
+              <a:rPr lang="en-US" dirty="0"/>
+              <a:t> </a:t>
+            </a:r>
+            <a:r>
+              <a:rPr lang="en-US" dirty="0"/>
+              <a:t>calculations.</a:t>
+            </a:r>
           </a:p>
         </p:txBody>
       </p:sp>
@@ -6924,12 +7721,7 @@
             <p:ph type="title"/>
           </p:nvPr>
         </p:nvSpPr>
-        <p:spPr>
-          <a:xfrm>
-            <a:off x="0" y="79781"/>
-            <a:ext cx="11355388" cy="840756"/>
-          </a:xfrm>
-        </p:spPr>
+        <p:spPr/>
         <p:txBody>
           <a:bodyPr>
             <a:noAutofit/>
@@ -6944,15 +7736,9 @@
                   </a:schemeClr>
                 </a:solidFill>
               </a:rPr>
-              <a:t>QUESTION 12: Detect and appropriately handle outliers in sales, profit, and quantity variables</a:t>
-            </a:r>
-            <a:endParaRPr lang="en-US" sz="2400" dirty="0">
-              <a:solidFill>
-                <a:schemeClr val="accent1">
-                  <a:lumMod val="75000"/>
-                </a:schemeClr>
-              </a:solidFill>
-            </a:endParaRPr>
+              <a:t>QUESTION 11(Continuation): Identify and validate unrealistic numerical values such as negative quantities, incorrect discounts, invalid unit prices, and unrealistic profits.</a:t>
+            </a:r>
+            <a:endParaRPr lang="en-US" sz="2400" dirty="0"/>
           </a:p>
         </p:txBody>
       </p:sp>
@@ -6968,17 +7754,19 @@
         </p:nvSpPr>
         <p:spPr>
           <a:xfrm>
-            <a:off x="0" y="564245"/>
-            <a:ext cx="5157787" cy="823912"/>
-          </a:xfrm>
-        </p:spPr>
-        <p:txBody>
-          <a:bodyPr/>
-          <a:lstStyle/>
-          <a:p>
-            <a:r>
-              <a:rPr lang="en-US" dirty="0" smtClean="0"/>
-              <a:t>Code</a:t>
+            <a:off x="62702" y="1358537"/>
+            <a:ext cx="5934873" cy="433687"/>
+          </a:xfrm>
+        </p:spPr>
+        <p:txBody>
+          <a:bodyPr>
+            <a:normAutofit/>
+          </a:bodyPr>
+          <a:lstStyle/>
+          <a:p>
+            <a:r>
+              <a:rPr lang="en-US" dirty="0" smtClean="0"/>
+              <a:t>code</a:t>
             </a:r>
             <a:endParaRPr lang="en-US" dirty="0"/>
           </a:p>
@@ -6993,183 +7781,6 @@
           <p:nvPr>
             <p:ph sz="half" idx="2"/>
           </p:nvPr>
-        </p:nvPicPr>
-        <p:blipFill>
-          <a:blip r:embed="rId2" cstate="print">
-            <a:extLst>
-              <a:ext uri="{28A0092B-C50C-407E-A947-70E740481C1C}">
-                <a14:useLocalDpi xmlns:a14="http://schemas.microsoft.com/office/drawing/2010/main" val="0"/>
-              </a:ext>
-            </a:extLst>
-          </a:blip>
-          <a:stretch>
-            <a:fillRect/>
-          </a:stretch>
-        </p:blipFill>
-        <p:spPr>
-          <a:xfrm>
-            <a:off x="60626" y="1405000"/>
-            <a:ext cx="6217899" cy="2576893"/>
-          </a:xfrm>
-        </p:spPr>
-      </p:pic>
-      <p:sp>
-        <p:nvSpPr>
-          <p:cNvPr id="5" name="Text Placeholder 4"/>
-          <p:cNvSpPr>
-            <a:spLocks noGrp="1"/>
-          </p:cNvSpPr>
-          <p:nvPr>
-            <p:ph type="body" sz="quarter" idx="3"/>
-          </p:nvPr>
-        </p:nvSpPr>
-        <p:spPr>
-          <a:xfrm>
-            <a:off x="7603633" y="564244"/>
-            <a:ext cx="4457499" cy="823912"/>
-          </a:xfrm>
-        </p:spPr>
-        <p:txBody>
-          <a:bodyPr/>
-          <a:lstStyle/>
-          <a:p>
-            <a:r>
-              <a:rPr lang="en-US" dirty="0" smtClean="0"/>
-              <a:t>Explanatio</a:t>
-            </a:r>
-            <a:r>
-              <a:rPr lang="en-US" dirty="0"/>
-              <a:t>n</a:t>
-            </a:r>
-          </a:p>
-        </p:txBody>
-      </p:sp>
-      <p:sp>
-        <p:nvSpPr>
-          <p:cNvPr id="6" name="Content Placeholder 5"/>
-          <p:cNvSpPr>
-            <a:spLocks noGrp="1"/>
-          </p:cNvSpPr>
-          <p:nvPr>
-            <p:ph sz="quarter" idx="4"/>
-          </p:nvPr>
-        </p:nvSpPr>
-        <p:spPr>
-          <a:xfrm>
-            <a:off x="7603635" y="1388155"/>
-            <a:ext cx="4457498" cy="5469843"/>
-          </a:xfrm>
-        </p:spPr>
-        <p:txBody>
-          <a:bodyPr>
-            <a:normAutofit fontScale="92500" lnSpcReduction="20000"/>
-          </a:bodyPr>
-          <a:lstStyle/>
-          <a:p>
-            <a:r>
-              <a:rPr lang="en-US" dirty="0"/>
-              <a:t>Quartiles are calculated</a:t>
-            </a:r>
-            <a:r>
-              <a:rPr lang="en-US" dirty="0" smtClean="0"/>
-              <a:t>:</a:t>
-            </a:r>
-          </a:p>
-          <a:p>
-            <a:pPr lvl="1"/>
-            <a:r>
-              <a:rPr lang="en-US" dirty="0" smtClean="0"/>
-              <a:t>Q1 </a:t>
-            </a:r>
-            <a:r>
-              <a:rPr lang="en-US" dirty="0"/>
-              <a:t>and Q3 identify the lower and upper portions of the </a:t>
-            </a:r>
-            <a:r>
-              <a:rPr lang="en-US" dirty="0" err="1"/>
-              <a:t>data.They</a:t>
-            </a:r>
-            <a:r>
-              <a:rPr lang="en-US" dirty="0"/>
-              <a:t> are used to establish normal value ranges</a:t>
-            </a:r>
-            <a:r>
-              <a:rPr lang="en-US" dirty="0" smtClean="0"/>
-              <a:t>.</a:t>
-            </a:r>
-          </a:p>
-          <a:p>
-            <a:r>
-              <a:rPr lang="en-US" dirty="0" smtClean="0"/>
-              <a:t>IQR </a:t>
-            </a:r>
-            <a:r>
-              <a:rPr lang="en-US" dirty="0"/>
-              <a:t>and boundaries are determined</a:t>
-            </a:r>
-            <a:r>
-              <a:rPr lang="en-US" dirty="0" smtClean="0"/>
-              <a:t>:</a:t>
-            </a:r>
-          </a:p>
-          <a:p>
-            <a:pPr lvl="1"/>
-            <a:r>
-              <a:rPr lang="en-US" dirty="0" smtClean="0"/>
-              <a:t>The </a:t>
-            </a:r>
-            <a:r>
-              <a:rPr lang="en-US" dirty="0"/>
-              <a:t>IQR measures the spread between Q1 and Q3.Values outside the calculated boundaries may be considered outliers</a:t>
-            </a:r>
-            <a:r>
-              <a:rPr lang="en-US" dirty="0" smtClean="0"/>
-              <a:t>.</a:t>
-            </a:r>
-          </a:p>
-          <a:p>
-            <a:r>
-              <a:rPr lang="en-US" dirty="0" smtClean="0"/>
-              <a:t>Outliers </a:t>
-            </a:r>
-            <a:r>
-              <a:rPr lang="en-US" dirty="0"/>
-              <a:t>can be identified</a:t>
-            </a:r>
-            <a:r>
-              <a:rPr lang="en-US" dirty="0" smtClean="0"/>
-              <a:t>:</a:t>
-            </a:r>
-          </a:p>
-          <a:p>
-            <a:pPr lvl="1"/>
-            <a:r>
-              <a:rPr lang="en-US" dirty="0" smtClean="0"/>
-              <a:t>The </a:t>
-            </a:r>
-            <a:r>
-              <a:rPr lang="en-US" dirty="0"/>
-              <a:t>lower and upper bounds provide limits for sales, profit, and </a:t>
-            </a:r>
-            <a:r>
-              <a:rPr lang="en-US" dirty="0" err="1"/>
-              <a:t>quantity.Values</a:t>
-            </a:r>
-            <a:r>
-              <a:rPr lang="en-US" dirty="0"/>
-              <a:t> beyond these limits require further investigation or appropriate handling.</a:t>
-            </a:r>
-            <a:endParaRPr lang="en-US" dirty="0"/>
-          </a:p>
-        </p:txBody>
-      </p:sp>
-      <p:pic>
-        <p:nvPicPr>
-          <p:cNvPr id="8" name="Picture 7"/>
-          <p:cNvPicPr>
-            <a:picLocks noChangeAspect="1"/>
-          </p:cNvPicPr>
-          <p:nvPr/>
         </p:nvPicPr>
         <p:blipFill>
           <a:blip r:embed="rId3" cstate="print">
@@ -7185,8 +7796,162 @@
         </p:blipFill>
         <p:spPr>
           <a:xfrm>
-            <a:off x="60626" y="3998735"/>
-            <a:ext cx="3240783" cy="1817273"/>
+            <a:off x="62702" y="1738847"/>
+            <a:ext cx="2867172" cy="733463"/>
+          </a:xfrm>
+        </p:spPr>
+      </p:pic>
+      <p:sp>
+        <p:nvSpPr>
+          <p:cNvPr id="5" name="Text Placeholder 4"/>
+          <p:cNvSpPr>
+            <a:spLocks noGrp="1"/>
+          </p:cNvSpPr>
+          <p:nvPr>
+            <p:ph type="body" sz="quarter" idx="3"/>
+          </p:nvPr>
+        </p:nvSpPr>
+        <p:spPr>
+          <a:xfrm>
+            <a:off x="6949440" y="1358537"/>
+            <a:ext cx="4405948" cy="433687"/>
+          </a:xfrm>
+        </p:spPr>
+        <p:txBody>
+          <a:bodyPr/>
+          <a:lstStyle/>
+          <a:p>
+            <a:r>
+              <a:rPr lang="en-US" dirty="0" smtClean="0"/>
+              <a:t>Key findings</a:t>
+            </a:r>
+            <a:endParaRPr lang="en-US" dirty="0"/>
+          </a:p>
+        </p:txBody>
+      </p:sp>
+      <p:sp>
+        <p:nvSpPr>
+          <p:cNvPr id="6" name="Content Placeholder 5"/>
+          <p:cNvSpPr>
+            <a:spLocks noGrp="1"/>
+          </p:cNvSpPr>
+          <p:nvPr>
+            <p:ph sz="quarter" idx="4"/>
+          </p:nvPr>
+        </p:nvSpPr>
+        <p:spPr>
+          <a:xfrm>
+            <a:off x="6949440" y="1914634"/>
+            <a:ext cx="5183188" cy="3684588"/>
+          </a:xfrm>
+        </p:spPr>
+        <p:txBody>
+          <a:bodyPr>
+            <a:normAutofit fontScale="77500" lnSpcReduction="20000"/>
+          </a:bodyPr>
+          <a:lstStyle/>
+          <a:p>
+            <a:r>
+              <a:rPr lang="en-US" dirty="0"/>
+              <a:t>Extreme profit values were identified in the dataset</a:t>
+            </a:r>
+            <a:r>
+              <a:rPr lang="en-US" dirty="0" smtClean="0"/>
+              <a:t>.</a:t>
+            </a:r>
+          </a:p>
+          <a:p>
+            <a:r>
+              <a:rPr lang="en-US" dirty="0" smtClean="0"/>
+              <a:t>Some </a:t>
+            </a:r>
+            <a:r>
+              <a:rPr lang="en-US" dirty="0"/>
+              <a:t>transactions recorded profits below −100, representing substantial losses</a:t>
+            </a:r>
+            <a:r>
+              <a:rPr lang="en-US" dirty="0" smtClean="0"/>
+              <a:t>.</a:t>
+            </a:r>
+          </a:p>
+          <a:p>
+            <a:r>
+              <a:rPr lang="en-US" dirty="0" smtClean="0"/>
+              <a:t>Other </a:t>
+            </a:r>
+            <a:r>
+              <a:rPr lang="en-US" dirty="0"/>
+              <a:t>transactions recorded profits above 100, representing unusually high profits</a:t>
+            </a:r>
+            <a:r>
+              <a:rPr lang="en-US" dirty="0" smtClean="0"/>
+              <a:t>.</a:t>
+            </a:r>
+          </a:p>
+          <a:p>
+            <a:r>
+              <a:rPr lang="en-US" dirty="0" smtClean="0"/>
+              <a:t>The </a:t>
+            </a:r>
+            <a:r>
+              <a:rPr lang="en-US" dirty="0"/>
+              <a:t>analysis identified 297 transactions within these extreme ranges</a:t>
+            </a:r>
+            <a:r>
+              <a:rPr lang="en-US" dirty="0" smtClean="0"/>
+              <a:t>.</a:t>
+            </a:r>
+          </a:p>
+          <a:p>
+            <a:r>
+              <a:rPr lang="en-US" dirty="0" smtClean="0"/>
+              <a:t>These </a:t>
+            </a:r>
+            <a:r>
+              <a:rPr lang="en-US" dirty="0"/>
+              <a:t>values may represent genuine unusual transactions or potential outliers</a:t>
+            </a:r>
+            <a:r>
+              <a:rPr lang="en-US" dirty="0" smtClean="0"/>
+              <a:t>.</a:t>
+            </a:r>
+          </a:p>
+          <a:p>
+            <a:r>
+              <a:rPr lang="en-US" dirty="0" smtClean="0"/>
+              <a:t>The </a:t>
+            </a:r>
+            <a:r>
+              <a:rPr lang="en-US" dirty="0"/>
+              <a:t>affected records should be validated before further analysis.</a:t>
+            </a:r>
+          </a:p>
+        </p:txBody>
+      </p:sp>
+      <p:pic>
+        <p:nvPicPr>
+          <p:cNvPr id="8" name="Picture 7"/>
+          <p:cNvPicPr>
+            <a:picLocks noChangeAspect="1"/>
+          </p:cNvPicPr>
+          <p:nvPr/>
+        </p:nvPicPr>
+        <p:blipFill>
+          <a:blip r:embed="rId4" cstate="print">
+            <a:extLst>
+              <a:ext uri="{28A0092B-C50C-407E-A947-70E740481C1C}">
+                <a14:useLocalDpi xmlns:a14="http://schemas.microsoft.com/office/drawing/2010/main" val="0"/>
+              </a:ext>
+            </a:extLst>
+          </a:blip>
+          <a:stretch>
+            <a:fillRect/>
+          </a:stretch>
+        </p:blipFill>
+        <p:spPr>
+          <a:xfrm>
+            <a:off x="62702" y="2594720"/>
+            <a:ext cx="6886738" cy="4241292"/>
           </a:xfrm>
           <a:prstGeom prst="rect">
             <a:avLst/>
@@ -7196,7 +7961,7 @@
     </p:spTree>
     <p:extLst>
       <p:ext uri="{BB962C8B-B14F-4D97-AF65-F5344CB8AC3E}">
-        <p14:creationId xmlns:p14="http://schemas.microsoft.com/office/powerpoint/2010/main" val="2463073901"/>
+        <p14:creationId xmlns:p14="http://schemas.microsoft.com/office/powerpoint/2010/main" val="2607725332"/>
       </p:ext>
     </p:extLst>
   </p:cSld>
@@ -7235,13 +8000,13 @@
         </p:nvSpPr>
         <p:spPr>
           <a:xfrm>
-            <a:off x="0" y="0"/>
-            <a:ext cx="10515600" cy="1080097"/>
+            <a:off x="0" y="79781"/>
+            <a:ext cx="11355388" cy="840756"/>
           </a:xfrm>
         </p:spPr>
         <p:txBody>
           <a:bodyPr>
-            <a:normAutofit/>
+            <a:noAutofit/>
           </a:bodyPr>
           <a:lstStyle/>
           <a:p>
@@ -7253,7 +8018,7 @@
                   </a:schemeClr>
                 </a:solidFill>
               </a:rPr>
-              <a:t>QUESTION 13: Produce a cleaned and validated retail sales dataset and export it as a new CSV file</a:t>
+              <a:t>QUESTION 12: Detect and appropriately handle outliers in sales, profit, and quantity variables</a:t>
             </a:r>
             <a:endParaRPr lang="en-US" sz="2400" dirty="0">
               <a:solidFill>
@@ -7277,7 +8042,7 @@
         </p:nvSpPr>
         <p:spPr>
           <a:xfrm>
-            <a:off x="0" y="899858"/>
+            <a:off x="0" y="564245"/>
             <a:ext cx="5157787" cy="823912"/>
           </a:xfrm>
         </p:spPr>
@@ -7287,7 +8052,7 @@
           <a:p>
             <a:r>
               <a:rPr lang="en-US" dirty="0" smtClean="0"/>
-              <a:t>code</a:t>
+              <a:t>Code</a:t>
             </a:r>
             <a:endParaRPr lang="en-US" dirty="0"/>
           </a:p>
@@ -7317,8 +8082,8 @@
         </p:blipFill>
         <p:spPr>
           <a:xfrm>
-            <a:off x="140362" y="1999376"/>
-            <a:ext cx="6033371" cy="4683722"/>
+            <a:off x="60626" y="1405000"/>
+            <a:ext cx="6217899" cy="2576893"/>
           </a:xfrm>
         </p:spPr>
       </p:pic>
@@ -7334,8 +8099,8 @@
         </p:nvSpPr>
         <p:spPr>
           <a:xfrm>
-            <a:off x="7309063" y="899858"/>
-            <a:ext cx="4829750" cy="823912"/>
+            <a:off x="7603633" y="564244"/>
+            <a:ext cx="4457499" cy="823912"/>
           </a:xfrm>
         </p:spPr>
         <p:txBody>
@@ -7343,12 +8108,8 @@
           <a:lstStyle/>
           <a:p>
             <a:r>
-              <a:rPr lang="en-US" dirty="0" smtClean="0"/>
-              <a:t>Explanatio</a:t>
-            </a:r>
-            <a:r>
-              <a:rPr lang="en-US" dirty="0"/>
-              <a:t>n</a:t>
+              <a:rPr lang="en-US" dirty="0"/>
+              <a:t>Key findings</a:t>
             </a:r>
           </a:p>
         </p:txBody>
@@ -7365,50 +8126,34 @@
         </p:nvSpPr>
         <p:spPr>
           <a:xfrm>
-            <a:off x="6762878" y="1830014"/>
-            <a:ext cx="5359623" cy="5027985"/>
+            <a:off x="7603635" y="1388155"/>
+            <a:ext cx="4457498" cy="5469843"/>
           </a:xfrm>
         </p:spPr>
         <p:txBody>
           <a:bodyPr>
-            <a:normAutofit lnSpcReduction="10000"/>
+            <a:normAutofit fontScale="92500" lnSpcReduction="20000"/>
           </a:bodyPr>
           <a:lstStyle/>
           <a:p>
             <a:r>
               <a:rPr lang="en-US" dirty="0"/>
-              <a:t>The cleaned dataset is exported</a:t>
-            </a:r>
-            <a:r>
-              <a:rPr lang="en-US" dirty="0" smtClean="0"/>
-              <a:t>:</a:t>
+              <a:t>Total Sales: The acceptable range is approximately -280 to 200</a:t>
+            </a:r>
+            <a:r>
+              <a:rPr lang="en-US" dirty="0" smtClean="0"/>
+              <a:t>.</a:t>
             </a:r>
           </a:p>
           <a:p>
             <a:pPr lvl="1"/>
             <a:r>
               <a:rPr lang="en-US" dirty="0" smtClean="0"/>
-              <a:t>The </a:t>
-            </a:r>
-            <a:r>
-              <a:rPr lang="en-US" dirty="0"/>
-              <a:t>code saves the cleaned </a:t>
-            </a:r>
-            <a:r>
-              <a:rPr lang="en-US" dirty="0" err="1"/>
-              <a:t>df</a:t>
-            </a:r>
-            <a:r>
-              <a:rPr lang="en-US" dirty="0"/>
-              <a:t> as a new CSV </a:t>
-            </a:r>
-            <a:r>
-              <a:rPr lang="en-US" dirty="0" err="1"/>
-              <a:t>file.This</a:t>
-            </a:r>
-            <a:r>
-              <a:rPr lang="en-US" dirty="0"/>
-              <a:t> preserves the validated data for future use</a:t>
+              <a:t>→ </a:t>
+            </a:r>
+            <a:r>
+              <a:rPr lang="en-US" dirty="0"/>
+              <a:t>Values above 200 are considered potential outliers</a:t>
             </a:r>
             <a:r>
               <a:rPr lang="en-US" dirty="0" smtClean="0"/>
@@ -7418,34 +8163,26 @@
           <a:p>
             <a:r>
               <a:rPr lang="en-US" dirty="0" smtClean="0"/>
-              <a:t>The </a:t>
-            </a:r>
-            <a:r>
-              <a:rPr lang="en-US" dirty="0"/>
-              <a:t>index is excluded</a:t>
-            </a:r>
-            <a:r>
-              <a:rPr lang="en-US" dirty="0" smtClean="0"/>
-              <a:t>:</a:t>
+              <a:t>Profit</a:t>
+            </a:r>
+            <a:r>
+              <a:rPr lang="en-US" dirty="0"/>
+              <a:t>: The acceptable range is approximately -98.5 to 73.58</a:t>
+            </a:r>
+            <a:r>
+              <a:rPr lang="en-US" dirty="0" smtClean="0"/>
+              <a:t>.</a:t>
             </a:r>
           </a:p>
           <a:p>
             <a:pPr lvl="1"/>
             <a:r>
               <a:rPr lang="en-US" dirty="0" smtClean="0"/>
-              <a:t>index=False </a:t>
-            </a:r>
-            <a:r>
-              <a:rPr lang="en-US" dirty="0"/>
-              <a:t>prevents pandas from adding an unnecessary index </a:t>
-            </a:r>
-            <a:r>
-              <a:rPr lang="en-US" dirty="0" err="1"/>
-              <a:t>column.This</a:t>
-            </a:r>
-            <a:r>
-              <a:rPr lang="en-US" dirty="0"/>
-              <a:t> keeps the exported dataset clean</a:t>
+              <a:t>→ </a:t>
+            </a:r>
+            <a:r>
+              <a:rPr lang="en-US" dirty="0"/>
+              <a:t>Profits above 73.58 or below -98.5 may be outliers</a:t>
             </a:r>
             <a:r>
               <a:rPr lang="en-US" dirty="0" smtClean="0"/>
@@ -7455,43 +8192,65 @@
           <a:p>
             <a:r>
               <a:rPr lang="en-US" dirty="0" smtClean="0"/>
-              <a:t>The </a:t>
-            </a:r>
-            <a:r>
-              <a:rPr lang="en-US" dirty="0"/>
-              <a:t>file can be reused</a:t>
-            </a:r>
-            <a:r>
-              <a:rPr lang="en-US" dirty="0" smtClean="0"/>
-              <a:t>:</a:t>
+              <a:t>Quantity</a:t>
+            </a:r>
+            <a:r>
+              <a:rPr lang="en-US" dirty="0"/>
+              <a:t>: The acceptable range is approximately -4.5 to 15.5</a:t>
+            </a:r>
+            <a:r>
+              <a:rPr lang="en-US" dirty="0" smtClean="0"/>
+              <a:t>.</a:t>
             </a:r>
           </a:p>
           <a:p>
             <a:pPr lvl="1"/>
             <a:r>
               <a:rPr lang="en-US" dirty="0" smtClean="0"/>
-              <a:t>The </a:t>
-            </a:r>
-            <a:r>
-              <a:rPr lang="en-US" dirty="0"/>
-              <a:t>new CSV can be opened, shared, or imported for further </a:t>
-            </a:r>
-            <a:r>
-              <a:rPr lang="en-US" dirty="0" err="1"/>
-              <a:t>analysis.It</a:t>
-            </a:r>
-            <a:r>
-              <a:rPr lang="en-US" dirty="0"/>
-              <a:t> also completes the data-cleaning stage of the project.</a:t>
+              <a:t>→ </a:t>
+            </a:r>
+            <a:r>
+              <a:rPr lang="en-US" dirty="0"/>
+              <a:t>Quantities above 15.5 may be considered outliers. Since quantity normally cannot be negative, the negative lower boundary is mainly a mathematical result of the IQR method.</a:t>
             </a:r>
             <a:endParaRPr lang="en-US" dirty="0"/>
           </a:p>
         </p:txBody>
       </p:sp>
+      <p:pic>
+        <p:nvPicPr>
+          <p:cNvPr id="8" name="Picture 7"/>
+          <p:cNvPicPr>
+            <a:picLocks noChangeAspect="1"/>
+          </p:cNvPicPr>
+          <p:nvPr/>
+        </p:nvPicPr>
+        <p:blipFill>
+          <a:blip r:embed="rId3" cstate="print">
+            <a:extLst>
+              <a:ext uri="{28A0092B-C50C-407E-A947-70E740481C1C}">
+                <a14:useLocalDpi xmlns:a14="http://schemas.microsoft.com/office/drawing/2010/main" val="0"/>
+              </a:ext>
+            </a:extLst>
+          </a:blip>
+          <a:stretch>
+            <a:fillRect/>
+          </a:stretch>
+        </p:blipFill>
+        <p:spPr>
+          <a:xfrm>
+            <a:off x="60626" y="3998735"/>
+            <a:ext cx="3240783" cy="1817273"/>
+          </a:xfrm>
+          <a:prstGeom prst="rect">
+            <a:avLst/>
+          </a:prstGeom>
+        </p:spPr>
+      </p:pic>
     </p:spTree>
     <p:extLst>
       <p:ext uri="{BB962C8B-B14F-4D97-AF65-F5344CB8AC3E}">
-        <p14:creationId xmlns:p14="http://schemas.microsoft.com/office/powerpoint/2010/main" val="2383494953"/>
+        <p14:creationId xmlns:p14="http://schemas.microsoft.com/office/powerpoint/2010/main" val="2463073901"/>
       </p:ext>
     </p:extLst>
   </p:cSld>
@@ -7530,8 +8289,8 @@
         </p:nvSpPr>
         <p:spPr>
           <a:xfrm>
-            <a:off x="0" y="1"/>
-            <a:ext cx="10557946" cy="834656"/>
+            <a:off x="0" y="0"/>
+            <a:ext cx="10515600" cy="1080097"/>
           </a:xfrm>
         </p:spPr>
         <p:txBody>
@@ -7541,9 +8300,22 @@
           <a:lstStyle/>
           <a:p>
             <a:r>
-              <a:rPr lang="en-US" sz="2400" dirty="0"/>
-              <a:t>Question 14: Analyze sales performance across different branches.</a:t>
-            </a:r>
+              <a:rPr lang="en-US" sz="2400" b="1" dirty="0">
+                <a:solidFill>
+                  <a:schemeClr val="accent1">
+                    <a:lumMod val="75000"/>
+                  </a:schemeClr>
+                </a:solidFill>
+              </a:rPr>
+              <a:t>QUESTION 13: Produce a cleaned and validated retail sales dataset and export it as a new CSV file</a:t>
+            </a:r>
+            <a:endParaRPr lang="en-US" sz="2400" dirty="0">
+              <a:solidFill>
+                <a:schemeClr val="accent1">
+                  <a:lumMod val="75000"/>
+                </a:schemeClr>
+              </a:solidFill>
+            </a:endParaRPr>
           </a:p>
         </p:txBody>
       </p:sp>
@@ -7559,8 +8331,8 @@
         </p:nvSpPr>
         <p:spPr>
           <a:xfrm>
-            <a:off x="0" y="554112"/>
-            <a:ext cx="7006856" cy="823912"/>
+            <a:off x="0" y="899858"/>
+            <a:ext cx="5157787" cy="823912"/>
           </a:xfrm>
         </p:spPr>
         <p:txBody>
@@ -7599,8 +8371,8 @@
         </p:blipFill>
         <p:spPr>
           <a:xfrm>
-            <a:off x="110156" y="1932135"/>
-            <a:ext cx="6839301" cy="3326519"/>
+            <a:off x="140362" y="1999376"/>
+            <a:ext cx="6033371" cy="4683722"/>
           </a:xfrm>
         </p:spPr>
       </p:pic>
@@ -7616,8 +8388,8 @@
         </p:nvSpPr>
         <p:spPr>
           <a:xfrm>
-            <a:off x="7506585" y="554112"/>
-            <a:ext cx="4685415" cy="823912"/>
+            <a:off x="7309063" y="899858"/>
+            <a:ext cx="4829750" cy="823912"/>
           </a:xfrm>
         </p:spPr>
         <p:txBody>
@@ -7625,192 +8397,88 @@
           <a:lstStyle/>
           <a:p>
             <a:r>
-              <a:rPr lang="en-US" dirty="0" smtClean="0"/>
-              <a:t>explanation</a:t>
+              <a:rPr lang="en-US" dirty="0"/>
+              <a:t>Key findings</a:t>
+            </a:r>
+          </a:p>
+        </p:txBody>
+      </p:sp>
+      <p:sp>
+        <p:nvSpPr>
+          <p:cNvPr id="6" name="Content Placeholder 5"/>
+          <p:cNvSpPr>
+            <a:spLocks noGrp="1"/>
+          </p:cNvSpPr>
+          <p:nvPr>
+            <p:ph sz="quarter" idx="4"/>
+          </p:nvPr>
+        </p:nvSpPr>
+        <p:spPr>
+          <a:xfrm>
+            <a:off x="6762878" y="1830014"/>
+            <a:ext cx="5359623" cy="5027985"/>
+          </a:xfrm>
+        </p:spPr>
+        <p:txBody>
+          <a:bodyPr>
+            <a:normAutofit fontScale="92500" lnSpcReduction="10000"/>
+          </a:bodyPr>
+          <a:lstStyle/>
+          <a:p>
+            <a:r>
+              <a:rPr lang="en-US" dirty="0"/>
+              <a:t>1. The cleaned dataset still contains 2,000 records and 34 variables, so the cleaning process did not remove the dataset's overall structure</a:t>
+            </a:r>
+            <a:r>
+              <a:rPr lang="en-US" dirty="0" smtClean="0"/>
+              <a:t>.</a:t>
+            </a:r>
+          </a:p>
+          <a:p>
+            <a:r>
+              <a:rPr lang="en-US" dirty="0" smtClean="0"/>
+              <a:t>2</a:t>
+            </a:r>
+            <a:r>
+              <a:rPr lang="en-US" dirty="0"/>
+              <a:t>. The cleaned dataset was successfully exported as a new CSV file named cleaned_retail_sales.csv</a:t>
+            </a:r>
+            <a:r>
+              <a:rPr lang="en-US" dirty="0" smtClean="0"/>
+              <a:t>.</a:t>
+            </a:r>
+          </a:p>
+          <a:p>
+            <a:r>
+              <a:rPr lang="en-US" dirty="0" smtClean="0"/>
+              <a:t>3</a:t>
+            </a:r>
+            <a:r>
+              <a:rPr lang="en-US" dirty="0"/>
+              <a:t>. No extra index column was added to the exported file, keeping the dataset structure clean</a:t>
+            </a:r>
+            <a:r>
+              <a:rPr lang="en-US" dirty="0" smtClean="0"/>
+              <a:t>.</a:t>
+            </a:r>
+          </a:p>
+          <a:p>
+            <a:r>
+              <a:rPr lang="en-US" dirty="0" smtClean="0"/>
+              <a:t>4</a:t>
+            </a:r>
+            <a:r>
+              <a:rPr lang="en-US" dirty="0"/>
+              <a:t>. The cleaned file is ready for reuse, such as opening, sharing, or using it for further analysis.</a:t>
             </a:r>
             <a:endParaRPr lang="en-US" dirty="0"/>
-          </a:p>
-        </p:txBody>
-      </p:sp>
-      <p:sp>
-        <p:nvSpPr>
-          <p:cNvPr id="6" name="Content Placeholder 5"/>
-          <p:cNvSpPr>
-            <a:spLocks noGrp="1"/>
-          </p:cNvSpPr>
-          <p:nvPr>
-            <p:ph sz="quarter" idx="4"/>
-          </p:nvPr>
-        </p:nvSpPr>
-        <p:spPr>
-          <a:xfrm>
-            <a:off x="7506586" y="1388767"/>
-            <a:ext cx="4653332" cy="5341641"/>
-          </a:xfrm>
-        </p:spPr>
-        <p:txBody>
-          <a:bodyPr>
-            <a:normAutofit fontScale="70000" lnSpcReduction="20000"/>
-          </a:bodyPr>
-          <a:lstStyle/>
-          <a:p>
-            <a:r>
-              <a:rPr lang="en-US" dirty="0"/>
-              <a:t>Branch sales are grouped together</a:t>
-            </a:r>
-            <a:r>
-              <a:rPr lang="en-US" dirty="0" smtClean="0"/>
-              <a:t>:</a:t>
-            </a:r>
-          </a:p>
-          <a:p>
-            <a:pPr lvl="1"/>
-            <a:r>
-              <a:rPr lang="en-US" dirty="0" smtClean="0"/>
-              <a:t>The </a:t>
-            </a:r>
-            <a:r>
-              <a:rPr lang="en-US" dirty="0"/>
-              <a:t>code groups all transactions according to the Branch </a:t>
-            </a:r>
-            <a:r>
-              <a:rPr lang="en-US" dirty="0" err="1"/>
-              <a:t>column.It</a:t>
-            </a:r>
-            <a:r>
-              <a:rPr lang="en-US" dirty="0"/>
-              <a:t> then calculates the total sales generated by each branch</a:t>
-            </a:r>
-            <a:r>
-              <a:rPr lang="en-US" dirty="0" smtClean="0"/>
-              <a:t>.</a:t>
-            </a:r>
-          </a:p>
-          <a:p>
-            <a:r>
-              <a:rPr lang="en-US" dirty="0" smtClean="0"/>
-              <a:t>Total </a:t>
-            </a:r>
-            <a:r>
-              <a:rPr lang="en-US" dirty="0"/>
-              <a:t>sales are calculated</a:t>
-            </a:r>
-            <a:r>
-              <a:rPr lang="en-US" dirty="0" smtClean="0"/>
-              <a:t>:</a:t>
-            </a:r>
-          </a:p>
-          <a:p>
-            <a:pPr lvl="1"/>
-            <a:r>
-              <a:rPr lang="en-US" dirty="0" smtClean="0"/>
-              <a:t>The </a:t>
-            </a:r>
-            <a:r>
-              <a:rPr lang="en-US" dirty="0"/>
-              <a:t>sum() function adds together the </a:t>
-            </a:r>
-            <a:r>
-              <a:rPr lang="en-US" dirty="0" err="1"/>
-              <a:t>Total_Sales</a:t>
-            </a:r>
-            <a:r>
-              <a:rPr lang="en-US" dirty="0"/>
-              <a:t> values for each </a:t>
-            </a:r>
-            <a:r>
-              <a:rPr lang="en-US" dirty="0" err="1"/>
-              <a:t>branch.This</a:t>
-            </a:r>
-            <a:r>
-              <a:rPr lang="en-US" dirty="0"/>
-              <a:t> gives an overall measure of sales performance for every branch</a:t>
-            </a:r>
-            <a:r>
-              <a:rPr lang="en-US" dirty="0" smtClean="0"/>
-              <a:t>.</a:t>
-            </a:r>
-          </a:p>
-          <a:p>
-            <a:r>
-              <a:rPr lang="en-US" dirty="0" smtClean="0"/>
-              <a:t>Branches </a:t>
-            </a:r>
-            <a:r>
-              <a:rPr lang="en-US" dirty="0"/>
-              <a:t>are arranged from highest to lowest</a:t>
-            </a:r>
-            <a:r>
-              <a:rPr lang="en-US" dirty="0" smtClean="0"/>
-              <a:t>:</a:t>
-            </a:r>
-          </a:p>
-          <a:p>
-            <a:pPr lvl="1"/>
-            <a:r>
-              <a:rPr lang="en-US" dirty="0" smtClean="0"/>
-              <a:t>The </a:t>
-            </a:r>
-            <a:r>
-              <a:rPr lang="en-US" dirty="0" err="1"/>
-              <a:t>sort_values</a:t>
-            </a:r>
-            <a:r>
-              <a:rPr lang="en-US" dirty="0"/>
-              <a:t>(ascending=False) function places the branch with the highest sales </a:t>
-            </a:r>
-            <a:r>
-              <a:rPr lang="en-US" dirty="0" err="1"/>
-              <a:t>first.This</a:t>
-            </a:r>
-            <a:r>
-              <a:rPr lang="en-US" dirty="0"/>
-              <a:t> makes it easier to compare branch performance and identify differences</a:t>
-            </a:r>
-            <a:r>
-              <a:rPr lang="en-US" dirty="0" smtClean="0"/>
-              <a:t>.</a:t>
-            </a:r>
-          </a:p>
-          <a:p>
-            <a:r>
-              <a:rPr lang="en-US" dirty="0" smtClean="0"/>
-              <a:t>Business </a:t>
-            </a:r>
-            <a:r>
-              <a:rPr lang="en-US" dirty="0"/>
-              <a:t>performance can be compared</a:t>
-            </a:r>
-            <a:r>
-              <a:rPr lang="en-US" dirty="0" smtClean="0"/>
-              <a:t>:</a:t>
-            </a:r>
-          </a:p>
-          <a:p>
-            <a:pPr lvl="1"/>
-            <a:r>
-              <a:rPr lang="en-US" dirty="0" smtClean="0"/>
-              <a:t>The </a:t>
-            </a:r>
-            <a:r>
-              <a:rPr lang="en-US" dirty="0"/>
-              <a:t>resulting output provides a clear comparison of sales across </a:t>
-            </a:r>
-            <a:r>
-              <a:rPr lang="en-US" dirty="0" err="1"/>
-              <a:t>branches.It</a:t>
-            </a:r>
-            <a:r>
-              <a:rPr lang="en-US" dirty="0"/>
-              <a:t> can be used to identify branches generating higher or lower total sales.</a:t>
-            </a:r>
           </a:p>
         </p:txBody>
       </p:sp>
     </p:spTree>
     <p:extLst>
       <p:ext uri="{BB962C8B-B14F-4D97-AF65-F5344CB8AC3E}">
-        <p14:creationId xmlns:p14="http://schemas.microsoft.com/office/powerpoint/2010/main" val="4287859496"/>
+        <p14:creationId xmlns:p14="http://schemas.microsoft.com/office/powerpoint/2010/main" val="2383494953"/>
       </p:ext>
     </p:extLst>
   </p:cSld>
@@ -7847,7 +8515,12 @@
             <p:ph type="title"/>
           </p:nvPr>
         </p:nvSpPr>
-        <p:spPr/>
+        <p:spPr>
+          <a:xfrm>
+            <a:off x="0" y="1"/>
+            <a:ext cx="10557946" cy="834656"/>
+          </a:xfrm>
+        </p:spPr>
         <p:txBody>
           <a:bodyPr>
             <a:normAutofit/>
@@ -7873,8 +8546,8 @@
         </p:nvSpPr>
         <p:spPr>
           <a:xfrm>
-            <a:off x="515495" y="1253369"/>
-            <a:ext cx="5157787" cy="823912"/>
+            <a:off x="0" y="554112"/>
+            <a:ext cx="7006856" cy="823912"/>
           </a:xfrm>
         </p:spPr>
         <p:txBody>
@@ -7913,8 +8586,8 @@
         </p:blipFill>
         <p:spPr>
           <a:xfrm>
-            <a:off x="304780" y="2188335"/>
-            <a:ext cx="5213517" cy="3266167"/>
+            <a:off x="110156" y="1932135"/>
+            <a:ext cx="6839301" cy="3326519"/>
           </a:xfrm>
         </p:spPr>
       </p:pic>
@@ -7930,8 +8603,8 @@
         </p:nvSpPr>
         <p:spPr>
           <a:xfrm>
-            <a:off x="6172200" y="1364423"/>
-            <a:ext cx="5183188" cy="823912"/>
+            <a:off x="7506585" y="554112"/>
+            <a:ext cx="4685415" cy="823912"/>
           </a:xfrm>
         </p:spPr>
         <p:txBody>
@@ -7939,8 +8612,12 @@
           <a:lstStyle/>
           <a:p>
             <a:r>
-              <a:rPr lang="en-US" dirty="0" smtClean="0"/>
-              <a:t>Explanation</a:t>
+              <a:rPr lang="en-US" dirty="0"/>
+              <a:t>Key </a:t>
+            </a:r>
+            <a:r>
+              <a:rPr lang="en-US" dirty="0" smtClean="0"/>
+              <a:t>findings</a:t>
             </a:r>
             <a:endParaRPr lang="en-US" dirty="0"/>
           </a:p>
@@ -7958,173 +8635,60 @@
         </p:nvSpPr>
         <p:spPr>
           <a:xfrm>
-            <a:off x="6172200" y="2254102"/>
-            <a:ext cx="5183188" cy="4603897"/>
+            <a:off x="7506586" y="1388767"/>
+            <a:ext cx="4653332" cy="5341641"/>
           </a:xfrm>
         </p:spPr>
         <p:txBody>
           <a:bodyPr>
-            <a:normAutofit fontScale="70000" lnSpcReduction="20000"/>
+            <a:normAutofit/>
           </a:bodyPr>
           <a:lstStyle/>
           <a:p>
             <a:r>
-              <a:rPr lang="en-US" dirty="0"/>
-              <a:t>The grouped results are converted into a </a:t>
-            </a:r>
-            <a:r>
-              <a:rPr lang="en-US" dirty="0" err="1" smtClean="0"/>
-              <a:t>DataFrame</a:t>
-            </a:r>
-            <a:r>
-              <a:rPr lang="en-US" dirty="0" smtClean="0"/>
-              <a:t>:</a:t>
-            </a:r>
-          </a:p>
-          <a:p>
-            <a:pPr lvl="1"/>
-            <a:r>
-              <a:rPr lang="en-US" dirty="0" err="1" smtClean="0"/>
-              <a:t>reset_index</a:t>
-            </a:r>
-            <a:r>
-              <a:rPr lang="en-US" dirty="0"/>
-              <a:t>() changes the grouped branch results into a standard </a:t>
-            </a:r>
-            <a:r>
               <a:rPr lang="en-US" dirty="0" err="1"/>
-              <a:t>table.This</a:t>
-            </a:r>
-            <a:r>
-              <a:rPr lang="en-US" dirty="0"/>
-              <a:t> makes the results easier to read and use for further analysis</a:t>
-            </a:r>
-            <a:r>
-              <a:rPr lang="en-US" dirty="0" smtClean="0"/>
-              <a:t>.</a:t>
-            </a:r>
-          </a:p>
-          <a:p>
-            <a:r>
-              <a:rPr lang="en-US" dirty="0" smtClean="0"/>
-              <a:t>Column </a:t>
-            </a:r>
-            <a:r>
-              <a:rPr lang="en-US" dirty="0"/>
-              <a:t>names are standardized</a:t>
-            </a:r>
-            <a:r>
-              <a:rPr lang="en-US" dirty="0" smtClean="0"/>
-              <a:t>:</a:t>
-            </a:r>
-          </a:p>
-          <a:p>
-            <a:pPr lvl="1"/>
-            <a:r>
-              <a:rPr lang="en-US" dirty="0" smtClean="0"/>
-              <a:t>The </a:t>
-            </a:r>
-            <a:r>
-              <a:rPr lang="en-US" dirty="0"/>
-              <a:t>columns are renamed to Branch and </a:t>
-            </a:r>
+              <a:t>Eldoret</a:t>
+            </a:r>
+            <a:r>
+              <a:rPr lang="en-US" dirty="0"/>
+              <a:t> recorded the highest total sales at 44,258.69.</a:t>
+            </a:r>
+          </a:p>
+          <a:p>
             <a:r>
               <a:rPr lang="en-US" dirty="0" err="1"/>
-              <a:t>Total_Sales.This</a:t>
-            </a:r>
-            <a:r>
-              <a:rPr lang="en-US" dirty="0"/>
-              <a:t> gives the table clear and understandable labels</a:t>
-            </a:r>
-            <a:r>
-              <a:rPr lang="en-US" dirty="0" smtClean="0"/>
-              <a:t>.</a:t>
-            </a:r>
-          </a:p>
-          <a:p>
-            <a:r>
-              <a:rPr lang="en-US" dirty="0" smtClean="0"/>
-              <a:t>The </a:t>
-            </a:r>
-            <a:r>
-              <a:rPr lang="en-US" dirty="0"/>
-              <a:t>table presents branch sales clearly</a:t>
-            </a:r>
-            <a:r>
-              <a:rPr lang="en-US" dirty="0" smtClean="0"/>
-              <a:t>:</a:t>
-            </a:r>
-          </a:p>
-          <a:p>
-            <a:pPr lvl="1"/>
-            <a:r>
-              <a:rPr lang="en-US" dirty="0" smtClean="0"/>
-              <a:t>Each </a:t>
-            </a:r>
-            <a:r>
-              <a:rPr lang="en-US" dirty="0"/>
-              <a:t>row represents a different branch and its corresponding total </a:t>
-            </a:r>
-            <a:r>
-              <a:rPr lang="en-US" dirty="0" err="1"/>
-              <a:t>sales.This</a:t>
-            </a:r>
-            <a:r>
-              <a:rPr lang="en-US" dirty="0"/>
-              <a:t> format is useful for reporting and creating visualizations</a:t>
-            </a:r>
-            <a:r>
-              <a:rPr lang="en-US" dirty="0" smtClean="0"/>
-              <a:t>.</a:t>
-            </a:r>
-          </a:p>
-          <a:p>
-            <a:r>
-              <a:rPr lang="en-US" dirty="0" smtClean="0"/>
-              <a:t>Results </a:t>
-            </a:r>
-            <a:r>
-              <a:rPr lang="en-US" dirty="0"/>
-              <a:t>can be used for further analysis</a:t>
-            </a:r>
-            <a:r>
-              <a:rPr lang="en-US" dirty="0" smtClean="0"/>
-              <a:t>:</a:t>
-            </a:r>
-          </a:p>
-          <a:p>
-            <a:pPr lvl="1"/>
-            <a:r>
-              <a:rPr lang="en-US" dirty="0" smtClean="0"/>
-              <a:t>The </a:t>
-            </a:r>
-            <a:r>
-              <a:rPr lang="en-US" dirty="0"/>
-              <a:t>resulting </a:t>
-            </a:r>
-            <a:r>
-              <a:rPr lang="en-US" dirty="0" err="1"/>
-              <a:t>DataFrame</a:t>
-            </a:r>
-            <a:r>
-              <a:rPr lang="en-US" dirty="0"/>
-              <a:t> can easily be used to create charts or </a:t>
-            </a:r>
-            <a:r>
-              <a:rPr lang="en-US" dirty="0" err="1"/>
-              <a:t>comparisons.It</a:t>
-            </a:r>
-            <a:r>
-              <a:rPr lang="en-US" dirty="0"/>
-              <a:t> also provides a structured summary of branch-level sales performance.</a:t>
-            </a:r>
+              <a:t>Nakuru</a:t>
+            </a:r>
+            <a:r>
+              <a:rPr lang="en-US" dirty="0"/>
+              <a:t> ranked second with 30,110.31 in total sales.</a:t>
+            </a:r>
+          </a:p>
+          <a:p>
+            <a:r>
+              <a:rPr lang="en-US" dirty="0"/>
+              <a:t>Nairobi followed with 28,595.52.</a:t>
+            </a:r>
+          </a:p>
+          <a:p>
+            <a:r>
+              <a:rPr lang="en-US" dirty="0"/>
+              <a:t>Mombasa recorded 26,328.07.</a:t>
+            </a:r>
+          </a:p>
+          <a:p>
+            <a:r>
+              <a:rPr lang="en-US" dirty="0"/>
+              <a:t>Kisumu had the lowest total sales at 22,674.85.</a:t>
+            </a:r>
+            <a:endParaRPr lang="en-US" dirty="0"/>
           </a:p>
         </p:txBody>
       </p:sp>
     </p:spTree>
     <p:extLst>
       <p:ext uri="{BB962C8B-B14F-4D97-AF65-F5344CB8AC3E}">
-        <p14:creationId xmlns:p14="http://schemas.microsoft.com/office/powerpoint/2010/main" val="2514584428"/>
+        <p14:creationId xmlns:p14="http://schemas.microsoft.com/office/powerpoint/2010/main" val="4287859496"/>
       </p:ext>
     </p:extLst>
   </p:cSld>
@@ -8161,12 +8725,7 @@
             <p:ph type="title"/>
           </p:nvPr>
         </p:nvSpPr>
-        <p:spPr>
-          <a:xfrm>
-            <a:off x="0" y="0"/>
-            <a:ext cx="10515600" cy="813391"/>
-          </a:xfrm>
-        </p:spPr>
+        <p:spPr/>
         <p:txBody>
           <a:bodyPr>
             <a:normAutofit/>
@@ -8175,13 +8734,8 @@
           <a:p>
             <a:r>
               <a:rPr lang="en-US" sz="2400" dirty="0"/>
-              <a:t>Question 14: Analyze sales performance across different </a:t>
-            </a:r>
-            <a:r>
-              <a:rPr lang="en-US" sz="2400" dirty="0" smtClean="0"/>
-              <a:t>branches.</a:t>
-            </a:r>
-            <a:endParaRPr lang="en-US" sz="2400" dirty="0"/>
+              <a:t>Question 14: Analyze sales performance across different branches.</a:t>
+            </a:r>
           </a:p>
         </p:txBody>
       </p:sp>
@@ -8197,7 +8751,7 @@
         </p:nvSpPr>
         <p:spPr>
           <a:xfrm>
-            <a:off x="0" y="718917"/>
+            <a:off x="515495" y="1253369"/>
             <a:ext cx="5157787" cy="823912"/>
           </a:xfrm>
         </p:spPr>
@@ -8207,7 +8761,7 @@
           <a:p>
             <a:r>
               <a:rPr lang="en-US" dirty="0" smtClean="0"/>
-              <a:t>Code</a:t>
+              <a:t>code</a:t>
             </a:r>
             <a:endParaRPr lang="en-US" dirty="0"/>
           </a:p>
@@ -8237,8 +8791,8 @@
         </p:blipFill>
         <p:spPr>
           <a:xfrm>
-            <a:off x="0" y="1473716"/>
-            <a:ext cx="5257800" cy="4209386"/>
+            <a:off x="304780" y="2188335"/>
+            <a:ext cx="5213517" cy="3266167"/>
           </a:xfrm>
         </p:spPr>
       </p:pic>
@@ -8254,7 +8808,7 @@
         </p:nvSpPr>
         <p:spPr>
           <a:xfrm>
-            <a:off x="6225363" y="208000"/>
+            <a:off x="6172200" y="1364423"/>
             <a:ext cx="5183188" cy="823912"/>
           </a:xfrm>
         </p:spPr>
@@ -8263,8 +8817,8 @@
           <a:lstStyle/>
           <a:p>
             <a:r>
-              <a:rPr lang="en-US" dirty="0" smtClean="0"/>
-              <a:t>Explanation</a:t>
+              <a:rPr lang="en-US" dirty="0"/>
+              <a:t>Key findings</a:t>
             </a:r>
             <a:endParaRPr lang="en-US" dirty="0"/>
           </a:p>
@@ -8282,42 +8836,23 @@
         </p:nvSpPr>
         <p:spPr>
           <a:xfrm>
-            <a:off x="6156067" y="1172588"/>
-            <a:ext cx="5183188" cy="5568453"/>
+            <a:off x="6172200" y="2254102"/>
+            <a:ext cx="5183188" cy="4603897"/>
           </a:xfrm>
         </p:spPr>
         <p:txBody>
           <a:bodyPr>
-            <a:normAutofit fontScale="77500" lnSpcReduction="20000"/>
+            <a:normAutofit/>
           </a:bodyPr>
           <a:lstStyle/>
           <a:p>
             <a:r>
-              <a:rPr lang="en-US" dirty="0"/>
-              <a:t>Several performance measures are calculated</a:t>
-            </a:r>
-            <a:r>
-              <a:rPr lang="en-US" dirty="0" smtClean="0"/>
-              <a:t>:</a:t>
-            </a:r>
-          </a:p>
-          <a:p>
-            <a:pPr lvl="1"/>
-            <a:r>
-              <a:rPr lang="en-US" dirty="0" smtClean="0"/>
-              <a:t>The </a:t>
-            </a:r>
-            <a:r>
-              <a:rPr lang="en-US" dirty="0"/>
-              <a:t>code summarizes each branch using total sales, average sales, quantity sold, and </a:t>
-            </a:r>
-            <a:r>
               <a:rPr lang="en-US" dirty="0" err="1"/>
-              <a:t>profit.This</a:t>
-            </a:r>
-            <a:r>
-              <a:rPr lang="en-US" dirty="0"/>
-              <a:t> provides a broader view of branch performance rather than relying on sales alone</a:t>
+              <a:t>Eldoret</a:t>
+            </a:r>
+            <a:r>
+              <a:rPr lang="en-US" dirty="0"/>
+              <a:t> recorded the highest total sales at 44,258.69</a:t>
             </a:r>
             <a:r>
               <a:rPr lang="en-US" dirty="0" smtClean="0"/>
@@ -8326,23 +8861,8 @@
           </a:p>
           <a:p>
             <a:r>
-              <a:rPr lang="en-US" dirty="0" smtClean="0"/>
-              <a:t>Total </a:t>
-            </a:r>
-            <a:r>
-              <a:rPr lang="en-US" dirty="0"/>
-              <a:t>and average sales are compared</a:t>
-            </a:r>
-            <a:r>
-              <a:rPr lang="en-US" dirty="0" smtClean="0"/>
-              <a:t>:</a:t>
-            </a:r>
-          </a:p>
-          <a:p>
-            <a:pPr lvl="1"/>
-            <a:r>
               <a:rPr lang="en-US" dirty="0" err="1" smtClean="0"/>
-              <a:t>Total_Sales</a:t>
+              <a:t>Nakuru</a:t>
             </a:r>
             <a:r>
               <a:rPr lang="en-US" dirty="0" smtClean="0"/>
@@ -8350,15 +8870,7 @@
             </a:r>
             <a:r>
               <a:rPr lang="en-US" dirty="0"/>
-              <a:t>shows the overall revenue generated by each </a:t>
-            </a:r>
-            <a:r>
-              <a:rPr lang="en-US" dirty="0" err="1"/>
-              <a:t>branch.Average_Sales</a:t>
-            </a:r>
-            <a:r>
-              <a:rPr lang="en-US" dirty="0"/>
-              <a:t> shows the average value of individual transactions</a:t>
+              <a:t>ranked second with 30,110.31 in total sales</a:t>
             </a:r>
             <a:r>
               <a:rPr lang="en-US" dirty="0" smtClean="0"/>
@@ -8368,38 +8880,11 @@
           <a:p>
             <a:r>
               <a:rPr lang="en-US" dirty="0" smtClean="0"/>
-              <a:t>Quantity </a:t>
-            </a:r>
-            <a:r>
-              <a:rPr lang="en-US" dirty="0"/>
-              <a:t>and profit are </a:t>
-            </a:r>
-            <a:r>
-              <a:rPr lang="en-US" dirty="0" smtClean="0"/>
-              <a:t>included:</a:t>
-            </a:r>
-          </a:p>
-          <a:p>
-            <a:pPr lvl="1"/>
-            <a:r>
-              <a:rPr lang="en-US" dirty="0" err="1" smtClean="0"/>
-              <a:t>Total_Quantity</a:t>
-            </a:r>
-            <a:r>
-              <a:rPr lang="en-US" dirty="0" smtClean="0"/>
-              <a:t> </a:t>
-            </a:r>
-            <a:r>
-              <a:rPr lang="en-US" dirty="0"/>
-              <a:t>indicates the number of products sold by each </a:t>
-            </a:r>
-            <a:r>
-              <a:rPr lang="en-US" dirty="0" err="1"/>
-              <a:t>branch.Total_Profit</a:t>
-            </a:r>
-            <a:r>
-              <a:rPr lang="en-US" dirty="0"/>
-              <a:t> shows the amount of profit generated by each branch</a:t>
+              <a:t>Nairobi </a:t>
+            </a:r>
+            <a:r>
+              <a:rPr lang="en-US" dirty="0"/>
+              <a:t>followed with 28,595.52</a:t>
             </a:r>
             <a:r>
               <a:rPr lang="en-US" dirty="0" smtClean="0"/>
@@ -8409,42 +8894,34 @@
           <a:p>
             <a:r>
               <a:rPr lang="en-US" dirty="0" smtClean="0"/>
-              <a:t>Branches </a:t>
-            </a:r>
-            <a:r>
-              <a:rPr lang="en-US" dirty="0"/>
-              <a:t>are ranked by total sales</a:t>
-            </a:r>
-            <a:r>
-              <a:rPr lang="en-US" dirty="0" smtClean="0"/>
-              <a:t>:</a:t>
-            </a:r>
-          </a:p>
-          <a:p>
-            <a:pPr lvl="1"/>
-            <a:r>
-              <a:rPr lang="en-US" dirty="0" smtClean="0"/>
-              <a:t>The </a:t>
-            </a:r>
-            <a:r>
-              <a:rPr lang="en-US" dirty="0"/>
-              <a:t>results are sorted from the highest to the lowest total </a:t>
-            </a:r>
-            <a:r>
-              <a:rPr lang="en-US" dirty="0" err="1"/>
-              <a:t>sales.This</a:t>
-            </a:r>
-            <a:r>
-              <a:rPr lang="en-US" dirty="0"/>
-              <a:t> makes it easier to identify differences in overall branch performance and profitability.</a:t>
-            </a:r>
+              <a:t>Mombasa </a:t>
+            </a:r>
+            <a:r>
+              <a:rPr lang="en-US" dirty="0"/>
+              <a:t>recorded 26,328.07</a:t>
+            </a:r>
+            <a:r>
+              <a:rPr lang="en-US" dirty="0" smtClean="0"/>
+              <a:t>.</a:t>
+            </a:r>
+          </a:p>
+          <a:p>
+            <a:r>
+              <a:rPr lang="en-US" dirty="0" smtClean="0"/>
+              <a:t>Kisumu </a:t>
+            </a:r>
+            <a:r>
+              <a:rPr lang="en-US" dirty="0"/>
+              <a:t>had the lowest total sales at 22,674.85.</a:t>
+            </a:r>
+            <a:endParaRPr lang="en-US" dirty="0"/>
           </a:p>
         </p:txBody>
       </p:sp>
     </p:spTree>
     <p:extLst>
       <p:ext uri="{BB962C8B-B14F-4D97-AF65-F5344CB8AC3E}">
-        <p14:creationId xmlns:p14="http://schemas.microsoft.com/office/powerpoint/2010/main" val="2506343223"/>
+        <p14:creationId xmlns:p14="http://schemas.microsoft.com/office/powerpoint/2010/main" val="2514584428"/>
       </p:ext>
     </p:extLst>
   </p:cSld>
@@ -8483,8 +8960,8 @@
         </p:nvSpPr>
         <p:spPr>
           <a:xfrm>
-            <a:off x="0" y="14706"/>
-            <a:ext cx="10515600" cy="990072"/>
+            <a:off x="0" y="0"/>
+            <a:ext cx="10515600" cy="813391"/>
           </a:xfrm>
         </p:spPr>
         <p:txBody>
@@ -8495,8 +8972,13 @@
           <a:p>
             <a:r>
               <a:rPr lang="en-US" sz="2400" dirty="0"/>
-              <a:t>Question 15: Analyze monthly and quarterly sales trends.</a:t>
-            </a:r>
+              <a:t>Question 14: Analyze sales performance across different </a:t>
+            </a:r>
+            <a:r>
+              <a:rPr lang="en-US" sz="2400" dirty="0" smtClean="0"/>
+              <a:t>branches.</a:t>
+            </a:r>
+            <a:endParaRPr lang="en-US" sz="2400" dirty="0"/>
           </a:p>
         </p:txBody>
       </p:sp>
@@ -8512,8 +8994,8 @@
         </p:nvSpPr>
         <p:spPr>
           <a:xfrm>
-            <a:off x="0" y="663617"/>
-            <a:ext cx="5125705" cy="476888"/>
+            <a:off x="0" y="718917"/>
+            <a:ext cx="5157787" cy="823912"/>
           </a:xfrm>
         </p:spPr>
         <p:txBody>
@@ -8552,8 +9034,8 @@
         </p:blipFill>
         <p:spPr>
           <a:xfrm>
-            <a:off x="0" y="1080781"/>
-            <a:ext cx="5000882" cy="1676486"/>
+            <a:off x="0" y="1473716"/>
+            <a:ext cx="5257800" cy="4209386"/>
           </a:xfrm>
         </p:spPr>
       </p:pic>
@@ -8569,8 +9051,8 @@
         </p:nvSpPr>
         <p:spPr>
           <a:xfrm>
-            <a:off x="7990367" y="139800"/>
-            <a:ext cx="4143153" cy="823912"/>
+            <a:off x="6225363" y="208000"/>
+            <a:ext cx="5183188" cy="823912"/>
           </a:xfrm>
         </p:spPr>
         <p:txBody>
@@ -8578,8 +9060,8 @@
           <a:lstStyle/>
           <a:p>
             <a:r>
-              <a:rPr lang="en-US" dirty="0" smtClean="0"/>
-              <a:t>Explanation</a:t>
+              <a:rPr lang="en-US" dirty="0"/>
+              <a:t>Key findings</a:t>
             </a:r>
             <a:endParaRPr lang="en-US" dirty="0"/>
           </a:p>
@@ -8587,7 +9069,7 @@
       </p:sp>
       <p:sp>
         <p:nvSpPr>
-          <p:cNvPr id="9" name="Content Placeholder 8"/>
+          <p:cNvPr id="6" name="Content Placeholder 5"/>
           <p:cNvSpPr>
             <a:spLocks noGrp="1"/>
           </p:cNvSpPr>
@@ -8597,8 +9079,8 @@
         </p:nvSpPr>
         <p:spPr>
           <a:xfrm>
-            <a:off x="7990367" y="1129871"/>
-            <a:ext cx="3886016" cy="5589905"/>
+            <a:off x="6156067" y="961426"/>
+            <a:ext cx="5183188" cy="5779615"/>
           </a:xfrm>
         </p:spPr>
         <p:txBody>
@@ -8608,39 +9090,94 @@
           <a:lstStyle/>
           <a:p>
             <a:r>
-              <a:rPr lang="en-US" dirty="0"/>
-              <a:t>Sales dates are converted to date format</a:t>
-            </a:r>
-            <a:r>
-              <a:rPr lang="en-US" dirty="0" smtClean="0"/>
-              <a:t>:</a:t>
-            </a:r>
-          </a:p>
-          <a:p>
-            <a:pPr lvl="1"/>
+              <a:rPr lang="en-US" dirty="0" err="1"/>
+              <a:t>Eldoret</a:t>
+            </a:r>
+            <a:r>
+              <a:rPr lang="en-US" dirty="0"/>
+              <a:t> generated the highest total sales at 44,258.69 and also recorded the highest average sales (250.05) and highest profit (12,790.23</a:t>
+            </a:r>
+            <a:r>
+              <a:rPr lang="en-US" dirty="0" smtClean="0"/>
+              <a:t>).</a:t>
+            </a:r>
+          </a:p>
+          <a:p>
             <a:r>
               <a:rPr lang="en-US" dirty="0" err="1" smtClean="0"/>
-              <a:t>pd.to_datetime</a:t>
-            </a:r>
-            <a:r>
-              <a:rPr lang="en-US" dirty="0"/>
-              <a:t>() ensures that the </a:t>
+              <a:t>Nakuru</a:t>
+            </a:r>
+            <a:r>
+              <a:rPr lang="en-US" dirty="0" smtClean="0"/>
+              <a:t> </a:t>
+            </a:r>
+            <a:r>
+              <a:rPr lang="en-US" dirty="0"/>
+              <a:t>ranked second in total sales (30,110.31) and generated 9,815.14 in profit</a:t>
+            </a:r>
+            <a:r>
+              <a:rPr lang="en-US" dirty="0" smtClean="0"/>
+              <a:t>.</a:t>
+            </a:r>
+          </a:p>
+          <a:p>
+            <a:r>
+              <a:rPr lang="en-US" dirty="0" smtClean="0"/>
+              <a:t>Nairobi </a:t>
+            </a:r>
+            <a:r>
+              <a:rPr lang="en-US" dirty="0"/>
+              <a:t>had 28,955.52 in total sales and 7,418.61 in profit</a:t>
+            </a:r>
+            <a:r>
+              <a:rPr lang="en-US" dirty="0" smtClean="0"/>
+              <a:t>.</a:t>
+            </a:r>
+          </a:p>
+          <a:p>
+            <a:r>
+              <a:rPr lang="en-US" dirty="0" smtClean="0"/>
+              <a:t>Mombasa </a:t>
+            </a:r>
+            <a:r>
+              <a:rPr lang="en-US" dirty="0"/>
+              <a:t>recorded 26,328.07 in sales and had the highest quantity sold among the first four branches (751</a:t>
+            </a:r>
+            <a:r>
+              <a:rPr lang="en-US" dirty="0" smtClean="0"/>
+              <a:t>).</a:t>
+            </a:r>
+          </a:p>
+          <a:p>
+            <a:r>
+              <a:rPr lang="en-US" dirty="0" smtClean="0"/>
+              <a:t>Kisumu </a:t>
+            </a:r>
+            <a:r>
+              <a:rPr lang="en-US" dirty="0"/>
+              <a:t>had the lowest total sales (22,674.85) and lowest profit (6,182.27), although it recorded the highest quantity sold (769</a:t>
+            </a:r>
+            <a:r>
+              <a:rPr lang="en-US" dirty="0" smtClean="0"/>
+              <a:t>).</a:t>
+            </a:r>
+          </a:p>
+          <a:p>
+            <a:r>
+              <a:rPr lang="en-US" dirty="0" smtClean="0"/>
+              <a:t>Overall</a:t>
+            </a:r>
+            <a:r>
+              <a:rPr lang="en-US" dirty="0"/>
+              <a:t>, </a:t>
             </a:r>
             <a:r>
               <a:rPr lang="en-US" dirty="0" err="1"/>
-              <a:t>Sales_Date</a:t>
-            </a:r>
-            <a:r>
-              <a:rPr lang="en-US" dirty="0"/>
-              <a:t> column is recognized correctly as a </a:t>
-            </a:r>
-            <a:r>
-              <a:rPr lang="en-US" dirty="0" err="1"/>
-              <a:t>date.This</a:t>
-            </a:r>
-            <a:r>
-              <a:rPr lang="en-US" dirty="0"/>
-              <a:t> allows the dates to be used for time-based analysis</a:t>
+              <a:t>Eldoret</a:t>
+            </a:r>
+            <a:r>
+              <a:rPr lang="en-US" dirty="0"/>
+              <a:t> leads in sales and profitability, while Kisumu sells the most units but generates the lowest total sales and profit</a:t>
             </a:r>
             <a:r>
               <a:rPr lang="en-US" dirty="0" smtClean="0"/>
@@ -8649,167 +9186,81 @@
           </a:p>
           <a:p>
             <a:r>
-              <a:rPr lang="en-US" dirty="0" smtClean="0"/>
-              <a:t>Sales </a:t>
-            </a:r>
-            <a:r>
-              <a:rPr lang="en-US" dirty="0"/>
-              <a:t>are grouped by month</a:t>
-            </a:r>
-            <a:r>
-              <a:rPr lang="en-US" dirty="0" smtClean="0"/>
-              <a:t>:</a:t>
-            </a:r>
-          </a:p>
-          <a:p>
-            <a:pPr lvl="1"/>
+              <a:rPr lang="en-US" dirty="0" err="1" smtClean="0"/>
+              <a:t>Eldoret</a:t>
+            </a:r>
+            <a:r>
+              <a:rPr lang="en-US" dirty="0" smtClean="0"/>
+              <a:t> </a:t>
+            </a:r>
+            <a:r>
+              <a:rPr lang="en-US" dirty="0"/>
+              <a:t>— 44,258.692. </a:t>
+            </a:r>
+            <a:endParaRPr lang="en-US" dirty="0" smtClean="0"/>
+          </a:p>
+          <a:p>
+            <a:r>
+              <a:rPr lang="en-US" dirty="0" err="1" smtClean="0"/>
+              <a:t>Nakuru</a:t>
+            </a:r>
+            <a:r>
+              <a:rPr lang="en-US" dirty="0" smtClean="0"/>
+              <a:t> </a:t>
+            </a:r>
+            <a:r>
+              <a:rPr lang="en-US" dirty="0"/>
+              <a:t>— 30,110.313</a:t>
+            </a:r>
             <a:r>
               <a:rPr lang="en-US" dirty="0" smtClean="0"/>
               <a:t>.</a:t>
             </a:r>
-            <a:r>
-              <a:rPr lang="en-US" dirty="0" err="1"/>
-              <a:t>dt.to_period</a:t>
-            </a:r>
-            <a:r>
-              <a:rPr lang="en-US" dirty="0"/>
-              <a:t>("M") extracts the year and month from each transaction </a:t>
-            </a:r>
-            <a:r>
-              <a:rPr lang="en-US" dirty="0" err="1"/>
-              <a:t>date.The</a:t>
-            </a:r>
-            <a:r>
-              <a:rPr lang="en-US" dirty="0"/>
+          </a:p>
+          <a:p>
+            <a:r>
+              <a:rPr lang="en-US" dirty="0" smtClean="0"/>
               <a:t> </a:t>
             </a:r>
             <a:r>
-              <a:rPr lang="en-US" dirty="0" err="1"/>
-              <a:t>groupby</a:t>
-            </a:r>
-            <a:r>
-              <a:rPr lang="en-US" dirty="0"/>
-              <a:t>() function then combines transactions belonging to the same month</a:t>
-            </a:r>
-            <a:r>
-              <a:rPr lang="en-US" dirty="0" smtClean="0"/>
-              <a:t>.</a:t>
-            </a:r>
-          </a:p>
-          <a:p>
-            <a:r>
-              <a:rPr lang="en-US" dirty="0" smtClean="0"/>
-              <a:t>Monthly </a:t>
-            </a:r>
-            <a:r>
-              <a:rPr lang="en-US" dirty="0"/>
-              <a:t>sales are calculated</a:t>
-            </a:r>
-            <a:r>
-              <a:rPr lang="en-US" dirty="0" smtClean="0"/>
-              <a:t>:</a:t>
-            </a:r>
-          </a:p>
-          <a:p>
-            <a:pPr lvl="1"/>
-            <a:r>
-              <a:rPr lang="en-US" dirty="0" smtClean="0"/>
-              <a:t>The </a:t>
-            </a:r>
-            <a:r>
-              <a:rPr lang="en-US" dirty="0"/>
-              <a:t>sum() function adds all </a:t>
-            </a:r>
-            <a:r>
-              <a:rPr lang="en-US" dirty="0" err="1"/>
-              <a:t>Total_Sales</a:t>
-            </a:r>
-            <a:r>
-              <a:rPr lang="en-US" dirty="0"/>
-              <a:t> values recorded during each </a:t>
-            </a:r>
-            <a:r>
-              <a:rPr lang="en-US" dirty="0" err="1"/>
-              <a:t>month.This</a:t>
-            </a:r>
-            <a:r>
-              <a:rPr lang="en-US" dirty="0"/>
-              <a:t> shows the total sales generated for every month in the dataset</a:t>
-            </a:r>
-            <a:r>
-              <a:rPr lang="en-US" dirty="0" smtClean="0"/>
-              <a:t>.</a:t>
-            </a:r>
-          </a:p>
-          <a:p>
-            <a:r>
-              <a:rPr lang="en-US" dirty="0" smtClean="0"/>
-              <a:t>Monthly </a:t>
-            </a:r>
-            <a:r>
-              <a:rPr lang="en-US" dirty="0"/>
-              <a:t>trends can be identified</a:t>
-            </a:r>
-            <a:r>
-              <a:rPr lang="en-US" dirty="0" smtClean="0"/>
-              <a:t>:</a:t>
-            </a:r>
-          </a:p>
-          <a:p>
-            <a:pPr lvl="1"/>
-            <a:r>
-              <a:rPr lang="en-US" dirty="0" smtClean="0"/>
-              <a:t>The </a:t>
-            </a:r>
-            <a:r>
-              <a:rPr lang="en-US" dirty="0"/>
-              <a:t>results can be used to identify months with higher or lower </a:t>
-            </a:r>
-            <a:r>
-              <a:rPr lang="en-US" dirty="0" err="1"/>
-              <a:t>sales.This</a:t>
-            </a:r>
-            <a:r>
-              <a:rPr lang="en-US" dirty="0"/>
-              <a:t> helps reveal changes in sales performance over the period studied.</a:t>
-            </a:r>
-          </a:p>
-        </p:txBody>
-      </p:sp>
-      <p:pic>
-        <p:nvPicPr>
-          <p:cNvPr id="10" name="Picture 9"/>
-          <p:cNvPicPr>
-            <a:picLocks noChangeAspect="1"/>
-          </p:cNvPicPr>
-          <p:nvPr/>
-        </p:nvPicPr>
-        <p:blipFill>
-          <a:blip r:embed="rId3" cstate="print">
-            <a:extLst>
-              <a:ext uri="{28A0092B-C50C-407E-A947-70E740481C1C}">
-                <a14:useLocalDpi xmlns:a14="http://schemas.microsoft.com/office/drawing/2010/main" val="0"/>
-              </a:ext>
-            </a:extLst>
-          </a:blip>
-          <a:stretch>
-            <a:fillRect/>
-          </a:stretch>
-        </p:blipFill>
-        <p:spPr>
-          <a:xfrm>
-            <a:off x="76700" y="2757267"/>
-            <a:ext cx="3324396" cy="3753043"/>
-          </a:xfrm>
-          <a:prstGeom prst="rect">
-            <a:avLst/>
-          </a:prstGeom>
-        </p:spPr>
-      </p:pic>
+              <a:rPr lang="en-US" dirty="0"/>
+              <a:t>Nairobi — 28,955.524. </a:t>
+            </a:r>
+            <a:endParaRPr lang="en-US" dirty="0" smtClean="0"/>
+          </a:p>
+          <a:p>
+            <a:r>
+              <a:rPr lang="en-US" dirty="0" smtClean="0"/>
+              <a:t>Mombasa </a:t>
+            </a:r>
+            <a:r>
+              <a:rPr lang="en-US" dirty="0"/>
+              <a:t>— 26,328.075. </a:t>
+            </a:r>
+            <a:endParaRPr lang="en-US" dirty="0" smtClean="0"/>
+          </a:p>
+          <a:p>
+            <a:r>
+              <a:rPr lang="en-US" dirty="0" smtClean="0"/>
+              <a:t>Kisumu </a:t>
+            </a:r>
+            <a:r>
+              <a:rPr lang="en-US" dirty="0"/>
+              <a:t>— 22,674.85</a:t>
+            </a:r>
+          </a:p>
+          <a:p>
+            <a:pPr marL="0" indent="0">
+              <a:buNone/>
+            </a:pPr>
+            <a:endParaRPr lang="en-US" dirty="0"/>
+          </a:p>
+        </p:txBody>
+      </p:sp>
     </p:spTree>
     <p:extLst>
       <p:ext uri="{BB962C8B-B14F-4D97-AF65-F5344CB8AC3E}">
-        <p14:creationId xmlns:p14="http://schemas.microsoft.com/office/powerpoint/2010/main" val="2510692655"/>
+        <p14:creationId xmlns:p14="http://schemas.microsoft.com/office/powerpoint/2010/main" val="2506343223"/>
       </p:ext>
     </p:extLst>
   </p:cSld>
@@ -8848,8 +9299,8 @@
         </p:nvSpPr>
         <p:spPr>
           <a:xfrm>
-            <a:off x="0" y="40833"/>
-            <a:ext cx="11355388" cy="804456"/>
+            <a:off x="0" y="14706"/>
+            <a:ext cx="10515600" cy="990072"/>
           </a:xfrm>
         </p:spPr>
         <p:txBody>
@@ -8877,8 +9328,8 @@
         </p:nvSpPr>
         <p:spPr>
           <a:xfrm>
-            <a:off x="42530" y="724233"/>
-            <a:ext cx="3939364" cy="530409"/>
+            <a:off x="0" y="663617"/>
+            <a:ext cx="5125705" cy="476888"/>
           </a:xfrm>
         </p:spPr>
         <p:txBody>
@@ -8887,7 +9338,7 @@
           <a:p>
             <a:r>
               <a:rPr lang="en-US" dirty="0" smtClean="0"/>
-              <a:t>code</a:t>
+              <a:t>Code</a:t>
             </a:r>
             <a:endParaRPr lang="en-US" dirty="0"/>
           </a:p>
@@ -8917,8 +9368,8 @@
         </p:blipFill>
         <p:spPr>
           <a:xfrm>
-            <a:off x="-63796" y="1467293"/>
-            <a:ext cx="5619307" cy="3896150"/>
+            <a:off x="0" y="1080781"/>
+            <a:ext cx="5000882" cy="1676486"/>
           </a:xfrm>
         </p:spPr>
       </p:pic>
@@ -8934,8 +9385,8 @@
         </p:nvSpPr>
         <p:spPr>
           <a:xfrm>
-            <a:off x="6884581" y="614640"/>
-            <a:ext cx="4986486" cy="593263"/>
+            <a:off x="7990367" y="139800"/>
+            <a:ext cx="4143153" cy="823912"/>
           </a:xfrm>
         </p:spPr>
         <p:txBody>
@@ -8943,8 +9394,8 @@
           <a:lstStyle/>
           <a:p>
             <a:r>
-              <a:rPr lang="en-US" dirty="0" smtClean="0"/>
-              <a:t>Explanation</a:t>
+              <a:rPr lang="en-US" dirty="0"/>
+              <a:t>Key findings</a:t>
             </a:r>
             <a:endParaRPr lang="en-US" dirty="0"/>
           </a:p>
@@ -8952,7 +9403,7 @@
       </p:sp>
       <p:sp>
         <p:nvSpPr>
-          <p:cNvPr id="6" name="Content Placeholder 5"/>
+          <p:cNvPr id="9" name="Content Placeholder 8"/>
           <p:cNvSpPr>
             <a:spLocks noGrp="1"/>
           </p:cNvSpPr>
@@ -8962,42 +9413,19 @@
         </p:nvSpPr>
         <p:spPr>
           <a:xfrm>
-            <a:off x="6884581" y="1254641"/>
-            <a:ext cx="5183188" cy="5422605"/>
+            <a:off x="7990367" y="1129871"/>
+            <a:ext cx="3886016" cy="5589905"/>
           </a:xfrm>
         </p:spPr>
         <p:txBody>
           <a:bodyPr>
-            <a:normAutofit fontScale="92500" lnSpcReduction="20000"/>
+            <a:normAutofit fontScale="70000" lnSpcReduction="20000"/>
           </a:bodyPr>
           <a:lstStyle/>
           <a:p>
             <a:r>
               <a:rPr lang="en-US" dirty="0"/>
-              <a:t>Sales are grouped into quarters</a:t>
-            </a:r>
-            <a:r>
-              <a:rPr lang="en-US" dirty="0" smtClean="0"/>
-              <a:t>:.</a:t>
-            </a:r>
-          </a:p>
-          <a:p>
-            <a:pPr lvl="1"/>
-            <a:r>
-              <a:rPr lang="en-US" dirty="0" err="1" smtClean="0"/>
-              <a:t>dt.to_period</a:t>
-            </a:r>
-            <a:r>
-              <a:rPr lang="en-US" dirty="0"/>
-              <a:t>("Q") divides the sales dates into quarterly </a:t>
-            </a:r>
-            <a:r>
-              <a:rPr lang="en-US" dirty="0" err="1"/>
-              <a:t>periods.Each</a:t>
-            </a:r>
-            <a:r>
-              <a:rPr lang="en-US" dirty="0"/>
-              <a:t> quarter represents three consecutive months of sales activity</a:t>
+              <a:t>June 2025 had the highest monthly sales, with 18,693.92</a:t>
             </a:r>
             <a:r>
               <a:rPr lang="en-US" dirty="0" smtClean="0"/>
@@ -9007,34 +9435,11 @@
           <a:p>
             <a:r>
               <a:rPr lang="en-US" dirty="0" smtClean="0"/>
-              <a:t>Total </a:t>
-            </a:r>
-            <a:r>
-              <a:rPr lang="en-US" dirty="0"/>
-              <a:t>quarterly sales are calculated</a:t>
-            </a:r>
-            <a:r>
-              <a:rPr lang="en-US" dirty="0" smtClean="0"/>
-              <a:t>:</a:t>
-            </a:r>
-          </a:p>
-          <a:p>
-            <a:pPr lvl="1"/>
-            <a:r>
-              <a:rPr lang="en-US" dirty="0" smtClean="0"/>
-              <a:t>The </a:t>
-            </a:r>
-            <a:r>
-              <a:rPr lang="en-US" dirty="0"/>
-              <a:t>sum() function adds the sales transactions recorded within each </a:t>
-            </a:r>
-            <a:r>
-              <a:rPr lang="en-US" dirty="0" err="1"/>
-              <a:t>quarter.This</a:t>
-            </a:r>
-            <a:r>
-              <a:rPr lang="en-US" dirty="0"/>
-              <a:t> provides an overall measure of sales performance for each three-month period</a:t>
+              <a:t>September </a:t>
+            </a:r>
+            <a:r>
+              <a:rPr lang="en-US" dirty="0"/>
+              <a:t>2025 had the lowest monthly sales, with only 497.36</a:t>
             </a:r>
             <a:r>
               <a:rPr lang="en-US" dirty="0" smtClean="0"/>
@@ -9044,42 +9449,92 @@
           <a:p>
             <a:r>
               <a:rPr lang="en-US" dirty="0" smtClean="0"/>
-              <a:t>Quarterly </a:t>
-            </a:r>
-            <a:r>
-              <a:rPr lang="en-US" dirty="0"/>
-              <a:t>performance can be compared</a:t>
-            </a:r>
-            <a:r>
-              <a:rPr lang="en-US" dirty="0" smtClean="0"/>
-              <a:t>:</a:t>
-            </a:r>
-          </a:p>
-          <a:p>
-            <a:pPr lvl="1"/>
-            <a:r>
-              <a:rPr lang="en-US" dirty="0" smtClean="0"/>
-              <a:t>The </a:t>
-            </a:r>
-            <a:r>
-              <a:rPr lang="en-US" dirty="0"/>
-              <a:t>output allows us to compare sales between different </a:t>
-            </a:r>
-            <a:r>
-              <a:rPr lang="en-US" dirty="0" err="1"/>
-              <a:t>quarters.This</a:t>
-            </a:r>
-            <a:r>
-              <a:rPr lang="en-US" dirty="0"/>
-              <a:t> can show whether sales increased, decreased, or remained relatively stable</a:t>
-            </a:r>
-          </a:p>
-        </p:txBody>
-      </p:sp>
+              <a:t>Sales </a:t>
+            </a:r>
+            <a:r>
+              <a:rPr lang="en-US" dirty="0"/>
+              <a:t>increased strongly from Q1 to Q2 2025, reaching the highest quarterly sales of 43,325.97</a:t>
+            </a:r>
+            <a:r>
+              <a:rPr lang="en-US" dirty="0" smtClean="0"/>
+              <a:t>.</a:t>
+            </a:r>
+          </a:p>
+          <a:p>
+            <a:r>
+              <a:rPr lang="en-US" dirty="0" smtClean="0"/>
+              <a:t>Sales </a:t>
+            </a:r>
+            <a:r>
+              <a:rPr lang="en-US" dirty="0"/>
+              <a:t>dropped significantly in Q3 2025 to 7,512.31, before recovering in Q4 2025 to 23,563.07</a:t>
+            </a:r>
+            <a:r>
+              <a:rPr lang="en-US" dirty="0" smtClean="0"/>
+              <a:t>.</a:t>
+            </a:r>
+          </a:p>
+          <a:p>
+            <a:r>
+              <a:rPr lang="en-US" dirty="0" smtClean="0"/>
+              <a:t>In </a:t>
+            </a:r>
+            <a:r>
+              <a:rPr lang="en-US" dirty="0"/>
+              <a:t>2026, Q2 sales (29,390.25) were higher than Q1 sales (16,983.43), showing an improvement</a:t>
+            </a:r>
+            <a:r>
+              <a:rPr lang="en-US" dirty="0" smtClean="0"/>
+              <a:t>.</a:t>
+            </a:r>
+          </a:p>
+          <a:p>
+            <a:r>
+              <a:rPr lang="en-US" dirty="0" smtClean="0"/>
+              <a:t>Overall</a:t>
+            </a:r>
+            <a:r>
+              <a:rPr lang="en-US" dirty="0"/>
+              <a:t>, the sales pattern shows significant fluctuations, with some months and quarters performing much better than others.</a:t>
+            </a:r>
+            <a:endParaRPr lang="en-US" dirty="0"/>
+          </a:p>
+        </p:txBody>
+      </p:sp>
+      <p:pic>
+        <p:nvPicPr>
+          <p:cNvPr id="10" name="Picture 9"/>
+          <p:cNvPicPr>
+            <a:picLocks noChangeAspect="1"/>
+          </p:cNvPicPr>
+          <p:nvPr/>
+        </p:nvPicPr>
+        <p:blipFill>
+          <a:blip r:embed="rId3" cstate="print">
+            <a:extLst>
+              <a:ext uri="{28A0092B-C50C-407E-A947-70E740481C1C}">
+                <a14:useLocalDpi xmlns:a14="http://schemas.microsoft.com/office/drawing/2010/main" val="0"/>
+              </a:ext>
+            </a:extLst>
+          </a:blip>
+          <a:stretch>
+            <a:fillRect/>
+          </a:stretch>
+        </p:blipFill>
+        <p:spPr>
+          <a:xfrm>
+            <a:off x="76700" y="2757267"/>
+            <a:ext cx="3324396" cy="3753043"/>
+          </a:xfrm>
+          <a:prstGeom prst="rect">
+            <a:avLst/>
+          </a:prstGeom>
+        </p:spPr>
+      </p:pic>
     </p:spTree>
     <p:extLst>
       <p:ext uri="{BB962C8B-B14F-4D97-AF65-F5344CB8AC3E}">
-        <p14:creationId xmlns:p14="http://schemas.microsoft.com/office/powerpoint/2010/main" val="2698251750"/>
+        <p14:creationId xmlns:p14="http://schemas.microsoft.com/office/powerpoint/2010/main" val="2510692655"/>
       </p:ext>
     </p:extLst>
   </p:cSld>
@@ -9230,8 +9685,8 @@
         </p:nvSpPr>
         <p:spPr>
           <a:xfrm>
-            <a:off x="37030" y="104775"/>
-            <a:ext cx="10515600" cy="1325563"/>
+            <a:off x="0" y="40833"/>
+            <a:ext cx="11355388" cy="804456"/>
           </a:xfrm>
         </p:spPr>
         <p:txBody>
@@ -9242,7 +9697,7 @@
           <a:p>
             <a:r>
               <a:rPr lang="en-US" sz="2400" dirty="0"/>
-              <a:t>Question 16: Determine the best-selling products based on quantity sold.</a:t>
+              <a:t>Question 15: Analyze monthly and quarterly sales trends.</a:t>
             </a:r>
           </a:p>
         </p:txBody>
@@ -9259,8 +9714,8 @@
         </p:nvSpPr>
         <p:spPr>
           <a:xfrm>
-            <a:off x="37030" y="671069"/>
-            <a:ext cx="5157787" cy="823912"/>
+            <a:off x="42530" y="724233"/>
+            <a:ext cx="3939364" cy="530409"/>
           </a:xfrm>
         </p:spPr>
         <p:txBody>
@@ -9269,7 +9724,7 @@
           <a:p>
             <a:r>
               <a:rPr lang="en-US" dirty="0" smtClean="0"/>
-              <a:t>Code</a:t>
+              <a:t>code</a:t>
             </a:r>
             <a:endParaRPr lang="en-US" dirty="0"/>
           </a:p>
@@ -9299,8 +9754,8 @@
         </p:blipFill>
         <p:spPr>
           <a:xfrm>
-            <a:off x="36513" y="1584251"/>
-            <a:ext cx="6635750" cy="4768701"/>
+            <a:off x="-63796" y="1467293"/>
+            <a:ext cx="5619307" cy="3896150"/>
           </a:xfrm>
         </p:spPr>
       </p:pic>
@@ -9316,8 +9771,8 @@
         </p:nvSpPr>
         <p:spPr>
           <a:xfrm>
-            <a:off x="7708605" y="887818"/>
-            <a:ext cx="4483395" cy="542519"/>
+            <a:off x="6884581" y="614640"/>
+            <a:ext cx="4986486" cy="593263"/>
           </a:xfrm>
         </p:spPr>
         <p:txBody>
@@ -9325,8 +9780,8 @@
           <a:lstStyle/>
           <a:p>
             <a:r>
-              <a:rPr lang="en-US" dirty="0" smtClean="0"/>
-              <a:t>Explanation</a:t>
+              <a:rPr lang="en-US" dirty="0"/>
+              <a:t>Key findings</a:t>
             </a:r>
             <a:endParaRPr lang="en-US" dirty="0"/>
           </a:p>
@@ -9344,42 +9799,19 @@
         </p:nvSpPr>
         <p:spPr>
           <a:xfrm>
-            <a:off x="7448107" y="1494981"/>
-            <a:ext cx="4678326" cy="5309855"/>
+            <a:off x="6884581" y="1254641"/>
+            <a:ext cx="5183188" cy="5422605"/>
           </a:xfrm>
         </p:spPr>
         <p:txBody>
           <a:bodyPr>
-            <a:normAutofit fontScale="77500" lnSpcReduction="20000"/>
+            <a:normAutofit fontScale="92500" lnSpcReduction="20000"/>
           </a:bodyPr>
           <a:lstStyle/>
           <a:p>
             <a:r>
               <a:rPr lang="en-US" dirty="0"/>
-              <a:t>Products are grouped together</a:t>
-            </a:r>
-            <a:r>
-              <a:rPr lang="en-US" dirty="0" smtClean="0"/>
-              <a:t>:</a:t>
-            </a:r>
-          </a:p>
-          <a:p>
-            <a:pPr lvl="1"/>
-            <a:r>
-              <a:rPr lang="en-US" dirty="0" smtClean="0"/>
-              <a:t>The </a:t>
-            </a:r>
-            <a:r>
-              <a:rPr lang="en-US" dirty="0"/>
-              <a:t>code groups transactions according to </a:t>
-            </a:r>
-            <a:r>
-              <a:rPr lang="en-US" dirty="0" err="1"/>
-              <a:t>Product_Name.This</a:t>
-            </a:r>
-            <a:r>
-              <a:rPr lang="en-US" dirty="0"/>
-              <a:t> allows the total quantity sold for each product to be calculated</a:t>
+              <a:t>2025 Q2 recorded the highest total sales, at 43,325.97</a:t>
             </a:r>
             <a:r>
               <a:rPr lang="en-US" dirty="0" smtClean="0"/>
@@ -9389,34 +9821,11 @@
           <a:p>
             <a:r>
               <a:rPr lang="en-US" dirty="0" smtClean="0"/>
-              <a:t>Total </a:t>
-            </a:r>
-            <a:r>
-              <a:rPr lang="en-US" dirty="0"/>
-              <a:t>quantity is calculated</a:t>
-            </a:r>
-            <a:r>
-              <a:rPr lang="en-US" dirty="0" smtClean="0"/>
-              <a:t>:</a:t>
-            </a:r>
-          </a:p>
-          <a:p>
-            <a:pPr lvl="1"/>
-            <a:r>
-              <a:rPr lang="en-US" dirty="0" smtClean="0"/>
-              <a:t>sum</a:t>
-            </a:r>
-            <a:r>
-              <a:rPr lang="en-US" dirty="0"/>
-              <a:t>() adds the quantities sold for each </a:t>
-            </a:r>
-            <a:r>
-              <a:rPr lang="en-US" dirty="0" err="1"/>
-              <a:t>product.This</a:t>
-            </a:r>
-            <a:r>
-              <a:rPr lang="en-US" dirty="0"/>
-              <a:t> shows how many units of each product were sold</a:t>
+              <a:t>2025 </a:t>
+            </a:r>
+            <a:r>
+              <a:rPr lang="en-US" dirty="0"/>
+              <a:t>Q3 recorded the lowest total sales, at 7,512.31</a:t>
             </a:r>
             <a:r>
               <a:rPr lang="en-US" dirty="0" smtClean="0"/>
@@ -9426,38 +9835,11 @@
           <a:p>
             <a:r>
               <a:rPr lang="en-US" dirty="0" smtClean="0"/>
-              <a:t>Products </a:t>
-            </a:r>
-            <a:r>
-              <a:rPr lang="en-US" dirty="0"/>
-              <a:t>are ranked</a:t>
-            </a:r>
-            <a:r>
-              <a:rPr lang="en-US" dirty="0" smtClean="0"/>
-              <a:t>:</a:t>
-            </a:r>
-          </a:p>
-          <a:p>
-            <a:pPr lvl="1"/>
-            <a:r>
-              <a:rPr lang="en-US" dirty="0" err="1" smtClean="0"/>
-              <a:t>sort_values</a:t>
-            </a:r>
-            <a:r>
-              <a:rPr lang="en-US" dirty="0" smtClean="0"/>
-              <a:t>(ascending=False</a:t>
-            </a:r>
-            <a:r>
-              <a:rPr lang="en-US" dirty="0"/>
-              <a:t>) arranges products from highest to lowest quantity </a:t>
-            </a:r>
-            <a:r>
-              <a:rPr lang="en-US" dirty="0" err="1"/>
-              <a:t>sold.The</a:t>
-            </a:r>
-            <a:r>
-              <a:rPr lang="en-US" dirty="0"/>
-              <a:t> products at the top are the best-selling products</a:t>
+              <a:t>Sales </a:t>
+            </a:r>
+            <a:r>
+              <a:rPr lang="en-US" dirty="0"/>
+              <a:t>increased sharply from 26,384.87 in 2025 Q1 to 43,325.97 in Q2, before falling to 7,512.31 in Q3</a:t>
             </a:r>
             <a:r>
               <a:rPr lang="en-US" dirty="0" smtClean="0"/>
@@ -9471,38 +9853,44 @@
             </a:r>
             <a:r>
               <a:rPr lang="en-US" dirty="0"/>
-              <a:t>performance can be identified</a:t>
-            </a:r>
-            <a:r>
-              <a:rPr lang="en-US" dirty="0" smtClean="0"/>
-              <a:t>:</a:t>
-            </a:r>
-          </a:p>
-          <a:p>
-            <a:pPr lvl="1"/>
-            <a:r>
-              <a:rPr lang="en-US" dirty="0" smtClean="0"/>
-              <a:t>The </a:t>
-            </a:r>
-            <a:r>
-              <a:rPr lang="en-US" dirty="0"/>
-              <a:t>results show which products have the highest </a:t>
-            </a:r>
-            <a:r>
-              <a:rPr lang="en-US" dirty="0" err="1"/>
-              <a:t>demand.This</a:t>
-            </a:r>
-            <a:r>
-              <a:rPr lang="en-US" dirty="0"/>
-              <a:t> can help with stock and inventory planning.</a:t>
-            </a:r>
+              <a:t>recovered in 2025 Q4, reaching </a:t>
+            </a:r>
+            <a:r>
+              <a:rPr lang="en-US" dirty="0" smtClean="0"/>
+              <a:t>23,563.07</a:t>
+            </a:r>
+          </a:p>
+          <a:p>
+            <a:r>
+              <a:rPr lang="en-US" dirty="0" smtClean="0"/>
+              <a:t>.</a:t>
+            </a:r>
+            <a:r>
+              <a:rPr lang="en-US" dirty="0"/>
+              <a:t>In 2026, sales increased from 16,983.43 in Q1 to 29,388.25 in Q2</a:t>
+            </a:r>
+            <a:r>
+              <a:rPr lang="en-US" dirty="0" smtClean="0"/>
+              <a:t>.</a:t>
+            </a:r>
+          </a:p>
+          <a:p>
+            <a:r>
+              <a:rPr lang="en-US" dirty="0" smtClean="0"/>
+              <a:t>Overall</a:t>
+            </a:r>
+            <a:r>
+              <a:rPr lang="en-US" dirty="0"/>
+              <a:t>, the results show significant fluctuations in quarterly sales, with the strongest performance in 2025 Q2 and the weakest in 2025 Q3.</a:t>
+            </a:r>
+            <a:endParaRPr lang="en-US" dirty="0"/>
           </a:p>
         </p:txBody>
       </p:sp>
     </p:spTree>
     <p:extLst>
       <p:ext uri="{BB962C8B-B14F-4D97-AF65-F5344CB8AC3E}">
-        <p14:creationId xmlns:p14="http://schemas.microsoft.com/office/powerpoint/2010/main" val="2985292175"/>
+        <p14:creationId xmlns:p14="http://schemas.microsoft.com/office/powerpoint/2010/main" val="2698251750"/>
       </p:ext>
     </p:extLst>
   </p:cSld>
@@ -9541,8 +9929,8 @@
         </p:nvSpPr>
         <p:spPr>
           <a:xfrm>
-            <a:off x="63611" y="0"/>
-            <a:ext cx="7942705" cy="939393"/>
+            <a:off x="37030" y="104775"/>
+            <a:ext cx="10515600" cy="1325563"/>
           </a:xfrm>
         </p:spPr>
         <p:txBody>
@@ -9553,7 +9941,7 @@
           <a:p>
             <a:r>
               <a:rPr lang="en-US" sz="2400" dirty="0"/>
-              <a:t>Question 17: Determine the Most Profitable Product Categories</a:t>
+              <a:t>Question 16: Determine the best-selling products based on quantity sold.</a:t>
             </a:r>
           </a:p>
         </p:txBody>
@@ -9570,7 +9958,7 @@
         </p:nvSpPr>
         <p:spPr>
           <a:xfrm>
-            <a:off x="63611" y="426521"/>
+            <a:off x="37030" y="671069"/>
             <a:ext cx="5157787" cy="823912"/>
           </a:xfrm>
         </p:spPr>
@@ -9610,8 +9998,8 @@
         </p:blipFill>
         <p:spPr>
           <a:xfrm>
-            <a:off x="36513" y="1250433"/>
-            <a:ext cx="6162675" cy="4847339"/>
+            <a:off x="36513" y="1584251"/>
+            <a:ext cx="6635750" cy="4768701"/>
           </a:xfrm>
         </p:spPr>
       </p:pic>
@@ -9627,8 +10015,8 @@
         </p:nvSpPr>
         <p:spPr>
           <a:xfrm>
-            <a:off x="8006316" y="47848"/>
-            <a:ext cx="4185684" cy="891546"/>
+            <a:off x="7708605" y="887818"/>
+            <a:ext cx="4483395" cy="542519"/>
           </a:xfrm>
         </p:spPr>
         <p:txBody>
@@ -9636,8 +10024,8 @@
           <a:lstStyle/>
           <a:p>
             <a:r>
-              <a:rPr lang="en-US" dirty="0" smtClean="0"/>
-              <a:t>Explanation</a:t>
+              <a:rPr lang="en-US" dirty="0"/>
+              <a:t>Key findings</a:t>
             </a:r>
             <a:endParaRPr lang="en-US" dirty="0"/>
           </a:p>
@@ -9655,116 +10043,98 @@
         </p:nvSpPr>
         <p:spPr>
           <a:xfrm>
-            <a:off x="7480005" y="882502"/>
-            <a:ext cx="4711995" cy="5768163"/>
+            <a:off x="7448107" y="1494981"/>
+            <a:ext cx="4678326" cy="5309855"/>
           </a:xfrm>
         </p:spPr>
         <p:txBody>
           <a:bodyPr>
-            <a:normAutofit fontScale="92500" lnSpcReduction="10000"/>
+            <a:normAutofit fontScale="92500" lnSpcReduction="20000"/>
           </a:bodyPr>
           <a:lstStyle/>
           <a:p>
             <a:r>
               <a:rPr lang="en-US" dirty="0"/>
-              <a:t>Categories are grouped </a:t>
-            </a:r>
-            <a:r>
-              <a:rPr lang="en-US" dirty="0" smtClean="0"/>
-              <a:t>together:</a:t>
-            </a:r>
-          </a:p>
-          <a:p>
-            <a:pPr lvl="1"/>
+              <a:t>Milk is the best-selling product, with 285 units sold</a:t>
+            </a:r>
+            <a:r>
+              <a:rPr lang="en-US" dirty="0" smtClean="0"/>
+              <a:t>.</a:t>
+            </a:r>
+          </a:p>
+          <a:p>
+            <a:r>
+              <a:rPr lang="en-US" dirty="0" smtClean="0"/>
+              <a:t>Sugar </a:t>
+            </a:r>
+            <a:r>
+              <a:rPr lang="en-US" dirty="0"/>
+              <a:t>ranks second, with 267 units sold</a:t>
+            </a:r>
+            <a:r>
+              <a:rPr lang="en-US" dirty="0" smtClean="0"/>
+              <a:t>.</a:t>
+            </a:r>
+          </a:p>
+          <a:p>
+            <a:r>
+              <a:rPr lang="en-US" dirty="0" smtClean="0"/>
+              <a:t>Bread </a:t>
+            </a:r>
+            <a:r>
+              <a:rPr lang="en-US" dirty="0"/>
+              <a:t>ranks third, with 258 units sold</a:t>
+            </a:r>
+            <a:r>
+              <a:rPr lang="en-US" dirty="0" smtClean="0"/>
+              <a:t>.</a:t>
+            </a:r>
+          </a:p>
+          <a:p>
+            <a:r>
+              <a:rPr lang="en-US" dirty="0" smtClean="0"/>
+              <a:t>Table </a:t>
+            </a:r>
+            <a:r>
+              <a:rPr lang="en-US" dirty="0"/>
+              <a:t>follows with 235 units, while Shirt has 229 units</a:t>
+            </a:r>
+            <a:r>
+              <a:rPr lang="en-US" dirty="0" smtClean="0"/>
+              <a:t>.</a:t>
+            </a:r>
+          </a:p>
+          <a:p>
+            <a:r>
+              <a:rPr lang="en-US" dirty="0" smtClean="0"/>
+              <a:t>Monitor </a:t>
+            </a:r>
+            <a:r>
+              <a:rPr lang="en-US" dirty="0"/>
+              <a:t>has the lowest quantity sold among the products shown, with 144 units</a:t>
+            </a:r>
+            <a:r>
+              <a:rPr lang="en-US" dirty="0" smtClean="0"/>
+              <a:t>.</a:t>
+            </a:r>
+          </a:p>
+          <a:p>
             <a:r>
               <a:rPr lang="en-US" dirty="0" smtClean="0"/>
               <a:t>The </a:t>
             </a:r>
             <a:r>
               <a:rPr lang="en-US" dirty="0"/>
-              <a:t>code groups products according to their category and calculates total </a:t>
-            </a:r>
-            <a:r>
-              <a:rPr lang="en-US" dirty="0" err="1"/>
-              <a:t>profit.This</a:t>
-            </a:r>
-            <a:r>
-              <a:rPr lang="en-US" dirty="0"/>
-              <a:t> shows how much profit each category </a:t>
-            </a:r>
-            <a:r>
-              <a:rPr lang="en-US" dirty="0" smtClean="0"/>
-              <a:t>generates.</a:t>
-            </a:r>
-          </a:p>
-          <a:p>
-            <a:r>
-              <a:rPr lang="en-US" dirty="0" smtClean="0"/>
-              <a:t>Categories are ranked:</a:t>
-            </a:r>
-          </a:p>
-          <a:p>
-            <a:pPr lvl="1"/>
-            <a:r>
-              <a:rPr lang="en-US" dirty="0" smtClean="0"/>
-              <a:t>The results </a:t>
-            </a:r>
-            <a:r>
-              <a:rPr lang="en-US" dirty="0"/>
-              <a:t>are sorted from the highest to the lowest </a:t>
-            </a:r>
-            <a:r>
-              <a:rPr lang="en-US" dirty="0" err="1"/>
-              <a:t>profit.Categories</a:t>
-            </a:r>
-            <a:r>
-              <a:rPr lang="en-US" dirty="0"/>
-              <a:t> at the top generate the most </a:t>
-            </a:r>
-            <a:r>
-              <a:rPr lang="en-US" dirty="0" smtClean="0"/>
-              <a:t>profit.</a:t>
-            </a:r>
-          </a:p>
-          <a:p>
-            <a:r>
-              <a:rPr lang="en-US" dirty="0" smtClean="0"/>
-              <a:t>Profitability </a:t>
-            </a:r>
-            <a:r>
-              <a:rPr lang="en-US" dirty="0"/>
-              <a:t>is compared</a:t>
-            </a:r>
-            <a:r>
-              <a:rPr lang="en-US" dirty="0" smtClean="0"/>
-              <a:t>:</a:t>
-            </a:r>
-          </a:p>
-          <a:p>
-            <a:pPr lvl="1"/>
-            <a:r>
-              <a:rPr lang="en-US" dirty="0" smtClean="0"/>
-              <a:t>The </a:t>
-            </a:r>
-            <a:r>
-              <a:rPr lang="en-US" dirty="0"/>
-              <a:t>results help identify which product categories contribute most to business </a:t>
-            </a:r>
-            <a:r>
-              <a:rPr lang="en-US" dirty="0" err="1"/>
-              <a:t>profit.This</a:t>
-            </a:r>
-            <a:r>
-              <a:rPr lang="en-US" dirty="0"/>
-              <a:t> can support decisions about product and category performance.</a:t>
-            </a:r>
+              <a:t>results show a clear difference in the quantities sold across the products, with Milk having the highest demand.</a:t>
+            </a:r>
+            <a:endParaRPr lang="en-US" dirty="0"/>
           </a:p>
         </p:txBody>
       </p:sp>
     </p:spTree>
     <p:extLst>
       <p:ext uri="{BB962C8B-B14F-4D97-AF65-F5344CB8AC3E}">
-        <p14:creationId xmlns:p14="http://schemas.microsoft.com/office/powerpoint/2010/main" val="4007352819"/>
+        <p14:creationId xmlns:p14="http://schemas.microsoft.com/office/powerpoint/2010/main" val="2985292175"/>
       </p:ext>
     </p:extLst>
   </p:cSld>
@@ -9803,8 +10173,8 @@
         </p:nvSpPr>
         <p:spPr>
           <a:xfrm>
-            <a:off x="0" y="1"/>
-            <a:ext cx="11355388" cy="813390"/>
+            <a:off x="63611" y="0"/>
+            <a:ext cx="7942705" cy="939393"/>
           </a:xfrm>
         </p:spPr>
         <p:txBody>
@@ -9815,7 +10185,7 @@
           <a:p>
             <a:r>
               <a:rPr lang="en-US" sz="2400" dirty="0"/>
-              <a:t>Question 18: Analyze Customer Purchasing Behavior Based on Age and Gender</a:t>
+              <a:t>Question 17: Determine the Most Profitable Product Categories</a:t>
             </a:r>
           </a:p>
         </p:txBody>
@@ -9832,8 +10202,8 @@
         </p:nvSpPr>
         <p:spPr>
           <a:xfrm>
-            <a:off x="0" y="653902"/>
-            <a:ext cx="4827181" cy="473149"/>
+            <a:off x="63611" y="426521"/>
+            <a:ext cx="5157787" cy="823912"/>
           </a:xfrm>
         </p:spPr>
         <p:txBody>
@@ -9872,8 +10242,8 @@
         </p:blipFill>
         <p:spPr>
           <a:xfrm>
-            <a:off x="77111" y="1073889"/>
-            <a:ext cx="4377931" cy="1381196"/>
+            <a:off x="36513" y="1250433"/>
+            <a:ext cx="6162675" cy="4847339"/>
           </a:xfrm>
         </p:spPr>
       </p:pic>
@@ -9889,8 +10259,8 @@
         </p:nvSpPr>
         <p:spPr>
           <a:xfrm>
-            <a:off x="7793664" y="568843"/>
-            <a:ext cx="4398335" cy="505046"/>
+            <a:off x="8006316" y="47848"/>
+            <a:ext cx="4185684" cy="891546"/>
           </a:xfrm>
         </p:spPr>
         <p:txBody>
@@ -9898,8 +10268,8 @@
           <a:lstStyle/>
           <a:p>
             <a:r>
-              <a:rPr lang="en-US" dirty="0" smtClean="0"/>
-              <a:t>Explanation</a:t>
+              <a:rPr lang="en-US" dirty="0"/>
+              <a:t>Key findings</a:t>
             </a:r>
             <a:endParaRPr lang="en-US" dirty="0"/>
           </a:p>
@@ -9917,58 +10287,33 @@
         </p:nvSpPr>
         <p:spPr>
           <a:xfrm>
-            <a:off x="7176977" y="1127050"/>
-            <a:ext cx="5015023" cy="5693735"/>
+            <a:off x="7480005" y="882502"/>
+            <a:ext cx="4711995" cy="5768163"/>
           </a:xfrm>
         </p:spPr>
         <p:txBody>
           <a:bodyPr>
-            <a:normAutofit fontScale="92500" lnSpcReduction="10000"/>
+            <a:normAutofit fontScale="92500" lnSpcReduction="20000"/>
           </a:bodyPr>
           <a:lstStyle/>
           <a:p>
             <a:r>
               <a:rPr lang="en-US" dirty="0"/>
-              <a:t>Customers are grouped by age and gender</a:t>
-            </a:r>
-            <a:r>
-              <a:rPr lang="en-US" dirty="0" smtClean="0"/>
-              <a:t>:</a:t>
-            </a:r>
-          </a:p>
-          <a:p>
-            <a:pPr lvl="1"/>
+              <a:t>Groceries has the highest total profit, at 7,197.54</a:t>
+            </a:r>
+            <a:r>
+              <a:rPr lang="en-US" dirty="0" smtClean="0"/>
+              <a:t>.</a:t>
+            </a:r>
+          </a:p>
+          <a:p>
             <a:r>
               <a:rPr lang="en-US" dirty="0" smtClean="0"/>
               <a:t>The </a:t>
             </a:r>
             <a:r>
               <a:rPr lang="en-US" dirty="0"/>
-              <a:t>code combines </a:t>
-            </a:r>
-            <a:r>
-              <a:rPr lang="en-US" dirty="0" err="1"/>
-              <a:t>Customer_Age</a:t>
-            </a:r>
-            <a:r>
-              <a:rPr lang="en-US" dirty="0"/>
-              <a:t> and </a:t>
-            </a:r>
-            <a:r>
-              <a:rPr lang="en-US" dirty="0" err="1"/>
-              <a:t>Customer_Gender</a:t>
-            </a:r>
-            <a:r>
-              <a:rPr lang="en-US" dirty="0"/>
-              <a:t> to analyze purchasing </a:t>
-            </a:r>
-            <a:r>
-              <a:rPr lang="en-US" dirty="0" err="1"/>
-              <a:t>patterns.This</a:t>
-            </a:r>
-            <a:r>
-              <a:rPr lang="en-US" dirty="0"/>
-              <a:t> shows sales generated by different customer groups</a:t>
+              <a:t>second groceries category generated 6,171.66</a:t>
             </a:r>
             <a:r>
               <a:rPr lang="en-US" dirty="0" smtClean="0"/>
@@ -9978,34 +10323,11 @@
           <a:p>
             <a:r>
               <a:rPr lang="en-US" dirty="0" smtClean="0"/>
-              <a:t>Total </a:t>
-            </a:r>
-            <a:r>
-              <a:rPr lang="en-US" dirty="0"/>
-              <a:t>sales are calculated</a:t>
-            </a:r>
-            <a:r>
-              <a:rPr lang="en-US" dirty="0" smtClean="0"/>
-              <a:t>:</a:t>
-            </a:r>
-          </a:p>
-          <a:p>
-            <a:pPr lvl="1"/>
-            <a:r>
-              <a:rPr lang="en-US" dirty="0" smtClean="0"/>
-              <a:t>sum</a:t>
-            </a:r>
-            <a:r>
-              <a:rPr lang="en-US" dirty="0"/>
-              <a:t>() calculates the total sales for each age and gender </a:t>
-            </a:r>
-            <a:r>
-              <a:rPr lang="en-US" dirty="0" err="1"/>
-              <a:t>combination.This</a:t>
-            </a:r>
-            <a:r>
-              <a:rPr lang="en-US" dirty="0"/>
-              <a:t> helps identify groups contributing more to sales</a:t>
+              <a:t>Home </a:t>
+            </a:r>
+            <a:r>
+              <a:rPr lang="en-US" dirty="0"/>
+              <a:t>generated 5,549.81, while Clothing generated 4,778.26</a:t>
             </a:r>
             <a:r>
               <a:rPr lang="en-US" dirty="0" smtClean="0"/>
@@ -10015,72 +10337,48 @@
           <a:p>
             <a:r>
               <a:rPr lang="en-US" dirty="0" smtClean="0"/>
-              <a:t>Customer </a:t>
-            </a:r>
-            <a:r>
-              <a:rPr lang="en-US" dirty="0"/>
-              <a:t>purchasing behavior is compared</a:t>
-            </a:r>
-            <a:r>
-              <a:rPr lang="en-US" dirty="0" smtClean="0"/>
-              <a:t>:</a:t>
-            </a:r>
-          </a:p>
-          <a:p>
-            <a:pPr lvl="1"/>
-            <a:r>
-              <a:rPr lang="en-US" dirty="0" smtClean="0"/>
               <a:t>The </a:t>
             </a:r>
             <a:r>
               <a:rPr lang="en-US" dirty="0"/>
-              <a:t>results show differences in sales between customer </a:t>
-            </a:r>
-            <a:r>
-              <a:rPr lang="en-US" dirty="0" err="1"/>
-              <a:t>groups.This</a:t>
-            </a:r>
-            <a:r>
-              <a:rPr lang="en-US" dirty="0"/>
-              <a:t> can help understand the main customer segments.</a:t>
-            </a:r>
-          </a:p>
-        </p:txBody>
-      </p:sp>
-      <p:pic>
-        <p:nvPicPr>
-          <p:cNvPr id="8" name="Picture 7"/>
-          <p:cNvPicPr>
-            <a:picLocks noChangeAspect="1"/>
-          </p:cNvPicPr>
-          <p:nvPr/>
-        </p:nvPicPr>
-        <p:blipFill>
-          <a:blip r:embed="rId3" cstate="print">
-            <a:extLst>
-              <a:ext uri="{28A0092B-C50C-407E-A947-70E740481C1C}">
-                <a14:useLocalDpi xmlns:a14="http://schemas.microsoft.com/office/drawing/2010/main" val="0"/>
-              </a:ext>
-            </a:extLst>
-          </a:blip>
-          <a:stretch>
-            <a:fillRect/>
-          </a:stretch>
-        </p:blipFill>
-        <p:spPr>
-          <a:xfrm>
-            <a:off x="201849" y="2455085"/>
-            <a:ext cx="4465844" cy="4134062"/>
-          </a:xfrm>
-          <a:prstGeom prst="rect">
-            <a:avLst/>
-          </a:prstGeom>
-        </p:spPr>
-      </p:pic>
+              <a:t>other category entries recorded profits ranging from 3,158.18 to 3,804.92</a:t>
+            </a:r>
+            <a:r>
+              <a:rPr lang="en-US" dirty="0" smtClean="0"/>
+              <a:t>.</a:t>
+            </a:r>
+          </a:p>
+          <a:p>
+            <a:r>
+              <a:rPr lang="en-US" dirty="0" smtClean="0"/>
+              <a:t>The </a:t>
+            </a:r>
+            <a:r>
+              <a:rPr lang="en-US" dirty="0"/>
+              <a:t>results show that Groceries contributes the highest profit among the categories shown</a:t>
+            </a:r>
+            <a:r>
+              <a:rPr lang="en-US" dirty="0" smtClean="0"/>
+              <a:t>.</a:t>
+            </a:r>
+          </a:p>
+          <a:p>
+            <a:r>
+              <a:rPr lang="en-US" dirty="0" smtClean="0"/>
+              <a:t>The </a:t>
+            </a:r>
+            <a:r>
+              <a:rPr lang="en-US" dirty="0"/>
+              <a:t>output contains categories with different capitalization, such as “Groceries” and “groceries”, which are treated as separate categories.</a:t>
+            </a:r>
+            <a:endParaRPr lang="en-US" dirty="0"/>
+          </a:p>
+        </p:txBody>
+      </p:sp>
     </p:spTree>
     <p:extLst>
       <p:ext uri="{BB962C8B-B14F-4D97-AF65-F5344CB8AC3E}">
-        <p14:creationId xmlns:p14="http://schemas.microsoft.com/office/powerpoint/2010/main" val="272602327"/>
+        <p14:creationId xmlns:p14="http://schemas.microsoft.com/office/powerpoint/2010/main" val="4007352819"/>
       </p:ext>
     </p:extLst>
   </p:cSld>
@@ -10119,8 +10417,8 @@
         </p:nvSpPr>
         <p:spPr>
           <a:xfrm>
-            <a:off x="0" y="0"/>
-            <a:ext cx="10393141" cy="698131"/>
+            <a:off x="0" y="1"/>
+            <a:ext cx="11355388" cy="813390"/>
           </a:xfrm>
         </p:spPr>
         <p:txBody>
@@ -10131,7 +10429,7 @@
           <a:p>
             <a:r>
               <a:rPr lang="en-US" sz="2400" dirty="0"/>
-              <a:t>Question 19: Compare Sales Generated by Different Payment Methods</a:t>
+              <a:t>Question 18: Analyze Customer Purchasing Behavior Based on Age and Gender</a:t>
             </a:r>
           </a:p>
         </p:txBody>
@@ -10148,8 +10446,8 @@
         </p:nvSpPr>
         <p:spPr>
           <a:xfrm>
-            <a:off x="0" y="564744"/>
-            <a:ext cx="5088491" cy="461297"/>
+            <a:off x="0" y="653902"/>
+            <a:ext cx="4827181" cy="473149"/>
           </a:xfrm>
         </p:spPr>
         <p:txBody>
@@ -10188,8 +10486,8 @@
         </p:blipFill>
         <p:spPr>
           <a:xfrm>
-            <a:off x="38099" y="1164265"/>
-            <a:ext cx="5767277" cy="4141382"/>
+            <a:off x="77111" y="1073889"/>
+            <a:ext cx="4377931" cy="1381196"/>
           </a:xfrm>
         </p:spPr>
       </p:pic>
@@ -10205,159 +10503,142 @@
         </p:nvSpPr>
         <p:spPr>
           <a:xfrm>
-            <a:off x="7646581" y="588666"/>
-            <a:ext cx="4545419" cy="413451"/>
+            <a:off x="7793664" y="568843"/>
+            <a:ext cx="4398335" cy="505046"/>
+          </a:xfrm>
+        </p:spPr>
+        <p:txBody>
+          <a:bodyPr/>
+          <a:lstStyle/>
+          <a:p>
+            <a:r>
+              <a:rPr lang="en-US" dirty="0"/>
+              <a:t>Key findings</a:t>
+            </a:r>
+            <a:endParaRPr lang="en-US" dirty="0"/>
+          </a:p>
+        </p:txBody>
+      </p:sp>
+      <p:sp>
+        <p:nvSpPr>
+          <p:cNvPr id="6" name="Content Placeholder 5"/>
+          <p:cNvSpPr>
+            <a:spLocks noGrp="1"/>
+          </p:cNvSpPr>
+          <p:nvPr>
+            <p:ph sz="quarter" idx="4"/>
+          </p:nvPr>
+        </p:nvSpPr>
+        <p:spPr>
+          <a:xfrm>
+            <a:off x="7176977" y="1127050"/>
+            <a:ext cx="5015023" cy="5693735"/>
           </a:xfrm>
         </p:spPr>
         <p:txBody>
           <a:bodyPr>
-            <a:normAutofit lnSpcReduction="10000"/>
+            <a:normAutofit fontScale="85000" lnSpcReduction="10000"/>
           </a:bodyPr>
           <a:lstStyle/>
           <a:p>
             <a:r>
-              <a:rPr lang="en-US" dirty="0" smtClean="0"/>
-              <a:t>Explanation</a:t>
+              <a:rPr lang="en-US" dirty="0"/>
+              <a:t>Female customers aged 34 generated the highest total sales, at 16,948.76</a:t>
+            </a:r>
+            <a:r>
+              <a:rPr lang="en-US" dirty="0" smtClean="0"/>
+              <a:t>.</a:t>
+            </a:r>
+          </a:p>
+          <a:p>
+            <a:r>
+              <a:rPr lang="en-US" dirty="0" smtClean="0"/>
+              <a:t>Male </a:t>
+            </a:r>
+            <a:r>
+              <a:rPr lang="en-US" dirty="0"/>
+              <a:t>customers aged 45 generated the second-highest total sales, at 14,530.10</a:t>
+            </a:r>
+            <a:r>
+              <a:rPr lang="en-US" dirty="0" smtClean="0"/>
+              <a:t>.</a:t>
+            </a:r>
+          </a:p>
+          <a:p>
+            <a:r>
+              <a:rPr lang="en-US" dirty="0" smtClean="0"/>
+              <a:t>Female </a:t>
+            </a:r>
+            <a:r>
+              <a:rPr lang="en-US" dirty="0"/>
+              <a:t>customers aged 25 generated 11,013.38 in total sales</a:t>
+            </a:r>
+            <a:r>
+              <a:rPr lang="en-US" dirty="0" smtClean="0"/>
+              <a:t>.</a:t>
+            </a:r>
+          </a:p>
+          <a:p>
+            <a:r>
+              <a:rPr lang="en-US" dirty="0" smtClean="0"/>
+              <a:t>Some </a:t>
+            </a:r>
+            <a:r>
+              <a:rPr lang="en-US" dirty="0"/>
+              <a:t>customer groups recorded negative total sales, such as male customers aged 34 (-2,375.57) and male customers aged 25 (-2,185.93</a:t>
+            </a:r>
+            <a:r>
+              <a:rPr lang="en-US" dirty="0" smtClean="0"/>
+              <a:t>).</a:t>
+            </a:r>
+          </a:p>
+          <a:p>
+            <a:r>
+              <a:rPr lang="en-US" dirty="0" smtClean="0"/>
+              <a:t>The </a:t>
+            </a:r>
+            <a:r>
+              <a:rPr lang="en-US" dirty="0"/>
+              <a:t>results show that purchasing levels differ across age and gender groups, with the 34-year-old female group contributing the highest sales in the displayed results.</a:t>
             </a:r>
             <a:endParaRPr lang="en-US" dirty="0"/>
           </a:p>
         </p:txBody>
       </p:sp>
-      <p:sp>
-        <p:nvSpPr>
-          <p:cNvPr id="6" name="Content Placeholder 5"/>
-          <p:cNvSpPr>
-            <a:spLocks noGrp="1"/>
-          </p:cNvSpPr>
-          <p:nvPr>
-            <p:ph sz="quarter" idx="4"/>
-          </p:nvPr>
-        </p:nvSpPr>
-        <p:spPr>
-          <a:xfrm>
-            <a:off x="7646580" y="1059046"/>
-            <a:ext cx="4545419" cy="5687312"/>
-          </a:xfrm>
-        </p:spPr>
-        <p:txBody>
-          <a:bodyPr>
-            <a:normAutofit fontScale="92500" lnSpcReduction="20000"/>
-          </a:bodyPr>
-          <a:lstStyle/>
-          <a:p>
-            <a:r>
-              <a:rPr lang="en-US" dirty="0"/>
-              <a:t>Payment methods are </a:t>
-            </a:r>
-            <a:r>
-              <a:rPr lang="en-US" dirty="0" err="1" smtClean="0"/>
-              <a:t>grouped:T</a:t>
-            </a:r>
-            <a:endParaRPr lang="en-US" dirty="0" smtClean="0"/>
-          </a:p>
-          <a:p>
-            <a:pPr lvl="1"/>
-            <a:r>
-              <a:rPr lang="en-US" dirty="0" err="1" smtClean="0"/>
-              <a:t>ransactions</a:t>
-            </a:r>
-            <a:r>
-              <a:rPr lang="en-US" dirty="0" smtClean="0"/>
-              <a:t> </a:t>
-            </a:r>
-            <a:r>
-              <a:rPr lang="en-US" dirty="0"/>
-              <a:t>are grouped according to the payment method </a:t>
-            </a:r>
-            <a:r>
-              <a:rPr lang="en-US" dirty="0" err="1"/>
-              <a:t>used.This</a:t>
-            </a:r>
-            <a:r>
-              <a:rPr lang="en-US" dirty="0"/>
-              <a:t> allows total sales for each method to be calculated</a:t>
-            </a:r>
-            <a:r>
-              <a:rPr lang="en-US" dirty="0" smtClean="0"/>
-              <a:t>.</a:t>
-            </a:r>
-          </a:p>
-          <a:p>
-            <a:r>
-              <a:rPr lang="en-US" dirty="0" smtClean="0"/>
-              <a:t>Sales </a:t>
-            </a:r>
-            <a:r>
-              <a:rPr lang="en-US" dirty="0"/>
-              <a:t>are compared</a:t>
-            </a:r>
-            <a:r>
-              <a:rPr lang="en-US" dirty="0" smtClean="0"/>
-              <a:t>:</a:t>
-            </a:r>
-          </a:p>
-          <a:p>
-            <a:pPr lvl="1"/>
-            <a:r>
-              <a:rPr lang="en-US" dirty="0" smtClean="0"/>
-              <a:t>The </a:t>
-            </a:r>
-            <a:r>
-              <a:rPr lang="en-US" dirty="0"/>
-              <a:t>sum() function calculates total sales for each payment </a:t>
-            </a:r>
-            <a:r>
-              <a:rPr lang="en-US" dirty="0" err="1"/>
-              <a:t>method.The</a:t>
-            </a:r>
-            <a:r>
-              <a:rPr lang="en-US" dirty="0"/>
-              <a:t> results are arranged from highest to lowest sales</a:t>
-            </a:r>
-            <a:r>
-              <a:rPr lang="en-US" dirty="0" smtClean="0"/>
-              <a:t>.</a:t>
-            </a:r>
-          </a:p>
-          <a:p>
-            <a:r>
-              <a:rPr lang="en-US" dirty="0" smtClean="0"/>
-              <a:t>Payment </a:t>
-            </a:r>
-            <a:r>
-              <a:rPr lang="en-US" dirty="0"/>
-              <a:t>performance is identified</a:t>
-            </a:r>
-            <a:r>
-              <a:rPr lang="en-US" dirty="0" smtClean="0"/>
-              <a:t>:</a:t>
-            </a:r>
-          </a:p>
-          <a:p>
-            <a:pPr lvl="1"/>
-            <a:r>
-              <a:rPr lang="en-US" dirty="0" smtClean="0"/>
-              <a:t>The </a:t>
-            </a:r>
-            <a:r>
-              <a:rPr lang="en-US" dirty="0"/>
-              <a:t>output shows which payment methods generate more </a:t>
-            </a:r>
-            <a:r>
-              <a:rPr lang="en-US" dirty="0" err="1"/>
-              <a:t>sales.This</a:t>
-            </a:r>
-            <a:r>
-              <a:rPr lang="en-US" dirty="0"/>
-              <a:t> provides insight into customer payment preferences.</a:t>
-            </a:r>
-          </a:p>
-        </p:txBody>
-      </p:sp>
+      <p:pic>
+        <p:nvPicPr>
+          <p:cNvPr id="8" name="Picture 7"/>
+          <p:cNvPicPr>
+            <a:picLocks noChangeAspect="1"/>
+          </p:cNvPicPr>
+          <p:nvPr/>
+        </p:nvPicPr>
+        <p:blipFill>
+          <a:blip r:embed="rId3" cstate="print">
+            <a:extLst>
+              <a:ext uri="{28A0092B-C50C-407E-A947-70E740481C1C}">
+                <a14:useLocalDpi xmlns:a14="http://schemas.microsoft.com/office/drawing/2010/main" val="0"/>
+              </a:ext>
+            </a:extLst>
+          </a:blip>
+          <a:stretch>
+            <a:fillRect/>
+          </a:stretch>
+        </p:blipFill>
+        <p:spPr>
+          <a:xfrm>
+            <a:off x="201849" y="2455085"/>
+            <a:ext cx="4465844" cy="4134062"/>
+          </a:xfrm>
+          <a:prstGeom prst="rect">
+            <a:avLst/>
+          </a:prstGeom>
+        </p:spPr>
+      </p:pic>
     </p:spTree>
     <p:extLst>
       <p:ext uri="{BB962C8B-B14F-4D97-AF65-F5344CB8AC3E}">
-        <p14:creationId xmlns:p14="http://schemas.microsoft.com/office/powerpoint/2010/main" val="1267542400"/>
+        <p14:creationId xmlns:p14="http://schemas.microsoft.com/office/powerpoint/2010/main" val="272602327"/>
       </p:ext>
     </p:extLst>
   </p:cSld>
@@ -10397,7 +10678,7 @@
         <p:spPr>
           <a:xfrm>
             <a:off x="0" y="0"/>
-            <a:ext cx="11355388" cy="650284"/>
+            <a:ext cx="10393141" cy="698131"/>
           </a:xfrm>
         </p:spPr>
         <p:txBody>
@@ -10408,7 +10689,7 @@
           <a:p>
             <a:r>
               <a:rPr lang="en-US" sz="2400" dirty="0"/>
-              <a:t>Question 20: Analyze Customer Satisfaction Ratings Across Branches</a:t>
+              <a:t>Question 19: Compare Sales Generated by Different Payment Methods</a:t>
             </a:r>
           </a:p>
         </p:txBody>
@@ -10425,8 +10706,8 @@
         </p:nvSpPr>
         <p:spPr>
           <a:xfrm>
-            <a:off x="0" y="527530"/>
-            <a:ext cx="5157787" cy="445349"/>
+            <a:off x="0" y="564744"/>
+            <a:ext cx="5088491" cy="461297"/>
           </a:xfrm>
         </p:spPr>
         <p:txBody>
@@ -10465,8 +10746,8 @@
         </p:blipFill>
         <p:spPr>
           <a:xfrm>
-            <a:off x="0" y="1722474"/>
-            <a:ext cx="6464300" cy="4183912"/>
+            <a:off x="38099" y="1164265"/>
+            <a:ext cx="5767277" cy="4141382"/>
           </a:xfrm>
         </p:spPr>
       </p:pic>
@@ -10482,17 +10763,19 @@
         </p:nvSpPr>
         <p:spPr>
           <a:xfrm>
-            <a:off x="7830879" y="527530"/>
-            <a:ext cx="4295369" cy="477246"/>
-          </a:xfrm>
-        </p:spPr>
-        <p:txBody>
-          <a:bodyPr/>
-          <a:lstStyle/>
-          <a:p>
-            <a:r>
-              <a:rPr lang="en-US" dirty="0" smtClean="0"/>
-              <a:t>Explanation</a:t>
+            <a:off x="7646581" y="588666"/>
+            <a:ext cx="4545419" cy="413451"/>
+          </a:xfrm>
+        </p:spPr>
+        <p:txBody>
+          <a:bodyPr>
+            <a:normAutofit lnSpcReduction="10000"/>
+          </a:bodyPr>
+          <a:lstStyle/>
+          <a:p>
+            <a:r>
+              <a:rPr lang="en-US" dirty="0"/>
+              <a:t>Key findings</a:t>
             </a:r>
             <a:endParaRPr lang="en-US" dirty="0"/>
           </a:p>
@@ -10510,42 +10793,75 @@
         </p:nvSpPr>
         <p:spPr>
           <a:xfrm>
-            <a:off x="7830878" y="972878"/>
-            <a:ext cx="4361121" cy="5762848"/>
+            <a:off x="7646580" y="1059046"/>
+            <a:ext cx="4545419" cy="5687312"/>
           </a:xfrm>
         </p:spPr>
         <p:txBody>
           <a:bodyPr>
-            <a:normAutofit fontScale="92500" lnSpcReduction="20000"/>
+            <a:normAutofit fontScale="92500" lnSpcReduction="10000"/>
           </a:bodyPr>
           <a:lstStyle/>
           <a:p>
             <a:r>
               <a:rPr lang="en-US" dirty="0"/>
-              <a:t>Ratings are grouped by branch</a:t>
-            </a:r>
-            <a:r>
-              <a:rPr lang="en-US" dirty="0" smtClean="0"/>
-              <a:t>:</a:t>
-            </a:r>
-          </a:p>
-          <a:p>
-            <a:pPr lvl="1"/>
+              <a:t>Cash generated the highest total sales: 49,298.28</a:t>
+            </a:r>
+            <a:r>
+              <a:rPr lang="en-US" dirty="0" smtClean="0"/>
+              <a:t>.</a:t>
+            </a:r>
+          </a:p>
+          <a:p>
+            <a:r>
+              <a:rPr lang="en-US" dirty="0" smtClean="0"/>
+              <a:t>Cash </a:t>
+            </a:r>
+            <a:r>
+              <a:rPr lang="en-US" dirty="0"/>
+              <a:t>was followed by cash with 29,896.92</a:t>
+            </a:r>
+            <a:r>
+              <a:rPr lang="en-US" dirty="0" smtClean="0"/>
+              <a:t>.</a:t>
+            </a:r>
+          </a:p>
+          <a:p>
+            <a:r>
+              <a:rPr lang="en-US" dirty="0" smtClean="0"/>
+              <a:t>Mobile </a:t>
+            </a:r>
+            <a:r>
+              <a:rPr lang="en-US" dirty="0"/>
+              <a:t>generated 23,965.99 in total sales</a:t>
+            </a:r>
+            <a:r>
+              <a:rPr lang="en-US" dirty="0" smtClean="0"/>
+              <a:t>.</a:t>
+            </a:r>
+          </a:p>
+          <a:p>
+            <a:r>
+              <a:rPr lang="en-US" dirty="0" smtClean="0"/>
+              <a:t>Card </a:t>
+            </a:r>
+            <a:r>
+              <a:rPr lang="en-US" dirty="0"/>
+              <a:t>generated the lowest total sales: 23,868.69</a:t>
+            </a:r>
+            <a:r>
+              <a:rPr lang="en-US" dirty="0" smtClean="0"/>
+              <a:t>.</a:t>
+            </a:r>
+          </a:p>
+          <a:p>
             <a:r>
               <a:rPr lang="en-US" dirty="0" smtClean="0"/>
               <a:t>The </a:t>
             </a:r>
             <a:r>
               <a:rPr lang="en-US" dirty="0"/>
-              <a:t>code calculates the average customer rating for each </a:t>
-            </a:r>
-            <a:r>
-              <a:rPr lang="en-US" dirty="0" err="1"/>
-              <a:t>branch.This</a:t>
-            </a:r>
-            <a:r>
-              <a:rPr lang="en-US" dirty="0"/>
-              <a:t> shows the satisfaction level of customers at each branch</a:t>
+              <a:t>difference between the highest and lowest payment methods is 25,429.59</a:t>
             </a:r>
             <a:r>
               <a:rPr lang="en-US" dirty="0" smtClean="0"/>
@@ -10555,79 +10871,20 @@
           <a:p>
             <a:r>
               <a:rPr lang="en-US" dirty="0" smtClean="0"/>
-              <a:t>Branch </a:t>
-            </a:r>
-            <a:r>
-              <a:rPr lang="en-US" dirty="0"/>
-              <a:t>ratings are compared</a:t>
-            </a:r>
-            <a:r>
-              <a:rPr lang="en-US" dirty="0" smtClean="0"/>
-              <a:t>:</a:t>
-            </a:r>
-          </a:p>
-          <a:p>
-            <a:pPr lvl="1"/>
-            <a:r>
-              <a:rPr lang="en-US" dirty="0" smtClean="0"/>
               <a:t>The </a:t>
             </a:r>
             <a:r>
               <a:rPr lang="en-US" dirty="0"/>
-              <a:t>results are arranged from the highest to the lowest average </a:t>
-            </a:r>
-            <a:r>
-              <a:rPr lang="en-US" dirty="0" err="1"/>
-              <a:t>rating.This</a:t>
-            </a:r>
-            <a:r>
-              <a:rPr lang="en-US" dirty="0"/>
-              <a:t> makes differences in customer satisfaction easier to identify</a:t>
-            </a:r>
-            <a:r>
-              <a:rPr lang="en-US" dirty="0" smtClean="0"/>
-              <a:t>.</a:t>
-            </a:r>
-          </a:p>
-          <a:p>
-            <a:r>
-              <a:rPr lang="en-US" dirty="0" smtClean="0"/>
-              <a:t>Customer </a:t>
-            </a:r>
-            <a:r>
-              <a:rPr lang="en-US" dirty="0"/>
-              <a:t>satisfaction is evaluated</a:t>
-            </a:r>
-            <a:r>
-              <a:rPr lang="en-US" dirty="0" smtClean="0"/>
-              <a:t>:</a:t>
-            </a:r>
-          </a:p>
-          <a:p>
-            <a:pPr lvl="1"/>
-            <a:r>
-              <a:rPr lang="en-US" dirty="0" smtClean="0"/>
-              <a:t>The </a:t>
-            </a:r>
-            <a:r>
-              <a:rPr lang="en-US" dirty="0"/>
-              <a:t>output helps determine which branches receive higher or lower </a:t>
-            </a:r>
-            <a:r>
-              <a:rPr lang="en-US" dirty="0" err="1"/>
-              <a:t>ratings.This</a:t>
-            </a:r>
-            <a:r>
-              <a:rPr lang="en-US" dirty="0"/>
-              <a:t> can highlight areas that may need improvement.</a:t>
-            </a:r>
+              <a:t>results show a clear difference in total sales generated across the payment methods.</a:t>
+            </a:r>
+            <a:endParaRPr lang="en-US" dirty="0"/>
           </a:p>
         </p:txBody>
       </p:sp>
     </p:spTree>
     <p:extLst>
       <p:ext uri="{BB962C8B-B14F-4D97-AF65-F5344CB8AC3E}">
-        <p14:creationId xmlns:p14="http://schemas.microsoft.com/office/powerpoint/2010/main" val="183872669"/>
+        <p14:creationId xmlns:p14="http://schemas.microsoft.com/office/powerpoint/2010/main" val="1267542400"/>
       </p:ext>
     </p:extLst>
   </p:cSld>
@@ -10667,7 +10924,7 @@
         <p:spPr>
           <a:xfrm>
             <a:off x="0" y="0"/>
-            <a:ext cx="10728067" cy="751294"/>
+            <a:ext cx="11355388" cy="650284"/>
           </a:xfrm>
         </p:spPr>
         <p:txBody>
@@ -10678,7 +10935,7 @@
           <a:p>
             <a:r>
               <a:rPr lang="en-US" sz="2400" dirty="0"/>
-              <a:t>Question 21: Determine the Impact of Promotional Campaigns on Sales Performance</a:t>
+              <a:t>Question 20: Analyze Customer Satisfaction Ratings Across Branches</a:t>
             </a:r>
           </a:p>
         </p:txBody>
@@ -10695,8 +10952,8 @@
         </p:nvSpPr>
         <p:spPr>
           <a:xfrm>
-            <a:off x="0" y="532257"/>
-            <a:ext cx="5157787" cy="455981"/>
+            <a:off x="0" y="527530"/>
+            <a:ext cx="5157787" cy="445349"/>
           </a:xfrm>
         </p:spPr>
         <p:txBody>
@@ -10705,7 +10962,7 @@
           <a:p>
             <a:r>
               <a:rPr lang="en-US" dirty="0" smtClean="0"/>
-              <a:t>code</a:t>
+              <a:t>Code</a:t>
             </a:r>
             <a:endParaRPr lang="en-US" dirty="0"/>
           </a:p>
@@ -10735,8 +10992,8 @@
         </p:blipFill>
         <p:spPr>
           <a:xfrm>
-            <a:off x="0" y="1382233"/>
-            <a:ext cx="5736265" cy="3466214"/>
+            <a:off x="0" y="1722474"/>
+            <a:ext cx="6464300" cy="4183912"/>
           </a:xfrm>
         </p:spPr>
       </p:pic>
@@ -10752,8 +11009,8 @@
         </p:nvSpPr>
         <p:spPr>
           <a:xfrm>
-            <a:off x="8165803" y="532257"/>
-            <a:ext cx="3785007" cy="503828"/>
+            <a:off x="7830879" y="527530"/>
+            <a:ext cx="4295369" cy="477246"/>
           </a:xfrm>
         </p:spPr>
         <p:txBody>
@@ -10761,8 +11018,8 @@
           <a:lstStyle/>
           <a:p>
             <a:r>
-              <a:rPr lang="en-US" dirty="0" smtClean="0"/>
-              <a:t>Explanation</a:t>
+              <a:rPr lang="en-US" dirty="0"/>
+              <a:t>Key findings</a:t>
             </a:r>
             <a:endParaRPr lang="en-US" dirty="0"/>
           </a:p>
@@ -10780,124 +11037,122 @@
         </p:nvSpPr>
         <p:spPr>
           <a:xfrm>
-            <a:off x="7581014" y="1100470"/>
-            <a:ext cx="4610985" cy="5089193"/>
+            <a:off x="7830878" y="972878"/>
+            <a:ext cx="4361121" cy="5762848"/>
           </a:xfrm>
         </p:spPr>
         <p:txBody>
           <a:bodyPr>
-            <a:normAutofit fontScale="85000" lnSpcReduction="10000"/>
+            <a:normAutofit fontScale="92500" lnSpcReduction="20000"/>
           </a:bodyPr>
           <a:lstStyle/>
           <a:p>
             <a:r>
-              <a:rPr lang="en-US" dirty="0"/>
-              <a:t>Promotions are grouped</a:t>
-            </a:r>
-            <a:r>
-              <a:rPr lang="en-US" dirty="0" smtClean="0"/>
-              <a:t>:</a:t>
-            </a:r>
-          </a:p>
-          <a:p>
-            <a:pPr lvl="1"/>
+              <a:rPr lang="en-US" dirty="0" err="1"/>
+              <a:t>Eldoret</a:t>
+            </a:r>
+            <a:r>
+              <a:rPr lang="en-US" dirty="0"/>
+              <a:t> has the highest average customer rating: 3.1625</a:t>
+            </a:r>
+            <a:r>
+              <a:rPr lang="en-US" dirty="0" smtClean="0"/>
+              <a:t>.</a:t>
+            </a:r>
+          </a:p>
+          <a:p>
+            <a:r>
+              <a:rPr lang="en-US" dirty="0" smtClean="0"/>
+              <a:t>Nairobi </a:t>
+            </a:r>
+            <a:r>
+              <a:rPr lang="en-US" dirty="0"/>
+              <a:t>ranks second: 3.0876</a:t>
+            </a:r>
+            <a:r>
+              <a:rPr lang="en-US" dirty="0" smtClean="0"/>
+              <a:t>.</a:t>
+            </a:r>
+          </a:p>
+          <a:p>
+            <a:r>
+              <a:rPr lang="en-US" dirty="0" smtClean="0"/>
+              <a:t>Kisumu </a:t>
+            </a:r>
+            <a:r>
+              <a:rPr lang="en-US" dirty="0"/>
+              <a:t>ranks third: 3.0395</a:t>
+            </a:r>
+            <a:r>
+              <a:rPr lang="en-US" dirty="0" smtClean="0"/>
+              <a:t>.</a:t>
+            </a:r>
+          </a:p>
+          <a:p>
+            <a:r>
+              <a:rPr lang="en-US" dirty="0" smtClean="0"/>
+              <a:t>Mombasa </a:t>
+            </a:r>
+            <a:r>
+              <a:rPr lang="en-US" dirty="0"/>
+              <a:t>ranks fourth: 2.8780</a:t>
+            </a:r>
+            <a:r>
+              <a:rPr lang="en-US" dirty="0" smtClean="0"/>
+              <a:t>.</a:t>
+            </a:r>
+          </a:p>
+          <a:p>
+            <a:r>
+              <a:rPr lang="en-US" dirty="0" err="1" smtClean="0"/>
+              <a:t>Nakuru</a:t>
+            </a:r>
+            <a:r>
+              <a:rPr lang="en-US" dirty="0" smtClean="0"/>
+              <a:t> </a:t>
+            </a:r>
+            <a:r>
+              <a:rPr lang="en-US" dirty="0"/>
+              <a:t>has the lowest average customer rating: 2.8393</a:t>
+            </a:r>
+            <a:r>
+              <a:rPr lang="en-US" dirty="0" smtClean="0"/>
+              <a:t>.</a:t>
+            </a:r>
+          </a:p>
+          <a:p>
             <a:r>
               <a:rPr lang="en-US" dirty="0" smtClean="0"/>
               <a:t>The </a:t>
             </a:r>
             <a:r>
               <a:rPr lang="en-US" dirty="0"/>
-              <a:t>code groups transactions according to whether a promotion was </a:t>
+              <a:t>results show that customer satisfaction varies across the branches, with </a:t>
             </a:r>
             <a:r>
               <a:rPr lang="en-US" dirty="0" err="1"/>
-              <a:t>applied.This</a:t>
-            </a:r>
-            <a:r>
-              <a:rPr lang="en-US" dirty="0"/>
-              <a:t> allows sales under different promotion conditions to be </a:t>
-            </a:r>
-            <a:r>
-              <a:rPr lang="en-US" dirty="0" smtClean="0"/>
-              <a:t>compared.</a:t>
-            </a:r>
-          </a:p>
-          <a:p>
-            <a:r>
-              <a:rPr lang="en-US" dirty="0" smtClean="0"/>
-              <a:t>Total </a:t>
-            </a:r>
-            <a:r>
-              <a:rPr lang="en-US" dirty="0"/>
-              <a:t>sales are calculated</a:t>
-            </a:r>
-            <a:r>
-              <a:rPr lang="en-US" dirty="0" smtClean="0"/>
-              <a:t>:</a:t>
-            </a:r>
-          </a:p>
-          <a:p>
-            <a:pPr lvl="1"/>
-            <a:r>
-              <a:rPr lang="en-US" dirty="0" smtClean="0"/>
-              <a:t>sum</a:t>
-            </a:r>
-            <a:r>
-              <a:rPr lang="en-US" dirty="0"/>
-              <a:t>() calculates the total sales generated for each promotion </a:t>
+              <a:t>Eldoret</a:t>
+            </a:r>
+            <a:r>
+              <a:rPr lang="en-US" dirty="0"/>
+              <a:t> recording the highest average rating and </a:t>
             </a:r>
             <a:r>
               <a:rPr lang="en-US" dirty="0" err="1"/>
-              <a:t>category.The</a:t>
-            </a:r>
-            <a:r>
-              <a:rPr lang="en-US" dirty="0"/>
-              <a:t> results are arranged from highest to lowest sales</a:t>
-            </a:r>
-            <a:r>
-              <a:rPr lang="en-US" dirty="0" smtClean="0"/>
-              <a:t>.</a:t>
-            </a:r>
-          </a:p>
-          <a:p>
-            <a:r>
-              <a:rPr lang="en-US" dirty="0" smtClean="0"/>
-              <a:t>Promotional </a:t>
-            </a:r>
-            <a:r>
-              <a:rPr lang="en-US" dirty="0"/>
-              <a:t>impact is examined</a:t>
-            </a:r>
-            <a:r>
-              <a:rPr lang="en-US" dirty="0" smtClean="0"/>
-              <a:t>:</a:t>
-            </a:r>
-          </a:p>
-          <a:p>
-            <a:pPr lvl="1"/>
-            <a:r>
-              <a:rPr lang="en-US" dirty="0" smtClean="0"/>
-              <a:t>The </a:t>
-            </a:r>
-            <a:r>
-              <a:rPr lang="en-US" dirty="0"/>
-              <a:t>output shows differences in sales between promotion </a:t>
-            </a:r>
-            <a:r>
-              <a:rPr lang="en-US" dirty="0" err="1"/>
-              <a:t>groups.This</a:t>
-            </a:r>
-            <a:r>
-              <a:rPr lang="en-US" dirty="0"/>
-              <a:t> helps assess how promotions relate to overall sales performance.</a:t>
-            </a:r>
+              <a:t>Nakuru</a:t>
+            </a:r>
+            <a:r>
+              <a:rPr lang="en-US" dirty="0"/>
+              <a:t> the lowest.</a:t>
+            </a:r>
+            <a:endParaRPr lang="en-US" dirty="0"/>
           </a:p>
         </p:txBody>
       </p:sp>
     </p:spTree>
     <p:extLst>
       <p:ext uri="{BB962C8B-B14F-4D97-AF65-F5344CB8AC3E}">
-        <p14:creationId xmlns:p14="http://schemas.microsoft.com/office/powerpoint/2010/main" val="572927671"/>
+        <p14:creationId xmlns:p14="http://schemas.microsoft.com/office/powerpoint/2010/main" val="183872669"/>
       </p:ext>
     </p:extLst>
   </p:cSld>
@@ -10934,7 +11189,12 @@
             <p:ph type="title"/>
           </p:nvPr>
         </p:nvSpPr>
-        <p:spPr/>
+        <p:spPr>
+          <a:xfrm>
+            <a:off x="0" y="0"/>
+            <a:ext cx="10728067" cy="751294"/>
+          </a:xfrm>
+        </p:spPr>
         <p:txBody>
           <a:bodyPr>
             <a:normAutofit/>
@@ -10943,7 +11203,7 @@
           <a:p>
             <a:r>
               <a:rPr lang="en-US" sz="2400" dirty="0"/>
-              <a:t>Question 22: Analyze the Relationship Between Discounts and Total Sales</a:t>
+              <a:t>Question 21: Determine the Impact of Promotional Campaigns on Sales Performance</a:t>
             </a:r>
           </a:p>
         </p:txBody>
@@ -10958,7 +11218,12 @@
             <p:ph type="body" idx="1"/>
           </p:nvPr>
         </p:nvSpPr>
-        <p:spPr/>
+        <p:spPr>
+          <a:xfrm>
+            <a:off x="0" y="532257"/>
+            <a:ext cx="5157787" cy="455981"/>
+          </a:xfrm>
+        </p:spPr>
         <p:txBody>
           <a:bodyPr/>
           <a:lstStyle/>
@@ -10995,8 +11260,8 @@
         </p:blipFill>
         <p:spPr>
           <a:xfrm>
-            <a:off x="712382" y="2567763"/>
-            <a:ext cx="5285194" cy="3264195"/>
+            <a:off x="0" y="1382233"/>
+            <a:ext cx="5736265" cy="3466214"/>
           </a:xfrm>
         </p:spPr>
       </p:pic>
@@ -11010,14 +11275,19 @@
             <p:ph type="body" sz="quarter" idx="3"/>
           </p:nvPr>
         </p:nvSpPr>
-        <p:spPr/>
+        <p:spPr>
+          <a:xfrm>
+            <a:off x="8165803" y="532257"/>
+            <a:ext cx="3785007" cy="503828"/>
+          </a:xfrm>
+        </p:spPr>
         <p:txBody>
           <a:bodyPr/>
           <a:lstStyle/>
           <a:p>
             <a:r>
-              <a:rPr lang="en-US" dirty="0" smtClean="0"/>
-              <a:t>Explanation</a:t>
+              <a:rPr lang="en-US" dirty="0"/>
+              <a:t>Key findings</a:t>
             </a:r>
             <a:endParaRPr lang="en-US" dirty="0"/>
           </a:p>
@@ -11035,42 +11305,47 @@
         </p:nvSpPr>
         <p:spPr>
           <a:xfrm>
-            <a:off x="6172200" y="2505074"/>
-            <a:ext cx="5183188" cy="4310395"/>
+            <a:off x="7581014" y="1100470"/>
+            <a:ext cx="4610985" cy="5089193"/>
           </a:xfrm>
         </p:spPr>
         <p:txBody>
           <a:bodyPr>
-            <a:normAutofit fontScale="85000" lnSpcReduction="10000"/>
+            <a:normAutofit fontScale="92500" lnSpcReduction="20000"/>
           </a:bodyPr>
           <a:lstStyle/>
           <a:p>
             <a:r>
               <a:rPr lang="en-US" dirty="0"/>
-              <a:t>Discounts are grouped</a:t>
-            </a:r>
-            <a:r>
-              <a:rPr lang="en-US" dirty="0" smtClean="0"/>
-              <a:t>:</a:t>
-            </a:r>
-          </a:p>
-          <a:p>
-            <a:pPr lvl="1"/>
+              <a:t>Sales with a promotion generated 61,202.40 in total sales</a:t>
+            </a:r>
+            <a:r>
+              <a:rPr lang="en-US" dirty="0" smtClean="0"/>
+              <a:t>.</a:t>
+            </a:r>
+          </a:p>
+          <a:p>
+            <a:r>
+              <a:rPr lang="en-US" dirty="0" smtClean="0"/>
+              <a:t>Sales </a:t>
+            </a:r>
+            <a:r>
+              <a:rPr lang="en-US" dirty="0"/>
+              <a:t>without a promotion generated 44,099.97</a:t>
+            </a:r>
+            <a:r>
+              <a:rPr lang="en-US" dirty="0" smtClean="0"/>
+              <a:t>.</a:t>
+            </a:r>
+          </a:p>
+          <a:p>
             <a:r>
               <a:rPr lang="en-US" dirty="0" smtClean="0"/>
               <a:t>The </a:t>
             </a:r>
             <a:r>
               <a:rPr lang="en-US" dirty="0"/>
-              <a:t>code groups transactions according to their discount </a:t>
-            </a:r>
-            <a:r>
-              <a:rPr lang="en-US" dirty="0" err="1"/>
-              <a:t>values.This</a:t>
-            </a:r>
-            <a:r>
-              <a:rPr lang="en-US" dirty="0"/>
-              <a:t> allows sales at different discount levels to be compared</a:t>
+              <a:t>difference is 17,102.43, meaning promoted sales were substantially higher in total</a:t>
             </a:r>
             <a:r>
               <a:rPr lang="en-US" dirty="0" smtClean="0"/>
@@ -11080,34 +11355,11 @@
           <a:p>
             <a:r>
               <a:rPr lang="en-US" dirty="0" smtClean="0"/>
-              <a:t>Total </a:t>
-            </a:r>
-            <a:r>
-              <a:rPr lang="en-US" dirty="0"/>
-              <a:t>sales are calculated</a:t>
-            </a:r>
-            <a:r>
-              <a:rPr lang="en-US" dirty="0" smtClean="0"/>
-              <a:t>:</a:t>
-            </a:r>
-          </a:p>
-          <a:p>
-            <a:pPr lvl="1"/>
-            <a:r>
-              <a:rPr lang="en-US" dirty="0" smtClean="0"/>
-              <a:t>sum</a:t>
-            </a:r>
-            <a:r>
-              <a:rPr lang="en-US" dirty="0"/>
-              <a:t>() calculates the total sales generated at each discount </a:t>
-            </a:r>
-            <a:r>
-              <a:rPr lang="en-US" dirty="0" err="1"/>
-              <a:t>level.The</a:t>
-            </a:r>
-            <a:r>
-              <a:rPr lang="en-US" dirty="0"/>
-              <a:t> results are arranged from highest to lowest sales</a:t>
+              <a:t>Promoted </a:t>
+            </a:r>
+            <a:r>
+              <a:rPr lang="en-US" dirty="0"/>
+              <a:t>transactions accounted for approximately 58.1% of the combined sales shown</a:t>
             </a:r>
             <a:r>
               <a:rPr lang="en-US" dirty="0" smtClean="0"/>
@@ -11121,38 +11373,16 @@
             </a:r>
             <a:r>
               <a:rPr lang="en-US" dirty="0"/>
-              <a:t>relationship is examined</a:t>
-            </a:r>
-            <a:r>
-              <a:rPr lang="en-US" dirty="0" smtClean="0"/>
-              <a:t>:</a:t>
-            </a:r>
-          </a:p>
-          <a:p>
-            <a:pPr lvl="1"/>
-            <a:r>
-              <a:rPr lang="en-US" dirty="0" smtClean="0"/>
-              <a:t>The </a:t>
-            </a:r>
-            <a:r>
-              <a:rPr lang="en-US" dirty="0"/>
-              <a:t>output shows how different discount levels are associated with total </a:t>
-            </a:r>
-            <a:r>
-              <a:rPr lang="en-US" dirty="0" err="1"/>
-              <a:t>sales.This</a:t>
-            </a:r>
-            <a:r>
-              <a:rPr lang="en-US" dirty="0"/>
-              <a:t> helps assess sales performance under different discount conditions.</a:t>
-            </a:r>
+              <a:t>output shows that sales were higher for transactions where a promotion was applied.</a:t>
+            </a:r>
+            <a:endParaRPr lang="en-US" dirty="0"/>
           </a:p>
         </p:txBody>
       </p:sp>
     </p:spTree>
     <p:extLst>
       <p:ext uri="{BB962C8B-B14F-4D97-AF65-F5344CB8AC3E}">
-        <p14:creationId xmlns:p14="http://schemas.microsoft.com/office/powerpoint/2010/main" val="957935332"/>
+        <p14:creationId xmlns:p14="http://schemas.microsoft.com/office/powerpoint/2010/main" val="572927671"/>
       </p:ext>
     </p:extLst>
   </p:cSld>
@@ -11198,7 +11428,7 @@
           <a:p>
             <a:r>
               <a:rPr lang="en-US" sz="2400" dirty="0"/>
-              <a:t>Question 23: Analyze Return Patterns and Common Return Reasons</a:t>
+              <a:t>Question 22: Analyze the Relationship Between Discounts and Total Sales</a:t>
             </a:r>
           </a:p>
         </p:txBody>
@@ -11220,7 +11450,7 @@
           <a:p>
             <a:r>
               <a:rPr lang="en-US" dirty="0" smtClean="0"/>
-              <a:t>Code</a:t>
+              <a:t>code</a:t>
             </a:r>
             <a:endParaRPr lang="en-US" dirty="0"/>
           </a:p>
@@ -11250,8 +11480,8 @@
         </p:blipFill>
         <p:spPr>
           <a:xfrm>
-            <a:off x="59737" y="2892055"/>
-            <a:ext cx="5678402" cy="2690037"/>
+            <a:off x="623554" y="2426684"/>
+            <a:ext cx="5285194" cy="3264195"/>
           </a:xfrm>
         </p:spPr>
       </p:pic>
@@ -11271,8 +11501,8 @@
           <a:lstStyle/>
           <a:p>
             <a:r>
-              <a:rPr lang="en-US" dirty="0" smtClean="0"/>
-              <a:t>Explanation</a:t>
+              <a:rPr lang="en-US" dirty="0"/>
+              <a:t>Key findings</a:t>
             </a:r>
             <a:endParaRPr lang="en-US" dirty="0"/>
           </a:p>
@@ -11291,38 +11521,18 @@
         <p:spPr>
           <a:xfrm>
             <a:off x="6172200" y="2505074"/>
-            <a:ext cx="5183188" cy="4235967"/>
+            <a:ext cx="5183188" cy="4310395"/>
           </a:xfrm>
         </p:spPr>
         <p:txBody>
           <a:bodyPr>
-            <a:normAutofit fontScale="92500" lnSpcReduction="20000"/>
+            <a:normAutofit fontScale="85000" lnSpcReduction="20000"/>
           </a:bodyPr>
           <a:lstStyle/>
           <a:p>
             <a:r>
               <a:rPr lang="en-US" dirty="0"/>
-              <a:t>Return statuses are </a:t>
-            </a:r>
-            <a:endParaRPr lang="en-US" dirty="0" smtClean="0"/>
-          </a:p>
-          <a:p>
-            <a:pPr lvl="1"/>
-            <a:r>
-              <a:rPr lang="en-US" dirty="0" smtClean="0"/>
-              <a:t> </a:t>
-            </a:r>
-            <a:r>
-              <a:rPr lang="en-US" dirty="0"/>
-              <a:t>code counts how many transactions were returned and not </a:t>
-            </a:r>
-            <a:r>
-              <a:rPr lang="en-US" dirty="0" err="1"/>
-              <a:t>returned.This</a:t>
-            </a:r>
-            <a:r>
-              <a:rPr lang="en-US" dirty="0"/>
-              <a:t> shows the overall return pattern in the dataset</a:t>
+              <a:t>The 10% discount generated the highest total sales at 25,909.26</a:t>
             </a:r>
             <a:r>
               <a:rPr lang="en-US" dirty="0" smtClean="0"/>
@@ -11332,34 +11542,11 @@
           <a:p>
             <a:r>
               <a:rPr lang="en-US" dirty="0" smtClean="0"/>
-              <a:t>Return </a:t>
-            </a:r>
-            <a:r>
-              <a:rPr lang="en-US" dirty="0"/>
-              <a:t>frequency is identified</a:t>
-            </a:r>
-            <a:r>
-              <a:rPr lang="en-US" dirty="0" smtClean="0"/>
-              <a:t>:</a:t>
-            </a:r>
-          </a:p>
-          <a:p>
-            <a:pPr lvl="1"/>
-            <a:r>
-              <a:rPr lang="en-US" dirty="0" err="1" smtClean="0"/>
-              <a:t>value_counts</a:t>
-            </a:r>
-            <a:r>
-              <a:rPr lang="en-US" dirty="0"/>
-              <a:t>() shows the number of transactions for each return </a:t>
-            </a:r>
-            <a:r>
-              <a:rPr lang="en-US" dirty="0" err="1"/>
-              <a:t>status.This</a:t>
-            </a:r>
-            <a:r>
-              <a:rPr lang="en-US" dirty="0"/>
-              <a:t> helps determine how common product returns are</a:t>
+              <a:t>The </a:t>
+            </a:r>
+            <a:r>
+              <a:rPr lang="en-US" dirty="0"/>
+              <a:t>0% discount generated the second-highest total sales at 25,410.82</a:t>
             </a:r>
             <a:r>
               <a:rPr lang="en-US" dirty="0" smtClean="0"/>
@@ -11369,39 +11556,48 @@
           <a:p>
             <a:r>
               <a:rPr lang="en-US" dirty="0" smtClean="0"/>
-              <a:t>Return </a:t>
-            </a:r>
-            <a:r>
-              <a:rPr lang="en-US" dirty="0"/>
-              <a:t>patterns are </a:t>
-            </a:r>
-            <a:endParaRPr lang="en-US" dirty="0" smtClean="0"/>
-          </a:p>
-          <a:p>
-            <a:pPr lvl="1"/>
-            <a:r>
-              <a:rPr lang="en-US" dirty="0" smtClean="0"/>
-              <a:t> </a:t>
-            </a:r>
-            <a:r>
-              <a:rPr lang="en-US" dirty="0"/>
-              <a:t>results provide an overview of customer </a:t>
-            </a:r>
-            <a:r>
-              <a:rPr lang="en-US" dirty="0" err="1"/>
-              <a:t>returns.This</a:t>
-            </a:r>
-            <a:r>
-              <a:rPr lang="en-US" dirty="0"/>
-              <a:t> can help identify whether returns are frequent or relatively low.</a:t>
-            </a:r>
+              <a:t>The </a:t>
+            </a:r>
+            <a:r>
+              <a:rPr lang="en-US" dirty="0"/>
+              <a:t>20% discount generated 18,137.74 in total sales</a:t>
+            </a:r>
+            <a:r>
+              <a:rPr lang="en-US" dirty="0" smtClean="0"/>
+              <a:t>.</a:t>
+            </a:r>
+          </a:p>
+          <a:p>
+            <a:r>
+              <a:rPr lang="en-US" dirty="0" smtClean="0"/>
+              <a:t>The </a:t>
+            </a:r>
+            <a:r>
+              <a:rPr lang="en-US" dirty="0"/>
+              <a:t>15% discount generated 17,271.27.The 5% discount generated the lowest total sales at 3,586.86</a:t>
+            </a:r>
+            <a:r>
+              <a:rPr lang="en-US" dirty="0" smtClean="0"/>
+              <a:t>.</a:t>
+            </a:r>
+          </a:p>
+          <a:p>
+            <a:r>
+              <a:rPr lang="en-US" dirty="0" smtClean="0"/>
+              <a:t>Overall</a:t>
+            </a:r>
+            <a:r>
+              <a:rPr lang="en-US" dirty="0"/>
+              <a:t>, the output shows that 10% and 0% discount levels generated the highest total sales, while 5% generated the lowest.</a:t>
+            </a:r>
+            <a:endParaRPr lang="en-US" dirty="0"/>
           </a:p>
         </p:txBody>
       </p:sp>
     </p:spTree>
     <p:extLst>
       <p:ext uri="{BB962C8B-B14F-4D97-AF65-F5344CB8AC3E}">
-        <p14:creationId xmlns:p14="http://schemas.microsoft.com/office/powerpoint/2010/main" val="1703705383"/>
+        <p14:creationId xmlns:p14="http://schemas.microsoft.com/office/powerpoint/2010/main" val="957935332"/>
       </p:ext>
     </p:extLst>
   </p:cSld>
@@ -11499,8 +11695,8 @@
         </p:blipFill>
         <p:spPr>
           <a:xfrm>
-            <a:off x="266328" y="2801679"/>
-            <a:ext cx="5731247" cy="2812312"/>
+            <a:off x="59737" y="2892055"/>
+            <a:ext cx="5678402" cy="2690037"/>
           </a:xfrm>
         </p:spPr>
       </p:pic>
@@ -11520,8 +11716,8 @@
           <a:lstStyle/>
           <a:p>
             <a:r>
-              <a:rPr lang="en-US" dirty="0" smtClean="0"/>
-              <a:t>Explanation</a:t>
+              <a:rPr lang="en-US" dirty="0"/>
+              <a:t>Key findings</a:t>
             </a:r>
             <a:endParaRPr lang="en-US" dirty="0"/>
           </a:p>
@@ -11537,39 +11733,35 @@
             <p:ph sz="quarter" idx="4"/>
           </p:nvPr>
         </p:nvSpPr>
-        <p:spPr/>
+        <p:spPr>
+          <a:xfrm>
+            <a:off x="6172200" y="2505074"/>
+            <a:ext cx="5183188" cy="4235967"/>
+          </a:xfrm>
+        </p:spPr>
         <p:txBody>
           <a:bodyPr>
-            <a:normAutofit fontScale="77500" lnSpcReduction="20000"/>
+            <a:normAutofit fontScale="92500" lnSpcReduction="20000"/>
           </a:bodyPr>
           <a:lstStyle/>
           <a:p>
             <a:r>
               <a:rPr lang="en-US" dirty="0"/>
-              <a:t>Returned products are filtered</a:t>
-            </a:r>
-            <a:r>
-              <a:rPr lang="en-US" dirty="0" smtClean="0"/>
-              <a:t>:</a:t>
-            </a:r>
-          </a:p>
-          <a:p>
-            <a:pPr lvl="1"/>
+              <a:t>671 transactions were not returned, while 666 transactions were returned</a:t>
+            </a:r>
+            <a:r>
+              <a:rPr lang="en-US" dirty="0" smtClean="0"/>
+              <a:t>.</a:t>
+            </a:r>
+          </a:p>
+          <a:p>
             <a:r>
               <a:rPr lang="en-US" dirty="0" smtClean="0"/>
               <a:t>The </a:t>
             </a:r>
             <a:r>
               <a:rPr lang="en-US" dirty="0"/>
-              <a:t>code selects only transactions where the product was </a:t>
-            </a:r>
-            <a:r>
-              <a:rPr lang="en-US" dirty="0" err="1"/>
-              <a:t>returned.This</a:t>
-            </a:r>
-            <a:r>
-              <a:rPr lang="en-US" dirty="0"/>
-              <a:t> focuses the analysis specifically on returned items</a:t>
+              <a:t>number of returned and non-returned transactions is almost equal, showing a relatively balanced return pattern</a:t>
             </a:r>
             <a:r>
               <a:rPr lang="en-US" dirty="0" smtClean="0"/>
@@ -11579,34 +11771,11 @@
           <a:p>
             <a:r>
               <a:rPr lang="en-US" dirty="0" smtClean="0"/>
-              <a:t>Return </a:t>
-            </a:r>
-            <a:r>
-              <a:rPr lang="en-US" dirty="0"/>
-              <a:t>reasons are counted</a:t>
-            </a:r>
-            <a:r>
-              <a:rPr lang="en-US" dirty="0" smtClean="0"/>
-              <a:t>:</a:t>
-            </a:r>
-          </a:p>
-          <a:p>
-            <a:pPr lvl="1"/>
-            <a:r>
-              <a:rPr lang="en-US" dirty="0" err="1" smtClean="0"/>
-              <a:t>value_counts</a:t>
-            </a:r>
-            <a:r>
-              <a:rPr lang="en-US" dirty="0"/>
-              <a:t>() calculates how often each return reason </a:t>
-            </a:r>
-            <a:r>
-              <a:rPr lang="en-US" dirty="0" err="1"/>
-              <a:t>occurs.This</a:t>
-            </a:r>
-            <a:r>
-              <a:rPr lang="en-US" dirty="0"/>
-              <a:t> identifies the most common reasons for product returns</a:t>
+              <a:t>Returned </a:t>
+            </a:r>
+            <a:r>
+              <a:rPr lang="en-US" dirty="0"/>
+              <a:t>transactions represent approximately 49.8% of all transactions</a:t>
             </a:r>
             <a:r>
               <a:rPr lang="en-US" dirty="0" smtClean="0"/>
@@ -11616,42 +11785,20 @@
           <a:p>
             <a:r>
               <a:rPr lang="en-US" dirty="0" smtClean="0"/>
-              <a:t>Common </a:t>
-            </a:r>
-            <a:r>
-              <a:rPr lang="en-US" dirty="0"/>
-              <a:t>problems are identified</a:t>
-            </a:r>
-            <a:r>
-              <a:rPr lang="en-US" dirty="0" smtClean="0"/>
-              <a:t>:</a:t>
-            </a:r>
-          </a:p>
-          <a:p>
-            <a:pPr lvl="1"/>
-            <a:r>
-              <a:rPr lang="en-US" dirty="0" smtClean="0"/>
               <a:t>The </a:t>
             </a:r>
             <a:r>
               <a:rPr lang="en-US" dirty="0"/>
-              <a:t>results show the main reasons customers return </a:t>
-            </a:r>
-            <a:r>
-              <a:rPr lang="en-US" dirty="0" err="1"/>
-              <a:t>products.This</a:t>
-            </a:r>
-            <a:r>
-              <a:rPr lang="en-US" dirty="0"/>
-              <a:t> can help the business understand areas requiring attention.</a:t>
-            </a:r>
+              <a:t>difference between returned and non-returned transactions is only 5 transactions.</a:t>
+            </a:r>
+            <a:endParaRPr lang="en-US" dirty="0"/>
           </a:p>
         </p:txBody>
       </p:sp>
     </p:spTree>
     <p:extLst>
       <p:ext uri="{BB962C8B-B14F-4D97-AF65-F5344CB8AC3E}">
-        <p14:creationId xmlns:p14="http://schemas.microsoft.com/office/powerpoint/2010/main" val="3561359731"/>
+        <p14:creationId xmlns:p14="http://schemas.microsoft.com/office/powerpoint/2010/main" val="1703705383"/>
       </p:ext>
     </p:extLst>
   </p:cSld>
@@ -11697,7 +11844,7 @@
           <a:p>
             <a:r>
               <a:rPr lang="en-US" sz="2400" dirty="0"/>
-              <a:t>Question 24: Identify Branches with the Highest and Lowest Sales Performance</a:t>
+              <a:t>Question 23: Analyze Return Patterns and Common Return Reasons</a:t>
             </a:r>
           </a:p>
         </p:txBody>
@@ -11749,8 +11896,8 @@
         </p:blipFill>
         <p:spPr>
           <a:xfrm>
-            <a:off x="707065" y="2508374"/>
-            <a:ext cx="4502408" cy="3355482"/>
+            <a:off x="266328" y="2801679"/>
+            <a:ext cx="5731247" cy="2812312"/>
           </a:xfrm>
         </p:spPr>
       </p:pic>
@@ -11770,8 +11917,8 @@
           <a:lstStyle/>
           <a:p>
             <a:r>
-              <a:rPr lang="en-US" dirty="0" smtClean="0"/>
-              <a:t>Explanation</a:t>
+              <a:rPr lang="en-US" dirty="0"/>
+              <a:t>Key findings</a:t>
             </a:r>
             <a:endParaRPr lang="en-US" dirty="0"/>
           </a:p>
@@ -11787,12 +11934,7 @@
             <p:ph sz="quarter" idx="4"/>
           </p:nvPr>
         </p:nvSpPr>
-        <p:spPr>
-          <a:xfrm>
-            <a:off x="6172200" y="2505075"/>
-            <a:ext cx="5183188" cy="4305078"/>
-          </a:xfrm>
-        </p:spPr>
+        <p:spPr/>
         <p:txBody>
           <a:bodyPr>
             <a:normAutofit fontScale="85000" lnSpcReduction="20000"/>
@@ -11801,30 +11943,7 @@
           <a:p>
             <a:r>
               <a:rPr lang="en-US" dirty="0"/>
-              <a:t>Branch sales are calculated</a:t>
-            </a:r>
-            <a:r>
-              <a:rPr lang="en-US" dirty="0" smtClean="0"/>
-              <a:t>:</a:t>
-            </a:r>
-          </a:p>
-          <a:p>
-            <a:pPr lvl="1"/>
-            <a:r>
-              <a:rPr lang="en-US" dirty="0" smtClean="0"/>
-              <a:t>Total </a:t>
-            </a:r>
-            <a:r>
-              <a:rPr lang="en-US" dirty="0"/>
-              <a:t>sales are grouped by branch to measure overall </a:t>
-            </a:r>
-            <a:r>
-              <a:rPr lang="en-US" dirty="0" err="1"/>
-              <a:t>performance.The</a:t>
-            </a:r>
-            <a:r>
-              <a:rPr lang="en-US" dirty="0"/>
-              <a:t> branches are then arranged from highest to lowest sales</a:t>
+              <a:t>Wrong Item is the most common reason for returns, with 188 returns</a:t>
             </a:r>
             <a:r>
               <a:rPr lang="en-US" dirty="0" smtClean="0"/>
@@ -11834,79 +11953,48 @@
           <a:p>
             <a:r>
               <a:rPr lang="en-US" dirty="0" smtClean="0"/>
-              <a:t>Highest </a:t>
-            </a:r>
-            <a:r>
-              <a:rPr lang="en-US" dirty="0"/>
-              <a:t>and lowest branches are identified</a:t>
-            </a:r>
-            <a:r>
-              <a:rPr lang="en-US" dirty="0" smtClean="0"/>
-              <a:t>:</a:t>
-            </a:r>
-          </a:p>
-          <a:p>
-            <a:pPr lvl="1"/>
-            <a:r>
-              <a:rPr lang="en-US" dirty="0" smtClean="0"/>
-              <a:t>head(1</a:t>
-            </a:r>
-            <a:r>
-              <a:rPr lang="en-US" dirty="0"/>
-              <a:t>) selects the branch with the highest </a:t>
-            </a:r>
-            <a:r>
-              <a:rPr lang="en-US" dirty="0" err="1"/>
-              <a:t>sales.tail</a:t>
-            </a:r>
-            <a:r>
-              <a:rPr lang="en-US" dirty="0"/>
-              <a:t>(1) selects the branch with the lowest </a:t>
-            </a:r>
-            <a:r>
-              <a:rPr lang="en-US" dirty="0" smtClean="0"/>
-              <a:t>sales.</a:t>
-            </a:r>
-          </a:p>
-          <a:p>
-            <a:r>
-              <a:rPr lang="en-US" dirty="0" smtClean="0"/>
-              <a:t>Branch </a:t>
-            </a:r>
-            <a:r>
-              <a:rPr lang="en-US" dirty="0"/>
-              <a:t>performance is compared</a:t>
-            </a:r>
-            <a:r>
-              <a:rPr lang="en-US" dirty="0" smtClean="0"/>
-              <a:t>:</a:t>
-            </a:r>
-          </a:p>
-          <a:p>
-            <a:pPr lvl="1"/>
-            <a:r>
-              <a:rPr lang="en-US" dirty="0" smtClean="0"/>
-              <a:t>The </a:t>
-            </a:r>
-            <a:r>
-              <a:rPr lang="en-US" dirty="0"/>
-              <a:t>results clearly identify the branches at both ends of the sales </a:t>
-            </a:r>
-            <a:r>
-              <a:rPr lang="en-US" dirty="0" err="1"/>
-              <a:t>range.This</a:t>
-            </a:r>
-            <a:r>
-              <a:rPr lang="en-US" dirty="0"/>
-              <a:t> helps management understand differences in branch performance.</a:t>
-            </a:r>
+              <a:t>Damaged </a:t>
+            </a:r>
+            <a:r>
+              <a:rPr lang="en-US" dirty="0"/>
+              <a:t>products are the second most common reason, with 176 returns</a:t>
+            </a:r>
+            <a:r>
+              <a:rPr lang="en-US" dirty="0" smtClean="0"/>
+              <a:t>.</a:t>
+            </a:r>
+          </a:p>
+          <a:p>
+            <a:r>
+              <a:rPr lang="en-US" dirty="0" smtClean="0"/>
+              <a:t>Changed </a:t>
+            </a:r>
+            <a:r>
+              <a:rPr lang="en-US" dirty="0"/>
+              <a:t>Mind is the </a:t>
+            </a:r>
+            <a:r>
+              <a:rPr lang="en-US" dirty="0" smtClean="0"/>
+              <a:t>least common of the three, with 162 returns.</a:t>
+            </a:r>
+          </a:p>
+          <a:p>
+            <a:r>
+              <a:rPr lang="en-US" dirty="0" smtClean="0"/>
+              <a:t>Wrong Item </a:t>
+            </a:r>
+            <a:r>
+              <a:rPr lang="en-US" dirty="0"/>
+              <a:t>accounts for 26 more returns than Changed Mind, showing that incorrect items are a more frequent issue in the data.</a:t>
+            </a:r>
+            <a:endParaRPr lang="en-US" dirty="0"/>
           </a:p>
         </p:txBody>
       </p:sp>
     </p:spTree>
     <p:extLst>
       <p:ext uri="{BB962C8B-B14F-4D97-AF65-F5344CB8AC3E}">
-        <p14:creationId xmlns:p14="http://schemas.microsoft.com/office/powerpoint/2010/main" val="3868751143"/>
+        <p14:creationId xmlns:p14="http://schemas.microsoft.com/office/powerpoint/2010/main" val="3561359731"/>
       </p:ext>
     </p:extLst>
   </p:cSld>
@@ -12062,12 +12150,7 @@
             <p:ph type="title"/>
           </p:nvPr>
         </p:nvSpPr>
-        <p:spPr>
-          <a:xfrm>
-            <a:off x="0" y="0"/>
-            <a:ext cx="10419723" cy="565224"/>
-          </a:xfrm>
-        </p:spPr>
+        <p:spPr/>
         <p:txBody>
           <a:bodyPr>
             <a:normAutofit/>
@@ -12076,7 +12159,7 @@
           <a:p>
             <a:r>
               <a:rPr lang="en-US" sz="2400" dirty="0"/>
-              <a:t>Question 25: Determine the Top-Performing Salespersons Based on Total Sales</a:t>
+              <a:t>Question 24: Identify Branches with the Highest and Lowest Sales Performance</a:t>
             </a:r>
           </a:p>
         </p:txBody>
@@ -12091,12 +12174,7 @@
             <p:ph type="body" idx="1"/>
           </p:nvPr>
         </p:nvSpPr>
-        <p:spPr>
-          <a:xfrm>
-            <a:off x="0" y="469052"/>
-            <a:ext cx="5157787" cy="440032"/>
-          </a:xfrm>
-        </p:spPr>
+        <p:spPr/>
         <p:txBody>
           <a:bodyPr/>
           <a:lstStyle/>
@@ -12133,6 +12211,221 @@
         </p:blipFill>
         <p:spPr>
           <a:xfrm>
+            <a:off x="707065" y="2508374"/>
+            <a:ext cx="4502408" cy="3355482"/>
+          </a:xfrm>
+        </p:spPr>
+      </p:pic>
+      <p:sp>
+        <p:nvSpPr>
+          <p:cNvPr id="5" name="Text Placeholder 4"/>
+          <p:cNvSpPr>
+            <a:spLocks noGrp="1"/>
+          </p:cNvSpPr>
+          <p:nvPr>
+            <p:ph type="body" sz="quarter" idx="3"/>
+          </p:nvPr>
+        </p:nvSpPr>
+        <p:spPr/>
+        <p:txBody>
+          <a:bodyPr/>
+          <a:lstStyle/>
+          <a:p>
+            <a:r>
+              <a:rPr lang="en-US" dirty="0"/>
+              <a:t>Key findings</a:t>
+            </a:r>
+            <a:endParaRPr lang="en-US" dirty="0"/>
+          </a:p>
+        </p:txBody>
+      </p:sp>
+      <p:sp>
+        <p:nvSpPr>
+          <p:cNvPr id="6" name="Content Placeholder 5"/>
+          <p:cNvSpPr>
+            <a:spLocks noGrp="1"/>
+          </p:cNvSpPr>
+          <p:nvPr>
+            <p:ph sz="quarter" idx="4"/>
+          </p:nvPr>
+        </p:nvSpPr>
+        <p:spPr>
+          <a:xfrm>
+            <a:off x="6172200" y="2505075"/>
+            <a:ext cx="5183188" cy="4305078"/>
+          </a:xfrm>
+        </p:spPr>
+        <p:txBody>
+          <a:bodyPr>
+            <a:normAutofit fontScale="92500" lnSpcReduction="10000"/>
+          </a:bodyPr>
+          <a:lstStyle/>
+          <a:p>
+            <a:r>
+              <a:rPr lang="en-US" dirty="0" err="1"/>
+              <a:t>Eldoret</a:t>
+            </a:r>
+            <a:r>
+              <a:rPr lang="en-US" dirty="0"/>
+              <a:t> has the highest sales performance, with total sales of 44,258.69</a:t>
+            </a:r>
+            <a:r>
+              <a:rPr lang="en-US" dirty="0" smtClean="0"/>
+              <a:t>.</a:t>
+            </a:r>
+          </a:p>
+          <a:p>
+            <a:r>
+              <a:rPr lang="en-US" dirty="0" smtClean="0"/>
+              <a:t>Kisumu </a:t>
+            </a:r>
+            <a:r>
+              <a:rPr lang="en-US" dirty="0"/>
+              <a:t>has the lowest sales performance, with total sales of 22,674.85</a:t>
+            </a:r>
+            <a:r>
+              <a:rPr lang="en-US" dirty="0" smtClean="0"/>
+              <a:t>.</a:t>
+            </a:r>
+          </a:p>
+          <a:p>
+            <a:r>
+              <a:rPr lang="en-US" dirty="0" smtClean="0"/>
+              <a:t>The </a:t>
+            </a:r>
+            <a:r>
+              <a:rPr lang="en-US" dirty="0"/>
+              <a:t>difference between the highest and lowest branches is 21,583.84</a:t>
+            </a:r>
+            <a:r>
+              <a:rPr lang="en-US" dirty="0" smtClean="0"/>
+              <a:t>.</a:t>
+            </a:r>
+          </a:p>
+          <a:p>
+            <a:r>
+              <a:rPr lang="en-US" dirty="0" smtClean="0"/>
+              <a:t>This </a:t>
+            </a:r>
+            <a:r>
+              <a:rPr lang="en-US" dirty="0"/>
+              <a:t>shows a substantial difference in sales performance between the two branches.</a:t>
+            </a:r>
+            <a:endParaRPr lang="en-US" dirty="0"/>
+          </a:p>
+        </p:txBody>
+      </p:sp>
+    </p:spTree>
+    <p:extLst>
+      <p:ext uri="{BB962C8B-B14F-4D97-AF65-F5344CB8AC3E}">
+        <p14:creationId xmlns:p14="http://schemas.microsoft.com/office/powerpoint/2010/main" val="3868751143"/>
+      </p:ext>
+    </p:extLst>
+  </p:cSld>
+  <p:clrMapOvr>
+    <a:masterClrMapping/>
+  </p:clrMapOvr>
+</p:sld>
+</file>
+
+<file path=ppt/slides/slide41.xml><?xml version="1.0" encoding="utf-8"?>
+<p:sld xmlns:a="http://schemas.openxmlformats.org/drawingml/2006/main" xmlns:r="http://schemas.openxmlformats.org/officeDocument/2006/relationships" xmlns:p="http://schemas.openxmlformats.org/presentationml/2006/main">
+  <p:cSld>
+    <p:spTree>
+      <p:nvGrpSpPr>
+        <p:cNvPr id="1" name=""/>
+        <p:cNvGrpSpPr/>
+        <p:nvPr/>
+      </p:nvGrpSpPr>
+      <p:grpSpPr>
+        <a:xfrm>
+          <a:off x="0" y="0"/>
+          <a:ext cx="0" cy="0"/>
+          <a:chOff x="0" y="0"/>
+          <a:chExt cx="0" cy="0"/>
+        </a:xfrm>
+      </p:grpSpPr>
+      <p:sp>
+        <p:nvSpPr>
+          <p:cNvPr id="2" name="Title 1"/>
+          <p:cNvSpPr>
+            <a:spLocks noGrp="1"/>
+          </p:cNvSpPr>
+          <p:nvPr>
+            <p:ph type="title"/>
+          </p:nvPr>
+        </p:nvSpPr>
+        <p:spPr>
+          <a:xfrm>
+            <a:off x="0" y="0"/>
+            <a:ext cx="10419723" cy="565224"/>
+          </a:xfrm>
+        </p:spPr>
+        <p:txBody>
+          <a:bodyPr>
+            <a:normAutofit/>
+          </a:bodyPr>
+          <a:lstStyle/>
+          <a:p>
+            <a:r>
+              <a:rPr lang="en-US" sz="2400" dirty="0"/>
+              <a:t>Question 25: Determine the Top-Performing Salespersons Based on Total Sales</a:t>
+            </a:r>
+          </a:p>
+        </p:txBody>
+      </p:sp>
+      <p:sp>
+        <p:nvSpPr>
+          <p:cNvPr id="3" name="Text Placeholder 2"/>
+          <p:cNvSpPr>
+            <a:spLocks noGrp="1"/>
+          </p:cNvSpPr>
+          <p:nvPr>
+            <p:ph type="body" idx="1"/>
+          </p:nvPr>
+        </p:nvSpPr>
+        <p:spPr>
+          <a:xfrm>
+            <a:off x="0" y="469052"/>
+            <a:ext cx="5157787" cy="440032"/>
+          </a:xfrm>
+        </p:spPr>
+        <p:txBody>
+          <a:bodyPr/>
+          <a:lstStyle/>
+          <a:p>
+            <a:r>
+              <a:rPr lang="en-US" dirty="0" smtClean="0"/>
+              <a:t>Code</a:t>
+            </a:r>
+            <a:endParaRPr lang="en-US" dirty="0"/>
+          </a:p>
+        </p:txBody>
+      </p:sp>
+      <p:pic>
+        <p:nvPicPr>
+          <p:cNvPr id="7" name="Content Placeholder 6"/>
+          <p:cNvPicPr>
+            <a:picLocks noGrp="1" noChangeAspect="1"/>
+          </p:cNvPicPr>
+          <p:nvPr>
+            <p:ph sz="half" idx="2"/>
+          </p:nvPr>
+        </p:nvPicPr>
+        <p:blipFill>
+          <a:blip r:embed="rId2" cstate="print">
+            <a:extLst>
+              <a:ext uri="{28A0092B-C50C-407E-A947-70E740481C1C}">
+                <a14:useLocalDpi xmlns:a14="http://schemas.microsoft.com/office/drawing/2010/main" val="0"/>
+              </a:ext>
+            </a:extLst>
+          </a:blip>
+          <a:stretch>
+            <a:fillRect/>
+          </a:stretch>
+        </p:blipFill>
+        <p:spPr>
+          <a:xfrm>
             <a:off x="0" y="909084"/>
             <a:ext cx="6757987" cy="1041990"/>
           </a:xfrm>
@@ -12150,7 +12443,7 @@
         </p:nvSpPr>
         <p:spPr>
           <a:xfrm>
-            <a:off x="7192926" y="469053"/>
+            <a:off x="7192926" y="442927"/>
             <a:ext cx="4162462" cy="440032"/>
           </a:xfrm>
         </p:spPr>
@@ -12160,7 +12453,7 @@
           <a:p>
             <a:r>
               <a:rPr lang="en-US" dirty="0" smtClean="0"/>
-              <a:t>Explanation</a:t>
+              <a:t>Key findings</a:t>
             </a:r>
             <a:endParaRPr lang="en-US" dirty="0"/>
           </a:p>
@@ -12184,36 +12477,50 @@
         </p:spPr>
         <p:txBody>
           <a:bodyPr>
-            <a:normAutofit fontScale="92500"/>
+            <a:normAutofit fontScale="92500" lnSpcReduction="20000"/>
           </a:bodyPr>
           <a:lstStyle/>
           <a:p>
-            <a:r>
-              <a:rPr lang="en-US" dirty="0"/>
-              <a:t>Salespersons are grouped</a:t>
-            </a:r>
-            <a:r>
-              <a:rPr lang="en-US" dirty="0" smtClean="0"/>
-              <a:t>:</a:t>
-            </a:r>
-          </a:p>
-          <a:p>
-            <a:pPr lvl="1"/>
+            <a:pPr marL="0" indent="0">
+              <a:buNone/>
+            </a:pPr>
+            <a:r>
+              <a:rPr lang="en-US" dirty="0"/>
+              <a:t>EMP9 is the top-performing salesperson, with total sales of 12,166.77</a:t>
+            </a:r>
+            <a:r>
+              <a:rPr lang="en-US" dirty="0" smtClean="0"/>
+              <a:t>.</a:t>
+            </a:r>
+          </a:p>
+          <a:p>
+            <a:pPr marL="0" indent="0">
+              <a:buNone/>
+            </a:pPr>
+            <a:r>
+              <a:rPr lang="en-US" dirty="0" smtClean="0"/>
+              <a:t>EMP7 </a:t>
+            </a:r>
+            <a:r>
+              <a:rPr lang="en-US" dirty="0"/>
+              <a:t>is second, with 11,783.97, followed by EMP15 with 11,660.49</a:t>
+            </a:r>
+            <a:r>
+              <a:rPr lang="en-US" dirty="0" smtClean="0"/>
+              <a:t>.</a:t>
+            </a:r>
+          </a:p>
+          <a:p>
+            <a:pPr marL="0" indent="0">
+              <a:buNone/>
+            </a:pPr>
             <a:r>
               <a:rPr lang="en-US" dirty="0" smtClean="0"/>
               <a:t>The </a:t>
             </a:r>
             <a:r>
               <a:rPr lang="en-US" dirty="0"/>
-              <a:t>code groups transactions according to each </a:t>
-            </a:r>
-            <a:r>
-              <a:rPr lang="en-US" dirty="0" err="1"/>
-              <a:t>salesperson.This</a:t>
-            </a:r>
-            <a:r>
-              <a:rPr lang="en-US" dirty="0"/>
-              <a:t> allows their total sales to be calculated</a:t>
+              <a:t>top three salespersons generated totals above 11,000 each</a:t>
             </a:r>
             <a:r>
               <a:rPr lang="en-US" dirty="0" smtClean="0"/>
@@ -12221,44 +12528,16 @@
             </a:r>
           </a:p>
           <a:p>
+            <a:pPr marL="0" indent="0">
+              <a:buNone/>
+            </a:pPr>
             <a:r>
               <a:rPr lang="en-US" dirty="0" smtClean="0"/>
               <a:t>Sales </a:t>
             </a:r>
             <a:r>
               <a:rPr lang="en-US" dirty="0"/>
-              <a:t>are ranked</a:t>
-            </a:r>
-            <a:r>
-              <a:rPr lang="en-US" dirty="0" smtClean="0"/>
-              <a:t>:</a:t>
-            </a:r>
-          </a:p>
-          <a:p>
-            <a:pPr lvl="1"/>
-            <a:r>
-              <a:rPr lang="en-US" dirty="0" smtClean="0"/>
-              <a:t>sum</a:t>
-            </a:r>
-            <a:r>
-              <a:rPr lang="en-US" dirty="0"/>
-              <a:t>() calculates total sales, while </a:t>
-            </a:r>
-            <a:r>
-              <a:rPr lang="en-US" dirty="0" err="1"/>
-              <a:t>sort_values</a:t>
-            </a:r>
-            <a:r>
-              <a:rPr lang="en-US" dirty="0"/>
-              <a:t>() ranks them from highest to </a:t>
-            </a:r>
-            <a:r>
-              <a:rPr lang="en-US" dirty="0" err="1"/>
-              <a:t>lowest.The</a:t>
-            </a:r>
-            <a:r>
-              <a:rPr lang="en-US" dirty="0"/>
-              <a:t> salesperson at the top has the highest total sales</a:t>
+              <a:t>performance varies considerably across the salespersons, with the lowest totals being much smaller than the highest</a:t>
             </a:r>
             <a:r>
               <a:rPr lang="en-US" dirty="0" smtClean="0"/>
@@ -12266,37 +12545,18 @@
             </a:r>
           </a:p>
           <a:p>
-            <a:r>
-              <a:rPr lang="en-US" dirty="0" smtClean="0"/>
-              <a:t>Sales </a:t>
-            </a:r>
-            <a:r>
-              <a:rPr lang="en-US" dirty="0"/>
-              <a:t>performance is compared</a:t>
-            </a:r>
-            <a:r>
-              <a:rPr lang="en-US" dirty="0" smtClean="0"/>
-              <a:t>:</a:t>
-            </a:r>
-          </a:p>
-          <a:p>
-            <a:pPr lvl="1"/>
+            <a:pPr marL="0" indent="0">
+              <a:buNone/>
+            </a:pPr>
             <a:r>
               <a:rPr lang="en-US" dirty="0" smtClean="0"/>
               <a:t>The </a:t>
             </a:r>
             <a:r>
               <a:rPr lang="en-US" dirty="0"/>
-              <a:t>results show differences in sales generated by each </a:t>
-            </a:r>
-            <a:r>
-              <a:rPr lang="en-US" dirty="0" err="1"/>
-              <a:t>salesperson.This</a:t>
-            </a:r>
-            <a:r>
-              <a:rPr lang="en-US" dirty="0"/>
-              <a:t> helps identify the top-performing salespersons.</a:t>
-            </a:r>
+              <a:t>results show that EMP9 generated the highest overall sales among all the salespersons.</a:t>
+            </a:r>
+            <a:endParaRPr lang="en-US" dirty="0"/>
           </a:p>
         </p:txBody>
       </p:sp>
@@ -12511,7 +12771,7 @@
           <a:p>
             <a:r>
               <a:rPr lang="en-US" dirty="0" smtClean="0"/>
-              <a:t>explanation</a:t>
+              <a:t>Key findings</a:t>
             </a:r>
             <a:endParaRPr lang="en-US" dirty="0"/>
           </a:p>
@@ -12527,83 +12787,107 @@
             <p:ph sz="quarter" idx="4"/>
           </p:nvPr>
         </p:nvSpPr>
-        <p:spPr/>
+        <p:spPr>
+          <a:xfrm>
+            <a:off x="6172200" y="2505075"/>
+            <a:ext cx="5183188" cy="4352926"/>
+          </a:xfrm>
+        </p:spPr>
         <p:txBody>
           <a:bodyPr>
-            <a:normAutofit fontScale="70000" lnSpcReduction="20000"/>
+            <a:normAutofit fontScale="85000" lnSpcReduction="20000"/>
           </a:bodyPr>
           <a:lstStyle/>
           <a:p>
-            <a:r>
-              <a:rPr lang="en-US" dirty="0" smtClean="0"/>
-              <a:t>Importing </a:t>
-            </a:r>
-            <a:r>
-              <a:rPr lang="en-US" dirty="0" err="1" smtClean="0"/>
-              <a:t>LibrariesPandas</a:t>
-            </a:r>
-            <a:r>
-              <a:rPr lang="en-US" dirty="0" smtClean="0"/>
-              <a:t> was imported to work with and analyze the dataset. The OS library was also imported to check the current working directory.</a:t>
-            </a:r>
-          </a:p>
-          <a:p>
-            <a:r>
-              <a:rPr lang="en-US" dirty="0" smtClean="0"/>
-              <a:t>Checking the Working </a:t>
-            </a:r>
-            <a:r>
-              <a:rPr lang="en-US" dirty="0" smtClean="0"/>
-              <a:t>Directory</a:t>
-            </a:r>
-          </a:p>
-          <a:p>
-            <a:pPr lvl="1"/>
-            <a:r>
-              <a:rPr lang="en-US" dirty="0" err="1" smtClean="0"/>
-              <a:t>os.getcwd</a:t>
-            </a:r>
-            <a:r>
-              <a:rPr lang="en-US" dirty="0" smtClean="0"/>
-              <a:t>() was used to find the folder where Python is currently working. This helps ensure Python can locate the dataset correctly.</a:t>
-            </a:r>
-          </a:p>
-          <a:p>
-            <a:r>
-              <a:rPr lang="en-US" dirty="0" smtClean="0"/>
-              <a:t>Importing and Verifying the </a:t>
-            </a:r>
-            <a:r>
-              <a:rPr lang="en-US" dirty="0" err="1" smtClean="0"/>
-              <a:t>Datasetpd.read_csv</a:t>
-            </a:r>
-            <a:r>
-              <a:rPr lang="en-US" dirty="0" smtClean="0"/>
-              <a:t>() was used to load the retail sales CSV file into a </a:t>
-            </a:r>
-            <a:r>
-              <a:rPr lang="en-US" dirty="0" err="1" smtClean="0"/>
+            <a:pPr marL="514350" indent="-514350">
+              <a:buAutoNum type="arabicPeriod"/>
+            </a:pPr>
+            <a:r>
+              <a:rPr lang="en-US" dirty="0" smtClean="0"/>
+              <a:t>The </a:t>
+            </a:r>
+            <a:r>
+              <a:rPr lang="en-US" dirty="0"/>
+              <a:t>required Python libraries were successfully imported, allowing the dataset to be worked with</a:t>
+            </a:r>
+            <a:r>
+              <a:rPr lang="en-US" dirty="0" smtClean="0"/>
+              <a:t>.</a:t>
+            </a:r>
+          </a:p>
+          <a:p>
+            <a:pPr marL="514350" indent="-514350">
+              <a:buAutoNum type="arabicPeriod"/>
+            </a:pPr>
+            <a:r>
+              <a:rPr lang="en-US" dirty="0" smtClean="0"/>
+              <a:t>The </a:t>
+            </a:r>
+            <a:r>
+              <a:rPr lang="en-US" dirty="0"/>
+              <a:t>working directory was checked successfully, confirming where Python was looking for the dataset</a:t>
+            </a:r>
+            <a:r>
+              <a:rPr lang="en-US" dirty="0" smtClean="0"/>
+              <a:t>.</a:t>
+            </a:r>
+          </a:p>
+          <a:p>
+            <a:pPr marL="514350" indent="-514350">
+              <a:buAutoNum type="arabicPeriod"/>
+            </a:pPr>
+            <a:r>
+              <a:rPr lang="en-US" dirty="0" smtClean="0"/>
+              <a:t>The </a:t>
+            </a:r>
+            <a:r>
+              <a:rPr lang="en-US" dirty="0"/>
+              <a:t>retail sales CSV file was successfully loaded into a </a:t>
+            </a:r>
+            <a:r>
+              <a:rPr lang="en-US" dirty="0" err="1"/>
               <a:t>DataFrame</a:t>
             </a:r>
             <a:r>
-              <a:rPr lang="en-US" dirty="0" smtClean="0"/>
+              <a:rPr lang="en-US" dirty="0"/>
               <a:t> called </a:t>
             </a:r>
             <a:r>
-              <a:rPr lang="en-US" dirty="0" err="1" smtClean="0"/>
+              <a:rPr lang="en-US" dirty="0" err="1"/>
               <a:t>df</a:t>
             </a:r>
             <a:r>
-              <a:rPr lang="en-US" dirty="0" smtClean="0"/>
-              <a:t>. The dataset can then be verified using </a:t>
-            </a:r>
-            <a:r>
-              <a:rPr lang="en-US" dirty="0" err="1" smtClean="0"/>
+              <a:rPr lang="en-US" dirty="0"/>
+              <a:t>, meaning the dataset was available for analysis</a:t>
+            </a:r>
+            <a:r>
+              <a:rPr lang="en-US" dirty="0" smtClean="0"/>
+              <a:t>.</a:t>
+            </a:r>
+          </a:p>
+          <a:p>
+            <a:pPr marL="514350" indent="-514350">
+              <a:buAutoNum type="arabicPeriod"/>
+            </a:pPr>
+            <a:r>
+              <a:rPr lang="en-US" dirty="0"/>
+              <a:t>T</a:t>
+            </a:r>
+            <a:r>
+              <a:rPr lang="en-US" dirty="0" smtClean="0"/>
+              <a:t>he </a:t>
+            </a:r>
+            <a:r>
+              <a:rPr lang="en-US" dirty="0"/>
+              <a:t>first five records were displayed successfully using </a:t>
+            </a:r>
+            <a:r>
+              <a:rPr lang="en-US" dirty="0" err="1"/>
               <a:t>df.head</a:t>
             </a:r>
             <a:r>
-              <a:rPr lang="en-US" dirty="0" smtClean="0"/>
-              <a:t>() to display the first five rows.</a:t>
+              <a:rPr lang="en-US" dirty="0"/>
+              <a:t>(), confirming that the dataset loaded correctly and contains retail sales information.</a:t>
             </a:r>
             <a:endParaRPr lang="en-US" dirty="0"/>
           </a:p>
@@ -12759,8 +13043,9 @@
           <a:p>
             <a:r>
               <a:rPr lang="en-US" dirty="0" smtClean="0"/>
-              <a:t>Explanation</a:t>
-            </a:r>
+              <a:t>Key findings</a:t>
+            </a:r>
+            <a:endParaRPr lang="en-US" dirty="0" smtClean="0"/>
           </a:p>
         </p:txBody>
       </p:sp>
@@ -12777,33 +13062,50 @@
         <p:spPr/>
         <p:txBody>
           <a:bodyPr>
-            <a:normAutofit fontScale="92500" lnSpcReduction="20000"/>
+            <a:normAutofit lnSpcReduction="10000"/>
           </a:bodyPr>
           <a:lstStyle/>
           <a:p>
-            <a:r>
-              <a:rPr lang="en-US" dirty="0" smtClean="0"/>
-              <a:t>1. Rows – 2,000The first number, 2000, represents the total number of records or observations in the dataset.</a:t>
-            </a:r>
-          </a:p>
-          <a:p>
-            <a:r>
-              <a:rPr lang="en-US" dirty="0" smtClean="0"/>
-              <a:t>2. Columns – 34The second number, 34, represents the total number of variables or features in the dataset.</a:t>
-            </a:r>
-          </a:p>
-          <a:p>
-            <a:r>
-              <a:rPr lang="en-US" dirty="0" smtClean="0"/>
-              <a:t>3. Overall </a:t>
-            </a:r>
-            <a:r>
-              <a:rPr lang="en-US" dirty="0" err="1" smtClean="0"/>
-              <a:t>StructureTherefore</a:t>
-            </a:r>
-            <a:r>
-              <a:rPr lang="en-US" dirty="0" smtClean="0"/>
-              <a:t>, the dataset contains 2,000 rows and 34 columns, giving us an overview of its size and structure.</a:t>
+            <a:pPr marL="0" indent="0">
+              <a:buNone/>
+            </a:pPr>
+            <a:r>
+              <a:rPr lang="en-US" dirty="0"/>
+              <a:t>1. The dataset contains 2,000 rows, representing 2,000 records/transactions</a:t>
+            </a:r>
+            <a:r>
+              <a:rPr lang="en-US" dirty="0" smtClean="0"/>
+              <a:t>.</a:t>
+            </a:r>
+          </a:p>
+          <a:p>
+            <a:pPr marL="0" indent="0">
+              <a:buNone/>
+            </a:pPr>
+            <a:r>
+              <a:rPr lang="en-US" dirty="0" smtClean="0"/>
+              <a:t>2</a:t>
+            </a:r>
+            <a:r>
+              <a:rPr lang="en-US" dirty="0"/>
+              <a:t>. It contains 34 columns, representing 34 variables</a:t>
+            </a:r>
+            <a:r>
+              <a:rPr lang="en-US" dirty="0" smtClean="0"/>
+              <a:t>.</a:t>
+            </a:r>
+          </a:p>
+          <a:p>
+            <a:pPr marL="0" indent="0">
+              <a:buNone/>
+            </a:pPr>
+            <a:r>
+              <a:rPr lang="en-US" dirty="0" smtClean="0"/>
+              <a:t>3</a:t>
+            </a:r>
+            <a:r>
+              <a:rPr lang="en-US" dirty="0"/>
+              <a:t>. The dataset therefore has a fairly broad structure, with many variables available for customer, product, and sales analysis.</a:t>
             </a:r>
             <a:endParaRPr lang="en-US" dirty="0"/>
           </a:p>
@@ -12980,13 +13282,8 @@
           <a:p>
             <a:r>
               <a:rPr lang="en-US" dirty="0"/>
-              <a:t>E</a:t>
-            </a:r>
-            <a:r>
-              <a:rPr lang="en-US" dirty="0" smtClean="0"/>
-              <a:t>xplanation</a:t>
-            </a:r>
-            <a:endParaRPr lang="en-US" dirty="0"/>
+              <a:t>Key findings</a:t>
+            </a:r>
           </a:p>
         </p:txBody>
       </p:sp>
@@ -13002,18 +13299,96 @@
         </p:nvSpPr>
         <p:spPr/>
         <p:txBody>
-          <a:bodyPr/>
-          <a:lstStyle/>
-          <a:p>
-            <a:r>
-              <a:rPr lang="en-US" dirty="0" smtClean="0"/>
-              <a:t>This displays the 34 variable/column names in the dataset.</a:t>
-            </a:r>
-          </a:p>
-          <a:p>
-            <a:r>
-              <a:rPr lang="en-US" dirty="0" smtClean="0"/>
-              <a:t>Each column represents a different characteristic, such as customer information, sales information, or product information</a:t>
+          <a:bodyPr>
+            <a:normAutofit fontScale="85000" lnSpcReduction="20000"/>
+          </a:bodyPr>
+          <a:lstStyle/>
+          <a:p>
+            <a:pPr marL="0" indent="0">
+              <a:buNone/>
+            </a:pPr>
+            <a:r>
+              <a:rPr lang="en-US" dirty="0"/>
+              <a:t>1. The output confirms that the dataset has 34 different variables</a:t>
+            </a:r>
+            <a:r>
+              <a:rPr lang="en-US" dirty="0" smtClean="0"/>
+              <a:t>.</a:t>
+            </a:r>
+          </a:p>
+          <a:p>
+            <a:pPr marL="0" indent="0">
+              <a:buNone/>
+            </a:pPr>
+            <a:r>
+              <a:rPr lang="en-US" dirty="0" smtClean="0"/>
+              <a:t>2</a:t>
+            </a:r>
+            <a:r>
+              <a:rPr lang="en-US" dirty="0"/>
+              <a:t>. The variables cover customer information, such as </a:t>
+            </a:r>
+            <a:r>
+              <a:rPr lang="en-US" dirty="0" err="1"/>
+              <a:t>Customer_ID</a:t>
+            </a:r>
+            <a:r>
+              <a:rPr lang="en-US" dirty="0"/>
+              <a:t>, Gender, Age and </a:t>
+            </a:r>
+            <a:r>
+              <a:rPr lang="en-US" dirty="0" err="1"/>
+              <a:t>Customer_Type</a:t>
+            </a:r>
+            <a:r>
+              <a:rPr lang="en-US" dirty="0" smtClean="0"/>
+              <a:t>.</a:t>
+            </a:r>
+          </a:p>
+          <a:p>
+            <a:pPr marL="0" indent="0">
+              <a:buNone/>
+            </a:pPr>
+            <a:r>
+              <a:rPr lang="en-US" dirty="0" smtClean="0"/>
+              <a:t>3</a:t>
+            </a:r>
+            <a:r>
+              <a:rPr lang="en-US" dirty="0"/>
+              <a:t>. They also cover sales and financial information, including </a:t>
+            </a:r>
+            <a:r>
+              <a:rPr lang="en-US" dirty="0" err="1"/>
+              <a:t>Unit_Price</a:t>
+            </a:r>
+            <a:r>
+              <a:rPr lang="en-US" dirty="0"/>
+              <a:t>, Quantity, </a:t>
+            </a:r>
+            <a:r>
+              <a:rPr lang="en-US" dirty="0" err="1"/>
+              <a:t>Total_Sales</a:t>
+            </a:r>
+            <a:r>
+              <a:rPr lang="en-US" dirty="0"/>
+              <a:t>, Cost and Profit</a:t>
+            </a:r>
+            <a:r>
+              <a:rPr lang="en-US" dirty="0" smtClean="0"/>
+              <a:t>.</a:t>
+            </a:r>
+          </a:p>
+          <a:p>
+            <a:pPr marL="0" indent="0">
+              <a:buNone/>
+            </a:pPr>
+            <a:r>
+              <a:rPr lang="en-US" dirty="0" smtClean="0"/>
+              <a:t>4</a:t>
+            </a:r>
+            <a:r>
+              <a:rPr lang="en-US" dirty="0"/>
+              <a:t>. There are also product, payment, delivery, returns and customer-feedback variables.</a:t>
             </a:r>
             <a:endParaRPr lang="en-US" dirty="0"/>
           </a:p>
@@ -13182,117 +13557,142 @@
         </p:spPr>
         <p:txBody>
           <a:bodyPr>
-            <a:normAutofit lnSpcReduction="10000"/>
+            <a:normAutofit fontScale="92500"/>
           </a:bodyPr>
           <a:lstStyle/>
           <a:p>
             <a:r>
-              <a:rPr lang="en-US" dirty="0" smtClean="0"/>
-              <a:t>Explanation</a:t>
-            </a:r>
-          </a:p>
-          <a:p>
+              <a:rPr lang="en-US" dirty="0"/>
+              <a:t>Key findings</a:t>
+            </a:r>
+          </a:p>
+          <a:p>
+            <a:pPr marL="457200" indent="-457200">
+              <a:buAutoNum type="arabicPeriod"/>
+            </a:pPr>
             <a:r>
               <a:rPr lang="en-US" sz="2200" b="0" dirty="0" smtClean="0"/>
-              <a:t>. String (</a:t>
-            </a:r>
-            <a:r>
-              <a:rPr lang="en-US" sz="2200" b="0" dirty="0" err="1" smtClean="0"/>
-              <a:t>str</a:t>
+              <a:t>Text-based </a:t>
+            </a:r>
+            <a:r>
+              <a:rPr lang="en-US" sz="2200" b="0" dirty="0"/>
+              <a:t>variables such as </a:t>
+            </a:r>
+            <a:r>
+              <a:rPr lang="en-US" sz="2200" b="0" dirty="0" err="1"/>
+              <a:t>Transaction_ID</a:t>
+            </a:r>
+            <a:r>
+              <a:rPr lang="en-US" sz="2200" b="0" dirty="0"/>
+              <a:t>, </a:t>
+            </a:r>
+            <a:r>
+              <a:rPr lang="en-US" sz="2200" b="0" dirty="0" err="1"/>
+              <a:t>Customer_ID</a:t>
+            </a:r>
+            <a:r>
+              <a:rPr lang="en-US" sz="2200" b="0" dirty="0"/>
+              <a:t>, City and </a:t>
+            </a:r>
+            <a:r>
+              <a:rPr lang="en-US" sz="2200" b="0" dirty="0" err="1"/>
+              <a:t>Product_Name</a:t>
+            </a:r>
+            <a:r>
+              <a:rPr lang="en-US" sz="2200" b="0" dirty="0"/>
+              <a:t> are stored as strings</a:t>
             </a:r>
             <a:r>
               <a:rPr lang="en-US" sz="2200" b="0" dirty="0" smtClean="0"/>
-              <a:t>)Variables such as </a:t>
-            </a:r>
-            <a:r>
-              <a:rPr lang="en-US" sz="2200" b="0" dirty="0" err="1" smtClean="0"/>
-              <a:t>Transaction_ID</a:t>
-            </a:r>
+              <a:t>.</a:t>
+            </a:r>
+          </a:p>
+          <a:p>
+            <a:pPr marL="457200" indent="-457200">
+              <a:buAutoNum type="arabicPeriod"/>
+            </a:pPr>
             <a:r>
               <a:rPr lang="en-US" sz="2200" b="0" dirty="0" smtClean="0"/>
+              <a:t> </a:t>
+            </a:r>
+            <a:r>
+              <a:rPr lang="en-US" sz="2200" b="0" dirty="0"/>
+              <a:t>Numerical variables such as </a:t>
+            </a:r>
+            <a:r>
+              <a:rPr lang="en-US" sz="2200" b="0" dirty="0" err="1"/>
+              <a:t>Customer_Age</a:t>
+            </a:r>
+            <a:r>
+              <a:rPr lang="en-US" sz="2200" b="0" dirty="0"/>
               <a:t>, </a:t>
             </a:r>
             <a:r>
-              <a:rPr lang="en-US" sz="2200" b="0" dirty="0" err="1" smtClean="0"/>
-              <a:t>Customer_ID</a:t>
+              <a:rPr lang="en-US" sz="2200" b="0" dirty="0" err="1"/>
+              <a:t>Unit_Price</a:t>
+            </a:r>
+            <a:r>
+              <a:rPr lang="en-US" sz="2200" b="0" dirty="0"/>
+              <a:t>, Quantity, </a:t>
+            </a:r>
+            <a:r>
+              <a:rPr lang="en-US" sz="2200" b="0" dirty="0" err="1"/>
+              <a:t>Total_Sales</a:t>
+            </a:r>
+            <a:r>
+              <a:rPr lang="en-US" sz="2200" b="0" dirty="0"/>
+              <a:t>, Cost and Profit are stored as float64</a:t>
             </a:r>
             <a:r>
               <a:rPr lang="en-US" sz="2200" b="0" dirty="0" smtClean="0"/>
-              <a:t>, City, </a:t>
-            </a:r>
-            <a:r>
-              <a:rPr lang="en-US" sz="2200" b="0" dirty="0" err="1" smtClean="0"/>
-              <a:t>Product_Name</a:t>
-            </a:r>
+              <a:t>.</a:t>
+            </a:r>
+          </a:p>
+          <a:p>
+            <a:pPr marL="457200" indent="-457200">
+              <a:buAutoNum type="arabicPeriod"/>
+            </a:pPr>
             <a:r>
               <a:rPr lang="en-US" sz="2200" b="0" dirty="0" smtClean="0"/>
-              <a:t>, and Category are stored as strings because they contain text or </a:t>
-            </a:r>
-            <a:r>
-              <a:rPr lang="en-US" sz="2200" b="0" dirty="0" err="1" smtClean="0"/>
-              <a:t>identifiers.Float</a:t>
+              <a:t> </a:t>
+            </a:r>
+            <a:r>
+              <a:rPr lang="en-US" sz="2200" b="0" dirty="0"/>
+              <a:t>Year is stored as an integer (int64</a:t>
             </a:r>
             <a:r>
               <a:rPr lang="en-US" sz="2200" b="0" dirty="0" smtClean="0"/>
-              <a:t> (float64)</a:t>
-            </a:r>
-          </a:p>
-          <a:p>
+              <a:t>).</a:t>
+            </a:r>
+          </a:p>
+          <a:p>
+            <a:pPr marL="457200" indent="-457200">
+              <a:buAutoNum type="arabicPeriod"/>
+            </a:pPr>
             <a:r>
               <a:rPr lang="en-US" sz="2200" b="0" dirty="0" smtClean="0"/>
-              <a:t>.  Variables such as </a:t>
-            </a:r>
-            <a:r>
-              <a:rPr lang="en-US" sz="2200" b="0" dirty="0" err="1" smtClean="0"/>
-              <a:t>Customer_Age</a:t>
+              <a:t> </a:t>
+            </a:r>
+            <a:r>
+              <a:rPr lang="en-US" sz="2200" b="0" dirty="0"/>
+              <a:t>The dataset also contains categorical/text information stored as object, such as Feedback and some other categorical fields</a:t>
             </a:r>
             <a:r>
               <a:rPr lang="en-US" sz="2200" b="0" dirty="0" smtClean="0"/>
-              <a:t>, </a:t>
-            </a:r>
-            <a:r>
-              <a:rPr lang="en-US" sz="2200" b="0" dirty="0" err="1" smtClean="0"/>
-              <a:t>Unit_Price</a:t>
-            </a:r>
+              <a:t>.</a:t>
+            </a:r>
+          </a:p>
+          <a:p>
+            <a:pPr marL="457200" indent="-457200">
+              <a:buAutoNum type="arabicPeriod"/>
+            </a:pPr>
             <a:r>
               <a:rPr lang="en-US" sz="2200" b="0" dirty="0" smtClean="0"/>
-              <a:t>, Quantity, Discount, Tax, </a:t>
-            </a:r>
-            <a:r>
-              <a:rPr lang="en-US" sz="2200" b="0" dirty="0" err="1" smtClean="0"/>
-              <a:t>Total_Sales</a:t>
-            </a:r>
-            <a:r>
-              <a:rPr lang="en-US" sz="2200" b="0" dirty="0" smtClean="0"/>
-              <a:t>, Cost, and Profit are float64 because they contain numerical values, including </a:t>
-            </a:r>
-            <a:r>
-              <a:rPr lang="en-US" sz="2200" b="0" dirty="0" err="1" smtClean="0"/>
-              <a:t>decimals.Integer</a:t>
-            </a:r>
-            <a:r>
-              <a:rPr lang="en-US" sz="2200" b="0" dirty="0" smtClean="0"/>
-              <a:t> (int64)</a:t>
-            </a:r>
-          </a:p>
-          <a:p>
-            <a:r>
-              <a:rPr lang="en-US" sz="2200" b="0" dirty="0" smtClean="0"/>
-              <a:t>. The Year variable is stored as int64 because it contains whole-number values without decimal points.</a:t>
-            </a:r>
-          </a:p>
-          <a:p>
-            <a:r>
-              <a:rPr lang="en-US" sz="2200" b="0" dirty="0" smtClean="0"/>
-              <a:t>. Object (object)The output shows </a:t>
-            </a:r>
-            <a:r>
-              <a:rPr lang="en-US" sz="2200" b="0" dirty="0" err="1" smtClean="0"/>
-              <a:t>dtype</a:t>
-            </a:r>
-            <a:r>
-              <a:rPr lang="en-US" sz="2200" b="0" dirty="0" smtClean="0"/>
-              <a:t>: object because some columns contain text/categorical data, which Pandas represents as object type in this dataset.</a:t>
+              <a:t> </a:t>
+            </a:r>
+            <a:r>
+              <a:rPr lang="en-US" sz="2200" b="0" dirty="0"/>
+              <a:t>The output shows that the dataset contains both categorical and numerical data, which allows different types of analysis to be performed..</a:t>
             </a:r>
             <a:endParaRPr lang="en-US" sz="2200" b="0" dirty="0"/>
           </a:p>
@@ -13508,13 +13908,8 @@
           <a:p>
             <a:r>
               <a:rPr lang="en-US" dirty="0"/>
-              <a:t>E</a:t>
-            </a:r>
-            <a:r>
-              <a:rPr lang="en-US" dirty="0" smtClean="0"/>
-              <a:t>xplanation</a:t>
-            </a:r>
-            <a:endParaRPr lang="en-US" dirty="0"/>
+              <a:t>Key findings</a:t>
+            </a:r>
           </a:p>
         </p:txBody>
       </p:sp>
@@ -13531,62 +13926,90 @@
         <p:spPr>
           <a:xfrm>
             <a:off x="7232650" y="1698625"/>
-            <a:ext cx="5081588" cy="4098925"/>
+            <a:ext cx="5081588" cy="4597672"/>
           </a:xfrm>
         </p:spPr>
         <p:txBody>
           <a:bodyPr>
-            <a:normAutofit fontScale="77500" lnSpcReduction="20000"/>
+            <a:normAutofit fontScale="70000" lnSpcReduction="20000"/>
           </a:bodyPr>
           <a:lstStyle/>
           <a:p>
             <a:r>
-              <a:rPr lang="en-US" dirty="0" smtClean="0"/>
-              <a:t>1. Customer </a:t>
-            </a:r>
-            <a:r>
-              <a:rPr lang="en-US" dirty="0" err="1" smtClean="0"/>
-              <a:t>GenderCustomer_Gender</a:t>
-            </a:r>
-            <a:r>
-              <a:rPr lang="en-US" dirty="0" smtClean="0"/>
-              <a:t> identifies the different gender categories in the dataset. The .unique() function displays each distinct value.</a:t>
-            </a:r>
-          </a:p>
-          <a:p>
-            <a:r>
-              <a:rPr lang="en-US" dirty="0" smtClean="0"/>
-              <a:t>2. Product and Customer </a:t>
-            </a:r>
-            <a:r>
-              <a:rPr lang="en-US" dirty="0" err="1" smtClean="0"/>
-              <a:t>CategoriesCategory</a:t>
-            </a:r>
-            <a:r>
-              <a:rPr lang="en-US" dirty="0" smtClean="0"/>
-              <a:t> and </a:t>
-            </a:r>
-            <a:r>
-              <a:rPr lang="en-US" dirty="0" err="1" smtClean="0"/>
-              <a:t>Customer_Type</a:t>
-            </a:r>
-            <a:r>
-              <a:rPr lang="en-US" dirty="0" smtClean="0"/>
-              <a:t> show the different product categories and types of customers available for analysis.</a:t>
-            </a:r>
-          </a:p>
-          <a:p>
-            <a:r>
-              <a:rPr lang="en-US" dirty="0" smtClean="0"/>
-              <a:t>3. Payment, Branch and </a:t>
-            </a:r>
-            <a:r>
-              <a:rPr lang="en-US" dirty="0" err="1" smtClean="0"/>
-              <a:t>MembershipPayment_Method</a:t>
-            </a:r>
-            <a:r>
-              <a:rPr lang="en-US" dirty="0" smtClean="0"/>
-              <a:t>, Branch, and Membership identify the different payment methods, branches, and membership categories in the dataset.</a:t>
+              <a:rPr lang="en-US" dirty="0"/>
+              <a:t>1. Customer Gender has 4 distinct values: Female, Male, FEMALE, and Male, plus a missing value. This shows inconsistent gender entries</a:t>
+            </a:r>
+            <a:r>
+              <a:rPr lang="en-US" dirty="0" smtClean="0"/>
+              <a:t>.</a:t>
+            </a:r>
+          </a:p>
+          <a:p>
+            <a:r>
+              <a:rPr lang="en-US" dirty="0" smtClean="0"/>
+              <a:t>2</a:t>
+            </a:r>
+            <a:r>
+              <a:rPr lang="en-US" dirty="0"/>
+              <a:t>. Category has 9 distinct entries, including variations such as groceries and Groceries, as well as home and Home. This indicates inconsistent capitalization</a:t>
+            </a:r>
+            <a:r>
+              <a:rPr lang="en-US" dirty="0" smtClean="0"/>
+              <a:t>.</a:t>
+            </a:r>
+          </a:p>
+          <a:p>
+            <a:r>
+              <a:rPr lang="en-US" dirty="0" smtClean="0"/>
+              <a:t>3</a:t>
+            </a:r>
+            <a:r>
+              <a:rPr lang="en-US" dirty="0"/>
+              <a:t>. Payment Method has 5 values: Card, Cash, cash, Mobile, and a missing value. The Cash/cash difference shows another data inconsistency</a:t>
+            </a:r>
+            <a:r>
+              <a:rPr lang="en-US" dirty="0" smtClean="0"/>
+              <a:t>.</a:t>
+            </a:r>
+          </a:p>
+          <a:p>
+            <a:r>
+              <a:rPr lang="en-US" dirty="0" smtClean="0"/>
+              <a:t>4</a:t>
+            </a:r>
+            <a:r>
+              <a:rPr lang="en-US" dirty="0"/>
+              <a:t>. There are 5 branches: Nairobi, </a:t>
+            </a:r>
+            <a:r>
+              <a:rPr lang="en-US" dirty="0" err="1"/>
+              <a:t>Eldoret</a:t>
+            </a:r>
+            <a:r>
+              <a:rPr lang="en-US" dirty="0"/>
+              <a:t>, </a:t>
+            </a:r>
+            <a:r>
+              <a:rPr lang="en-US" dirty="0" err="1"/>
+              <a:t>Nakuru</a:t>
+            </a:r>
+            <a:r>
+              <a:rPr lang="en-US" dirty="0"/>
+              <a:t>, Mombasa, and Kisumu</a:t>
+            </a:r>
+            <a:r>
+              <a:rPr lang="en-US" dirty="0" smtClean="0"/>
+              <a:t>.</a:t>
+            </a:r>
+          </a:p>
+          <a:p>
+            <a:r>
+              <a:rPr lang="en-US" dirty="0" smtClean="0"/>
+              <a:t>5</a:t>
+            </a:r>
+            <a:r>
+              <a:rPr lang="en-US" dirty="0"/>
+              <a:t>. Customer Type has 3 categories: New, Returning, and a missing value. Membership also has inconsistent entries, including Yes/YES and No/no.</a:t>
             </a:r>
             <a:endParaRPr lang="en-US" dirty="0"/>
           </a:p>
@@ -13924,4 +14347,265 @@
     </a:ext>
   </a:extLst>
 </a:theme>
+</file>
+
+<file path=ppt/theme/theme2.xml><?xml version="1.0" encoding="utf-8"?>
+<a:theme xmlns:a="http://schemas.openxmlformats.org/drawingml/2006/main" name="Office Theme">
+  <a:themeElements>
+    <a:clrScheme name="Office">
+      <a:dk1>
+        <a:sysClr val="windowText" lastClr="000000"/>
+      </a:dk1>
+      <a:lt1>
+        <a:sysClr val="window" lastClr="FFFFFF"/>
+      </a:lt1>
+      <a:dk2>
+        <a:srgbClr val="44546A"/>
+      </a:dk2>
+      <a:lt2>
+        <a:srgbClr val="E7E6E6"/>
+      </a:lt2>
+      <a:accent1>
+        <a:srgbClr val="5B9BD5"/>
+      </a:accent1>
+      <a:accent2>
+        <a:srgbClr val="ED7D31"/>
+      </a:accent2>
+      <a:accent3>
+        <a:srgbClr val="A5A5A5"/>
+      </a:accent3>
+      <a:accent4>
+        <a:srgbClr val="FFC000"/>
+      </a:accent4>
+      <a:accent5>
+        <a:srgbClr val="4472C4"/>
+      </a:accent5>
+      <a:accent6>
+        <a:srgbClr val="70AD47"/>
+      </a:accent6>
+      <a:hlink>
+        <a:srgbClr val="0563C1"/>
+      </a:hlink>
+      <a:folHlink>
+        <a:srgbClr val="954F72"/>
+      </a:folHlink>
+    </a:clrScheme>
+    <a:fontScheme name="Office">
+      <a:majorFont>
+        <a:latin typeface="Calibri Light" panose="020F0302020204030204"/>
+        <a:ea typeface=""/>
+        <a:cs typeface=""/>
+        <a:font script="Jpan" typeface="游ゴシック Light"/>
+        <a:font script="Hang" typeface="맑은 고딕"/>
+        <a:font script="Hans" typeface="等线 Light"/>
+        <a:font script="Hant" typeface="新細明體"/>
+        <a:font script="Arab" typeface="Times New Roman"/>
+        <a:font script="Hebr" typeface="Times New Roman"/>
+        <a:font script="Thai" typeface="Angsana New"/>
+        <a:font script="Ethi" typeface="Nyala"/>
+        <a:font script="Beng" typeface="Vrinda"/>
+        <a:font script="Gujr" typeface="Shruti"/>
+        <a:font script="Khmr" typeface="MoolBoran"/>
+        <a:font script="Knda" typeface="Tunga"/>
+        <a:font script="Guru" typeface="Raavi"/>
+        <a:font script="Cans" typeface="Euphemia"/>
+        <a:font script="Cher" typeface="Plantagenet Cherokee"/>
+        <a:font script="Yiii" typeface="Microsoft Yi Baiti"/>
+        <a:font script="Tibt" typeface="Microsoft Himalaya"/>
+        <a:font script="Thaa" typeface="MV Boli"/>
+        <a:font script="Deva" typeface="Mangal"/>
+        <a:font script="Telu" typeface="Gautami"/>
+        <a:font script="Taml" typeface="Latha"/>
+        <a:font script="Syrc" typeface="Estrangelo Edessa"/>
+        <a:font script="Orya" typeface="Kalinga"/>
+        <a:font script="Mlym" typeface="Kartika"/>
+        <a:font script="Laoo" typeface="DokChampa"/>
+        <a:font script="Sinh" typeface="Iskoola Pota"/>
+        <a:font script="Mong" typeface="Mongolian Baiti"/>
+        <a:font script="Viet" typeface="Times New Roman"/>
+        <a:font script="Uigh" typeface="Microsoft Uighur"/>
+        <a:font script="Geor" typeface="Sylfaen"/>
+      </a:majorFont>
+      <a:minorFont>
+        <a:latin typeface="Calibri" panose="020F0502020204030204"/>
+        <a:ea typeface=""/>
+        <a:cs typeface=""/>
+        <a:font script="Jpan" typeface="游ゴシック"/>
+        <a:font script="Hang" typeface="맑은 고딕"/>
+        <a:font script="Hans" typeface="等线"/>
+        <a:font script="Hant" typeface="新細明體"/>
+        <a:font script="Arab" typeface="Arial"/>
+        <a:font script="Hebr" typeface="Arial"/>
+        <a:font script="Thai" typeface="Cordia New"/>
+        <a:font script="Ethi" typeface="Nyala"/>
+        <a:font script="Beng" typeface="Vrinda"/>
+        <a:font script="Gujr" typeface="Shruti"/>
+        <a:font script="Khmr" typeface="DaunPenh"/>
+        <a:font script="Knda" typeface="Tunga"/>
+        <a:font script="Guru" typeface="Raavi"/>
+        <a:font script="Cans" typeface="Euphemia"/>
+        <a:font script="Cher" typeface="Plantagenet Cherokee"/>
+        <a:font script="Yiii" typeface="Microsoft Yi Baiti"/>
+        <a:font script="Tibt" typeface="Microsoft Himalaya"/>
+        <a:font script="Thaa" typeface="MV Boli"/>
+        <a:font script="Deva" typeface="Mangal"/>
+        <a:font script="Telu" typeface="Gautami"/>
+        <a:font script="Taml" typeface="Latha"/>
+        <a:font script="Syrc" typeface="Estrangelo Edessa"/>
+        <a:font script="Orya" typeface="Kalinga"/>
+        <a:font script="Mlym" typeface="Kartika"/>
+        <a:font script="Laoo" typeface="DokChampa"/>
+        <a:font script="Sinh" typeface="Iskoola Pota"/>
+        <a:font script="Mong" typeface="Mongolian Baiti"/>
+        <a:font script="Viet" typeface="Arial"/>
+        <a:font script="Uigh" typeface="Microsoft Uighur"/>
+        <a:font script="Geor" typeface="Sylfaen"/>
+      </a:minorFont>
+    </a:fontScheme>
+    <a:fmtScheme name="Office">
+      <a:fillStyleLst>
+        <a:solidFill>
+          <a:schemeClr val="phClr"/>
+        </a:solidFill>
+        <a:gradFill rotWithShape="1">
+          <a:gsLst>
+            <a:gs pos="0">
+              <a:schemeClr val="phClr">
+                <a:lumMod val="110000"/>
+                <a:satMod val="105000"/>
+                <a:tint val="67000"/>
+              </a:schemeClr>
+            </a:gs>
+            <a:gs pos="50000">
+              <a:schemeClr val="phClr">
+                <a:lumMod val="105000"/>
+                <a:satMod val="103000"/>
+                <a:tint val="73000"/>
+              </a:schemeClr>
+            </a:gs>
+            <a:gs pos="100000">
+              <a:schemeClr val="phClr">
+                <a:lumMod val="105000"/>
+                <a:satMod val="109000"/>
+                <a:tint val="81000"/>
+              </a:schemeClr>
+            </a:gs>
+          </a:gsLst>
+          <a:lin ang="5400000" scaled="0"/>
+        </a:gradFill>
+        <a:gradFill rotWithShape="1">
+          <a:gsLst>
+            <a:gs pos="0">
+              <a:schemeClr val="phClr">
+                <a:satMod val="103000"/>
+                <a:lumMod val="102000"/>
+                <a:tint val="94000"/>
+              </a:schemeClr>
+            </a:gs>
+            <a:gs pos="50000">
+              <a:schemeClr val="phClr">
+                <a:satMod val="110000"/>
+                <a:lumMod val="100000"/>
+                <a:shade val="100000"/>
+              </a:schemeClr>
+            </a:gs>
+            <a:gs pos="100000">
+              <a:schemeClr val="phClr">
+                <a:lumMod val="99000"/>
+                <a:satMod val="120000"/>
+                <a:shade val="78000"/>
+              </a:schemeClr>
+            </a:gs>
+          </a:gsLst>
+          <a:lin ang="5400000" scaled="0"/>
+        </a:gradFill>
+      </a:fillStyleLst>
+      <a:lnStyleLst>
+        <a:ln w="6350" cap="flat" cmpd="sng" algn="ctr">
+          <a:solidFill>
+            <a:schemeClr val="phClr"/>
+          </a:solidFill>
+          <a:prstDash val="solid"/>
+          <a:miter lim="800000"/>
+        </a:ln>
+        <a:ln w="12700" cap="flat" cmpd="sng" algn="ctr">
+          <a:solidFill>
+            <a:schemeClr val="phClr"/>
+          </a:solidFill>
+          <a:prstDash val="solid"/>
+          <a:miter lim="800000"/>
+        </a:ln>
+        <a:ln w="19050" cap="flat" cmpd="sng" algn="ctr">
+          <a:solidFill>
+            <a:schemeClr val="phClr"/>
+          </a:solidFill>
+          <a:prstDash val="solid"/>
+          <a:miter lim="800000"/>
+        </a:ln>
+      </a:lnStyleLst>
+      <a:effectStyleLst>
+        <a:effectStyle>
+          <a:effectLst/>
+        </a:effectStyle>
+        <a:effectStyle>
+          <a:effectLst/>
+        </a:effectStyle>
+        <a:effectStyle>
+          <a:effectLst>
+            <a:outerShdw blurRad="57150" dist="19050" dir="5400000" algn="ctr" rotWithShape="0">
+              <a:srgbClr val="000000">
+                <a:alpha val="63000"/>
+              </a:srgbClr>
+            </a:outerShdw>
+          </a:effectLst>
+        </a:effectStyle>
+      </a:effectStyleLst>
+      <a:bgFillStyleLst>
+        <a:solidFill>
+          <a:schemeClr val="phClr"/>
+        </a:solidFill>
+        <a:solidFill>
+          <a:schemeClr val="phClr">
+            <a:tint val="95000"/>
+            <a:satMod val="170000"/>
+          </a:schemeClr>
+        </a:solidFill>
+        <a:gradFill rotWithShape="1">
+          <a:gsLst>
+            <a:gs pos="0">
+              <a:schemeClr val="phClr">
+                <a:tint val="93000"/>
+                <a:satMod val="150000"/>
+                <a:shade val="98000"/>
+                <a:lumMod val="102000"/>
+              </a:schemeClr>
+            </a:gs>
+            <a:gs pos="50000">
+              <a:schemeClr val="phClr">
+                <a:tint val="98000"/>
+                <a:satMod val="130000"/>
+                <a:shade val="90000"/>
+                <a:lumMod val="103000"/>
+              </a:schemeClr>
+            </a:gs>
+            <a:gs pos="100000">
+              <a:schemeClr val="phClr">
+                <a:shade val="63000"/>
+                <a:satMod val="120000"/>
+              </a:schemeClr>
+            </a:gs>
+          </a:gsLst>
+          <a:lin ang="5400000" scaled="0"/>
+        </a:gradFill>
+      </a:bgFillStyleLst>
+    </a:fmtScheme>
+  </a:themeElements>
+  <a:objectDefaults/>
+  <a:extraClrSchemeLst/>
+  <a:extLst>
+    <a:ext uri="{05A4C25C-085E-4340-85A3-A5531E510DB2}">
+      <thm15:themeFamily xmlns:thm15="http://schemas.microsoft.com/office/thememl/2012/main" name="Office Theme" id="{62F939B6-93AF-4DB8-9C6B-D6C7DFDC589F}" vid="{4A3C46E8-61CC-4603-A589-7422A47A8E4A}"/>
+    </a:ext>
+  </a:extLst>
+</a:theme>
 </file>